--- a/output/flipkart/flipkart_enhanced_brand_book.pptx
+++ b/output/flipkart/flipkart_enhanced_brand_book.pptx
@@ -15,20 +15,6 @@
     <p:sldId id="263" r:id="rId14"/>
     <p:sldId id="264" r:id="rId15"/>
     <p:sldId id="265" r:id="rId16"/>
-    <p:sldId id="266" r:id="rId17"/>
-    <p:sldId id="267" r:id="rId18"/>
-    <p:sldId id="268" r:id="rId19"/>
-    <p:sldId id="269" r:id="rId20"/>
-    <p:sldId id="270" r:id="rId21"/>
-    <p:sldId id="271" r:id="rId22"/>
-    <p:sldId id="272" r:id="rId23"/>
-    <p:sldId id="273" r:id="rId24"/>
-    <p:sldId id="274" r:id="rId25"/>
-    <p:sldId id="275" r:id="rId26"/>
-    <p:sldId id="276" r:id="rId27"/>
-    <p:sldId id="277" r:id="rId28"/>
-    <p:sldId id="278" r:id="rId29"/>
-    <p:sldId id="279" r:id="rId30"/>
   </p:sldIdLst>
   <p:sldSz cx="9144000" cy="6858000" type="screen4x3"/>
   <p:notesSz cx="6858000" cy="9144000"/>
@@ -3121,7 +3107,7 @@
       <p:grpSpPr/>
       <p:pic>
         <p:nvPicPr>
-          <p:cNvPr id="2" name="Picture 1" descr="flipkart_logo_1_20250828_172836_18c40558.png"/>
+          <p:cNvPr id="2" name="Picture 1" descr="flipkart_logo_1_20250828_181950_a6e442d2.png"/>
           <p:cNvPicPr>
             <a:picLocks noChangeAspect="1"/>
           </p:cNvPicPr>
@@ -3168,7 +3154,7 @@
             <a:pPr algn="ctr">
               <a:defRPr sz="3600" b="1">
                 <a:solidFill>
-                  <a:srgbClr val="2563EB"/>
+                  <a:srgbClr val="FFFFFF"/>
                 </a:solidFill>
                 <a:latin typeface="Inter"/>
               </a:defRPr>
@@ -3195,7 +3181,7 @@
           </a:prstGeom>
           <a:ln>
             <a:solidFill>
-              <a:srgbClr val="2563EB"/>
+              <a:srgbClr val="EA580C"/>
             </a:solidFill>
           </a:ln>
         </p:spPr>
@@ -3239,7 +3225,7 @@
             <a:pPr algn="ctr">
               <a:defRPr sz="1800" b="0">
                 <a:solidFill>
-                  <a:srgbClr val="2563EB"/>
+                  <a:srgbClr val="EA580C"/>
                 </a:solidFill>
                 <a:latin typeface="Source Sans Pro"/>
               </a:defRPr>
@@ -3336,13 +3322,13 @@
             <a:pPr>
               <a:defRPr sz="3200" b="1">
                 <a:solidFill>
-                  <a:srgbClr val="FFFFFF"/>
+                  <a:srgbClr val="EA580C"/>
                 </a:solidFill>
                 <a:latin typeface="Inter"/>
               </a:defRPr>
             </a:pPr>
             <a:r>
-              <a:t>Brand Story &amp; Mission (2/4)</a:t>
+              <a:t>Visual &amp; Photography Guidelines</a:t>
             </a:r>
           </a:p>
         </p:txBody>
@@ -3356,7 +3342,7 @@
         <p:spPr>
           <a:xfrm>
             <a:off x="1143000" y="1943100"/>
-            <a:ext cx="6858000" cy="2971800"/>
+            <a:ext cx="3429000" cy="2971800"/>
           </a:xfrm>
           <a:prstGeom prst="rect">
             <a:avLst/>
@@ -3370,15 +3356,80 @@
           <a:lstStyle/>
           <a:p>
             <a:pPr>
-              <a:defRPr sz="1600" b="0">
-                <a:solidFill>
-                  <a:srgbClr val="FFFFFF"/>
-                </a:solidFill>
-                <a:latin typeface="Source Sans Pro"/>
-              </a:defRPr>
-            </a:pPr>
-            <a:r>
-              <a:t>on a mission to redefine the E-commerce landscape. We wanted to make shopping accessible to everyone, regardless of their location or background. That's why we focused on reaching out to tier 2 &amp; tier 3 city customers and small businesses, providing them with a platform where they could access a wide range of products at competitive prices. Our brand promise is simple yet powerful - to empower individuals and businesses through our distinctive E-commerce, Retail, Technology, Logistics &amp; Supply Chain solutions. We understand the importance of affordability and trust in today's fast-paced world, which is why we have built a reputation for delivering high-quality products at affordable prices, backed by</a:t>
+              <a:defRPr sz="1800" b="0">
+                <a:solidFill>
+                  <a:srgbClr val="EA580C"/>
+                </a:solidFill>
+                <a:latin typeface="Source Sans Pro"/>
+              </a:defRPr>
+            </a:pPr>
+            <a:r>
+              <a:t>Visual Style Guidelines:</a:t>
+            </a:r>
+          </a:p>
+          <a:p>
+            <a:pPr>
+              <a:defRPr sz="1400" b="0">
+                <a:solidFill>
+                  <a:srgbClr val="EA580C"/>
+                </a:solidFill>
+                <a:latin typeface="Source Sans Pro"/>
+              </a:defRPr>
+            </a:pPr>
+            <a:r>
+              <a:t>• Visual style for Flipkart in E-commerce</a:t>
+            </a:r>
+          </a:p>
+          <a:p>
+            <a:pPr>
+              <a:defRPr sz="1400" b="0">
+                <a:solidFill>
+                  <a:srgbClr val="EA580C"/>
+                </a:solidFill>
+                <a:latin typeface="Source Sans Pro"/>
+              </a:defRPr>
+            </a:pPr>
+            <a:r>
+              <a:t>• Retail</a:t>
+            </a:r>
+          </a:p>
+          <a:p>
+            <a:pPr>
+              <a:defRPr sz="1400" b="0">
+                <a:solidFill>
+                  <a:srgbClr val="EA580C"/>
+                </a:solidFill>
+                <a:latin typeface="Source Sans Pro"/>
+              </a:defRPr>
+            </a:pPr>
+            <a:r>
+              <a:t>• Technology</a:t>
+            </a:r>
+          </a:p>
+          <a:p>
+            <a:pPr>
+              <a:defRPr sz="1400" b="0">
+                <a:solidFill>
+                  <a:srgbClr val="EA580C"/>
+                </a:solidFill>
+                <a:latin typeface="Source Sans Pro"/>
+              </a:defRPr>
+            </a:pPr>
+            <a:r>
+              <a:t>• Logistics &amp; Supply Chain: Mordern aesthetic</a:t>
+            </a:r>
+          </a:p>
+          <a:p>
+            <a:pPr>
+              <a:defRPr sz="1400" b="0">
+                <a:solidFill>
+                  <a:srgbClr val="EA580C"/>
+                </a:solidFill>
+                <a:latin typeface="Source Sans Pro"/>
+              </a:defRPr>
+            </a:pPr>
+            <a:r>
+              <a:t>• values: Customer-Centricity</a:t>
             </a:r>
           </a:p>
         </p:txBody>
@@ -3391,8 +3442,8 @@
         </p:nvSpPr>
         <p:spPr>
           <a:xfrm>
-            <a:off x="457200" y="5657850"/>
-            <a:ext cx="4114800" cy="742950"/>
+            <a:off x="5257800" y="1943100"/>
+            <a:ext cx="3429000" cy="2971800"/>
           </a:xfrm>
           <a:prstGeom prst="rect">
             <a:avLst/>
@@ -3400,97 +3451,111 @@
           <a:noFill/>
         </p:spPr>
         <p:txBody>
-          <a:bodyPr wrap="none">
+          <a:bodyPr wrap="square">
             <a:spAutoFit/>
           </a:bodyPr>
           <a:lstStyle/>
           <a:p>
-            <a:pPr algn="l">
-              <a:defRPr sz="1000" b="0">
-                <a:solidFill>
-                  <a:srgbClr val="FFFFFF"/>
-                </a:solidFill>
-                <a:latin typeface="Source Sans Pro"/>
-              </a:defRPr>
-            </a:pPr>
-            <a:r>
-              <a:t>Flipkart</a:t>
-            </a:r>
-          </a:p>
-        </p:txBody>
-      </p:sp>
-      <p:sp>
-        <p:nvSpPr>
-          <p:cNvPr id="6" name="TextBox 5"/>
-          <p:cNvSpPr txBox="1"/>
-          <p:nvPr/>
-        </p:nvSpPr>
-        <p:spPr>
-          <a:xfrm>
-            <a:off x="4572000" y="5657850"/>
-            <a:ext cx="4114800" cy="742950"/>
-          </a:xfrm>
-          <a:prstGeom prst="rect">
-            <a:avLst/>
-          </a:prstGeom>
-          <a:noFill/>
-        </p:spPr>
-        <p:txBody>
-          <a:bodyPr wrap="none">
-            <a:spAutoFit/>
-          </a:bodyPr>
-          <a:lstStyle/>
-          <a:p>
-            <a:pPr algn="r">
-              <a:defRPr sz="1000" b="0">
-                <a:solidFill>
-                  <a:srgbClr val="FFFFFF"/>
-                </a:solidFill>
-                <a:latin typeface="Source Sans Pro"/>
-              </a:defRPr>
-            </a:pPr>
-            <a:r>
-              <a:t>10</a:t>
-            </a:r>
-          </a:p>
-        </p:txBody>
-      </p:sp>
-    </p:spTree>
-  </p:cSld>
-  <p:clrMapOvr>
-    <a:masterClrMapping/>
-  </p:clrMapOvr>
-</p:sld>
-</file>
-
-<file path=ppt/slides/slide11.xml><?xml version="1.0" encoding="utf-8"?>
-<p:sld xmlns:a="http://schemas.openxmlformats.org/drawingml/2006/main" xmlns:p="http://schemas.openxmlformats.org/presentationml/2006/main" xmlns:r="http://schemas.openxmlformats.org/officeDocument/2006/relationships">
-  <p:cSld>
-    <p:spTree>
-      <p:nvGrpSpPr>
-        <p:cNvPr id="1" name=""/>
-        <p:cNvGrpSpPr/>
-        <p:nvPr/>
-      </p:nvGrpSpPr>
-      <p:sp>
-        <p:nvSpPr>
-          <p:cNvPr id="2" name="Rectangle 1"/>
+            <a:pPr>
+              <a:defRPr sz="1800" b="0">
+                <a:solidFill>
+                  <a:srgbClr val="EA580C"/>
+                </a:solidFill>
+                <a:latin typeface="Source Sans Pro"/>
+              </a:defRPr>
+            </a:pPr>
+            <a:r>
+              <a:t>Photography Guidelines:</a:t>
+            </a:r>
+          </a:p>
+          <a:p>
+            <a:pPr>
+              <a:defRPr sz="1400" b="0">
+                <a:solidFill>
+                  <a:srgbClr val="EA580C"/>
+                </a:solidFill>
+                <a:latin typeface="Source Sans Pro"/>
+              </a:defRPr>
+            </a:pPr>
+            <a:r>
+              <a:t>• Photography style for Flipkart: Mordern and E-commerce</a:t>
+            </a:r>
+          </a:p>
+          <a:p>
+            <a:pPr>
+              <a:defRPr sz="1400" b="0">
+                <a:solidFill>
+                  <a:srgbClr val="EA580C"/>
+                </a:solidFill>
+                <a:latin typeface="Source Sans Pro"/>
+              </a:defRPr>
+            </a:pPr>
+            <a:r>
+              <a:t>• Retail</a:t>
+            </a:r>
+          </a:p>
+          <a:p>
+            <a:pPr>
+              <a:defRPr sz="1400" b="0">
+                <a:solidFill>
+                  <a:srgbClr val="EA580C"/>
+                </a:solidFill>
+                <a:latin typeface="Source Sans Pro"/>
+              </a:defRPr>
+            </a:pPr>
+            <a:r>
+              <a:t>• Technology</a:t>
+            </a:r>
+          </a:p>
+          <a:p>
+            <a:pPr>
+              <a:defRPr sz="1400" b="0">
+                <a:solidFill>
+                  <a:srgbClr val="EA580C"/>
+                </a:solidFill>
+                <a:latin typeface="Source Sans Pro"/>
+              </a:defRPr>
+            </a:pPr>
+            <a:r>
+              <a:t>• Logistics &amp; Supply Chain feel. Show diversity</a:t>
+            </a:r>
+          </a:p>
+          <a:p>
+            <a:pPr>
+              <a:defRPr sz="1400" b="0">
+                <a:solidFill>
+                  <a:srgbClr val="EA580C"/>
+                </a:solidFill>
+                <a:latin typeface="Source Sans Pro"/>
+              </a:defRPr>
+            </a:pPr>
+            <a:r>
+              <a:t>• authenticity</a:t>
+            </a:r>
+          </a:p>
+        </p:txBody>
+      </p:sp>
+      <p:sp>
+        <p:nvSpPr>
+          <p:cNvPr id="6" name="Rectangle 5"/>
           <p:cNvSpPr/>
           <p:nvPr/>
         </p:nvSpPr>
         <p:spPr>
           <a:xfrm>
-            <a:off x="0" y="0"/>
-            <a:ext cx="9144000" cy="6858000"/>
+            <a:off x="5257800" y="4914900"/>
+            <a:ext cx="685800" cy="742950"/>
           </a:xfrm>
           <a:prstGeom prst="rect">
             <a:avLst/>
           </a:prstGeom>
           <a:solidFill>
-            <a:srgbClr val="1A1A1A"/>
+            <a:srgbClr val="404040"/>
           </a:solidFill>
-          <a:ln>
-            <a:noFill/>
+          <a:ln w="12700">
+            <a:solidFill>
+              <a:srgbClr val="808080"/>
+            </a:solidFill>
           </a:ln>
         </p:spPr>
         <p:style>
@@ -3515,17 +3580,16 @@
           </a:p>
         </p:txBody>
       </p:sp>
-      <p:grpSpPr/>
-      <p:sp>
-        <p:nvSpPr>
-          <p:cNvPr id="3" name="TextBox 2"/>
+      <p:sp>
+        <p:nvSpPr>
+          <p:cNvPr id="7" name="TextBox 6"/>
           <p:cNvSpPr txBox="1"/>
           <p:nvPr/>
         </p:nvSpPr>
         <p:spPr>
           <a:xfrm>
-            <a:off x="1143000" y="457200"/>
-            <a:ext cx="6858000" cy="742950"/>
+            <a:off x="5257800" y="5162550"/>
+            <a:ext cx="685800" cy="247650"/>
           </a:xfrm>
           <a:prstGeom prst="rect">
             <a:avLst/>
@@ -3538,164 +3602,41 @@
           </a:bodyPr>
           <a:lstStyle/>
           <a:p>
-            <a:pPr>
-              <a:defRPr sz="3200" b="1">
-                <a:solidFill>
-                  <a:srgbClr val="FFFFFF"/>
-                </a:solidFill>
-                <a:latin typeface="Inter"/>
-              </a:defRPr>
-            </a:pPr>
-            <a:r>
-              <a:t>Brand Story &amp; Mission (3/4)</a:t>
-            </a:r>
-          </a:p>
-        </p:txBody>
-      </p:sp>
-      <p:sp>
-        <p:nvSpPr>
-          <p:cNvPr id="4" name="TextBox 3"/>
-          <p:cNvSpPr txBox="1"/>
-          <p:nvPr/>
-        </p:nvSpPr>
-        <p:spPr>
-          <a:xfrm>
-            <a:off x="1143000" y="1943100"/>
-            <a:ext cx="6858000" cy="2971800"/>
-          </a:xfrm>
-          <a:prstGeom prst="rect">
-            <a:avLst/>
-          </a:prstGeom>
-          <a:noFill/>
-        </p:spPr>
-        <p:txBody>
-          <a:bodyPr wrap="square">
-            <a:spAutoFit/>
-          </a:bodyPr>
-          <a:lstStyle/>
-          <a:p>
-            <a:pPr>
-              <a:defRPr sz="1600" b="0">
-                <a:solidFill>
-                  <a:srgbClr val="FFFFFF"/>
-                </a:solidFill>
-                <a:latin typeface="Source Sans Pro"/>
-              </a:defRPr>
-            </a:pPr>
-            <a:r>
-              <a:t>excellent customer service and reliable delivery. What sets us apart is our commitment to growth and agility. We are constantly pushing the boundaries of innovation, exploring new ways to enhance the shopping experience for our customers. Whether it's through our cutting-edge technology solutions or our seamless logistics and supply chain network, we are always striving to stay ahead of the curve and meet the evolving needs of our diverse customer base. So, if you are a price-conscious shopper looking for the best deals, a middle-class family trying to make ends meet, a young professional juggling work and personal life, a student on a tight budget, or a small business looking</a:t>
-            </a:r>
-          </a:p>
-        </p:txBody>
-      </p:sp>
-      <p:sp>
-        <p:nvSpPr>
-          <p:cNvPr id="5" name="TextBox 4"/>
-          <p:cNvSpPr txBox="1"/>
-          <p:nvPr/>
-        </p:nvSpPr>
-        <p:spPr>
-          <a:xfrm>
-            <a:off x="457200" y="5657850"/>
-            <a:ext cx="4114800" cy="742950"/>
-          </a:xfrm>
-          <a:prstGeom prst="rect">
-            <a:avLst/>
-          </a:prstGeom>
-          <a:noFill/>
-        </p:spPr>
-        <p:txBody>
-          <a:bodyPr wrap="none">
-            <a:spAutoFit/>
-          </a:bodyPr>
-          <a:lstStyle/>
-          <a:p>
-            <a:pPr algn="l">
-              <a:defRPr sz="1000" b="0">
-                <a:solidFill>
-                  <a:srgbClr val="FFFFFF"/>
-                </a:solidFill>
-                <a:latin typeface="Source Sans Pro"/>
-              </a:defRPr>
-            </a:pPr>
-            <a:r>
-              <a:t>Flipkart</a:t>
-            </a:r>
-          </a:p>
-        </p:txBody>
-      </p:sp>
-      <p:sp>
-        <p:nvSpPr>
-          <p:cNvPr id="6" name="TextBox 5"/>
-          <p:cNvSpPr txBox="1"/>
-          <p:nvPr/>
-        </p:nvSpPr>
-        <p:spPr>
-          <a:xfrm>
-            <a:off x="4572000" y="5657850"/>
-            <a:ext cx="4114800" cy="742950"/>
-          </a:xfrm>
-          <a:prstGeom prst="rect">
-            <a:avLst/>
-          </a:prstGeom>
-          <a:noFill/>
-        </p:spPr>
-        <p:txBody>
-          <a:bodyPr wrap="none">
-            <a:spAutoFit/>
-          </a:bodyPr>
-          <a:lstStyle/>
-          <a:p>
-            <a:pPr algn="r">
-              <a:defRPr sz="1000" b="0">
-                <a:solidFill>
-                  <a:srgbClr val="FFFFFF"/>
-                </a:solidFill>
-                <a:latin typeface="Source Sans Pro"/>
-              </a:defRPr>
-            </a:pPr>
-            <a:r>
-              <a:t>11</a:t>
-            </a:r>
-          </a:p>
-        </p:txBody>
-      </p:sp>
-    </p:spTree>
-  </p:cSld>
-  <p:clrMapOvr>
-    <a:masterClrMapping/>
-  </p:clrMapOvr>
-</p:sld>
-</file>
-
-<file path=ppt/slides/slide12.xml><?xml version="1.0" encoding="utf-8"?>
-<p:sld xmlns:a="http://schemas.openxmlformats.org/drawingml/2006/main" xmlns:p="http://schemas.openxmlformats.org/presentationml/2006/main" xmlns:r="http://schemas.openxmlformats.org/officeDocument/2006/relationships">
-  <p:cSld>
-    <p:spTree>
-      <p:nvGrpSpPr>
-        <p:cNvPr id="1" name=""/>
-        <p:cNvGrpSpPr/>
-        <p:nvPr/>
-      </p:nvGrpSpPr>
-      <p:sp>
-        <p:nvSpPr>
-          <p:cNvPr id="2" name="Rectangle 1"/>
+            <a:pPr algn="ctr">
+              <a:defRPr sz="800" b="0">
+                <a:solidFill>
+                  <a:srgbClr val="EA580C"/>
+                </a:solidFill>
+                <a:latin typeface="Source Sans Pro"/>
+              </a:defRPr>
+            </a:pPr>
+            <a:r>
+              <a:t>Example</a:t>
+            </a:r>
+          </a:p>
+        </p:txBody>
+      </p:sp>
+      <p:sp>
+        <p:nvSpPr>
+          <p:cNvPr id="8" name="Rectangle 7"/>
           <p:cNvSpPr/>
           <p:nvPr/>
         </p:nvSpPr>
         <p:spPr>
           <a:xfrm>
-            <a:off x="0" y="0"/>
-            <a:ext cx="9144000" cy="6858000"/>
+            <a:off x="6629400" y="4914900"/>
+            <a:ext cx="685800" cy="742950"/>
           </a:xfrm>
           <a:prstGeom prst="rect">
             <a:avLst/>
           </a:prstGeom>
           <a:solidFill>
-            <a:srgbClr val="1A1A1A"/>
+            <a:srgbClr val="404040"/>
           </a:solidFill>
-          <a:ln>
-            <a:noFill/>
+          <a:ln w="12700">
+            <a:solidFill>
+              <a:srgbClr val="808080"/>
+            </a:solidFill>
           </a:ln>
         </p:spPr>
         <p:style>
@@ -3720,17 +3661,16 @@
           </a:p>
         </p:txBody>
       </p:sp>
-      <p:grpSpPr/>
-      <p:sp>
-        <p:nvSpPr>
-          <p:cNvPr id="3" name="TextBox 2"/>
+      <p:sp>
+        <p:nvSpPr>
+          <p:cNvPr id="9" name="TextBox 8"/>
           <p:cNvSpPr txBox="1"/>
           <p:nvPr/>
         </p:nvSpPr>
         <p:spPr>
           <a:xfrm>
-            <a:off x="1143000" y="457200"/>
-            <a:ext cx="6858000" cy="742950"/>
+            <a:off x="6629400" y="5162550"/>
+            <a:ext cx="685800" cy="247650"/>
           </a:xfrm>
           <a:prstGeom prst="rect">
             <a:avLst/>
@@ -3743,164 +3683,41 @@
           </a:bodyPr>
           <a:lstStyle/>
           <a:p>
-            <a:pPr>
-              <a:defRPr sz="3200" b="1">
-                <a:solidFill>
-                  <a:srgbClr val="FFFFFF"/>
-                </a:solidFill>
-                <a:latin typeface="Inter"/>
-              </a:defRPr>
-            </a:pPr>
-            <a:r>
-              <a:t>Brand Story &amp; Mission (4/4)</a:t>
-            </a:r>
-          </a:p>
-        </p:txBody>
-      </p:sp>
-      <p:sp>
-        <p:nvSpPr>
-          <p:cNvPr id="4" name="TextBox 3"/>
-          <p:cNvSpPr txBox="1"/>
-          <p:nvPr/>
-        </p:nvSpPr>
-        <p:spPr>
-          <a:xfrm>
-            <a:off x="1143000" y="1943100"/>
-            <a:ext cx="6858000" cy="2971800"/>
-          </a:xfrm>
-          <a:prstGeom prst="rect">
-            <a:avLst/>
-          </a:prstGeom>
-          <a:noFill/>
-        </p:spPr>
-        <p:txBody>
-          <a:bodyPr wrap="square">
-            <a:spAutoFit/>
-          </a:bodyPr>
-          <a:lstStyle/>
-          <a:p>
-            <a:pPr>
-              <a:defRPr sz="1600" b="0">
-                <a:solidFill>
-                  <a:srgbClr val="FFFFFF"/>
-                </a:solidFill>
-                <a:latin typeface="Source Sans Pro"/>
-              </a:defRPr>
-            </a:pPr>
-            <a:r>
-              <a:t>to expand your reach - Flipkart is</a:t>
-            </a:r>
-          </a:p>
-        </p:txBody>
-      </p:sp>
-      <p:sp>
-        <p:nvSpPr>
-          <p:cNvPr id="5" name="TextBox 4"/>
-          <p:cNvSpPr txBox="1"/>
-          <p:nvPr/>
-        </p:nvSpPr>
-        <p:spPr>
-          <a:xfrm>
-            <a:off x="457200" y="5657850"/>
-            <a:ext cx="4114800" cy="742950"/>
-          </a:xfrm>
-          <a:prstGeom prst="rect">
-            <a:avLst/>
-          </a:prstGeom>
-          <a:noFill/>
-        </p:spPr>
-        <p:txBody>
-          <a:bodyPr wrap="none">
-            <a:spAutoFit/>
-          </a:bodyPr>
-          <a:lstStyle/>
-          <a:p>
-            <a:pPr algn="l">
-              <a:defRPr sz="1000" b="0">
-                <a:solidFill>
-                  <a:srgbClr val="FFFFFF"/>
-                </a:solidFill>
-                <a:latin typeface="Source Sans Pro"/>
-              </a:defRPr>
-            </a:pPr>
-            <a:r>
-              <a:t>Flipkart</a:t>
-            </a:r>
-          </a:p>
-        </p:txBody>
-      </p:sp>
-      <p:sp>
-        <p:nvSpPr>
-          <p:cNvPr id="6" name="TextBox 5"/>
-          <p:cNvSpPr txBox="1"/>
-          <p:nvPr/>
-        </p:nvSpPr>
-        <p:spPr>
-          <a:xfrm>
-            <a:off x="4572000" y="5657850"/>
-            <a:ext cx="4114800" cy="742950"/>
-          </a:xfrm>
-          <a:prstGeom prst="rect">
-            <a:avLst/>
-          </a:prstGeom>
-          <a:noFill/>
-        </p:spPr>
-        <p:txBody>
-          <a:bodyPr wrap="none">
-            <a:spAutoFit/>
-          </a:bodyPr>
-          <a:lstStyle/>
-          <a:p>
-            <a:pPr algn="r">
-              <a:defRPr sz="1000" b="0">
-                <a:solidFill>
-                  <a:srgbClr val="FFFFFF"/>
-                </a:solidFill>
-                <a:latin typeface="Source Sans Pro"/>
-              </a:defRPr>
-            </a:pPr>
-            <a:r>
-              <a:t>12</a:t>
-            </a:r>
-          </a:p>
-        </p:txBody>
-      </p:sp>
-    </p:spTree>
-  </p:cSld>
-  <p:clrMapOvr>
-    <a:masterClrMapping/>
-  </p:clrMapOvr>
-</p:sld>
-</file>
-
-<file path=ppt/slides/slide13.xml><?xml version="1.0" encoding="utf-8"?>
-<p:sld xmlns:a="http://schemas.openxmlformats.org/drawingml/2006/main" xmlns:p="http://schemas.openxmlformats.org/presentationml/2006/main" xmlns:r="http://schemas.openxmlformats.org/officeDocument/2006/relationships">
-  <p:cSld>
-    <p:spTree>
-      <p:nvGrpSpPr>
-        <p:cNvPr id="1" name=""/>
-        <p:cNvGrpSpPr/>
-        <p:nvPr/>
-      </p:nvGrpSpPr>
-      <p:sp>
-        <p:nvSpPr>
-          <p:cNvPr id="2" name="Rectangle 1"/>
+            <a:pPr algn="ctr">
+              <a:defRPr sz="800" b="0">
+                <a:solidFill>
+                  <a:srgbClr val="EA580C"/>
+                </a:solidFill>
+                <a:latin typeface="Source Sans Pro"/>
+              </a:defRPr>
+            </a:pPr>
+            <a:r>
+              <a:t>Example</a:t>
+            </a:r>
+          </a:p>
+        </p:txBody>
+      </p:sp>
+      <p:sp>
+        <p:nvSpPr>
+          <p:cNvPr id="10" name="Rectangle 9"/>
           <p:cNvSpPr/>
           <p:nvPr/>
         </p:nvSpPr>
         <p:spPr>
           <a:xfrm>
-            <a:off x="0" y="0"/>
-            <a:ext cx="9144000" cy="6858000"/>
+            <a:off x="8001000" y="4914900"/>
+            <a:ext cx="685800" cy="742950"/>
           </a:xfrm>
           <a:prstGeom prst="rect">
             <a:avLst/>
           </a:prstGeom>
           <a:solidFill>
-            <a:srgbClr val="1A1A1A"/>
+            <a:srgbClr val="404040"/>
           </a:solidFill>
-          <a:ln>
-            <a:noFill/>
+          <a:ln w="12700">
+            <a:solidFill>
+              <a:srgbClr val="808080"/>
+            </a:solidFill>
           </a:ln>
         </p:spPr>
         <p:style>
@@ -3925,17 +3742,16 @@
           </a:p>
         </p:txBody>
       </p:sp>
-      <p:grpSpPr/>
-      <p:sp>
-        <p:nvSpPr>
-          <p:cNvPr id="3" name="TextBox 2"/>
+      <p:sp>
+        <p:nvSpPr>
+          <p:cNvPr id="11" name="TextBox 10"/>
           <p:cNvSpPr txBox="1"/>
           <p:nvPr/>
         </p:nvSpPr>
         <p:spPr>
           <a:xfrm>
-            <a:off x="1143000" y="457200"/>
-            <a:ext cx="6858000" cy="742950"/>
+            <a:off x="8001000" y="5162550"/>
+            <a:ext cx="685800" cy="247650"/>
           </a:xfrm>
           <a:prstGeom prst="rect">
             <a:avLst/>
@@ -3948,59 +3764,23 @@
           </a:bodyPr>
           <a:lstStyle/>
           <a:p>
-            <a:pPr>
-              <a:defRPr sz="3200" b="1">
-                <a:solidFill>
-                  <a:srgbClr val="FFFFFF"/>
-                </a:solidFill>
-                <a:latin typeface="Inter"/>
-              </a:defRPr>
-            </a:pPr>
-            <a:r>
-              <a:t>Brand Voice &amp; Tone</a:t>
-            </a:r>
-          </a:p>
-        </p:txBody>
-      </p:sp>
-      <p:sp>
-        <p:nvSpPr>
-          <p:cNvPr id="4" name="TextBox 3"/>
-          <p:cNvSpPr txBox="1"/>
-          <p:nvPr/>
-        </p:nvSpPr>
-        <p:spPr>
-          <a:xfrm>
-            <a:off x="1143000" y="1943100"/>
-            <a:ext cx="6858000" cy="2971800"/>
-          </a:xfrm>
-          <a:prstGeom prst="rect">
-            <a:avLst/>
-          </a:prstGeom>
-          <a:noFill/>
-        </p:spPr>
-        <p:txBody>
-          <a:bodyPr wrap="square">
-            <a:spAutoFit/>
-          </a:bodyPr>
-          <a:lstStyle/>
-          <a:p>
-            <a:pPr>
-              <a:defRPr sz="1600" b="0">
-                <a:solidFill>
-                  <a:srgbClr val="FFFFFF"/>
-                </a:solidFill>
-                <a:latin typeface="Source Sans Pro"/>
-              </a:defRPr>
-            </a:pPr>
-            <a:r>
-              <a:t>Flipkart's brand voice is friendly, approachable, and inclusive, catering to a diverse audience of price-conscious shoppers, middle-class families, young professionals, students, digital-savvy consumers, Tier 2 &amp; Tier 3 city customers, small businesses, and value-seeking online buyers. The tone is customer-centric, focusing on innovation, affordability, trust, reliability, convenience, inclusivity, agility, empowerment, and growth. The brand voice is characterized by a balance of empathy and expertise, reflecting Flipkart's commitment to understanding and meeting the needs of its customers. It is authoritative in its knowledge</a:t>
-            </a:r>
-          </a:p>
-        </p:txBody>
-      </p:sp>
-      <p:sp>
-        <p:nvSpPr>
-          <p:cNvPr id="5" name="TextBox 4"/>
+            <a:pPr algn="ctr">
+              <a:defRPr sz="800" b="0">
+                <a:solidFill>
+                  <a:srgbClr val="EA580C"/>
+                </a:solidFill>
+                <a:latin typeface="Source Sans Pro"/>
+              </a:defRPr>
+            </a:pPr>
+            <a:r>
+              <a:t>Example</a:t>
+            </a:r>
+          </a:p>
+        </p:txBody>
+      </p:sp>
+      <p:sp>
+        <p:nvSpPr>
+          <p:cNvPr id="12" name="TextBox 11"/>
           <p:cNvSpPr txBox="1"/>
           <p:nvPr/>
         </p:nvSpPr>
@@ -4023,7 +3803,7 @@
             <a:pPr algn="l">
               <a:defRPr sz="1000" b="0">
                 <a:solidFill>
-                  <a:srgbClr val="FFFFFF"/>
+                  <a:srgbClr val="EA580C"/>
                 </a:solidFill>
                 <a:latin typeface="Source Sans Pro"/>
               </a:defRPr>
@@ -4036,7 +3816,7 @@
       </p:sp>
       <p:sp>
         <p:nvSpPr>
-          <p:cNvPr id="6" name="TextBox 5"/>
+          <p:cNvPr id="13" name="TextBox 12"/>
           <p:cNvSpPr txBox="1"/>
           <p:nvPr/>
         </p:nvSpPr>
@@ -4059,1279 +3839,13 @@
             <a:pPr algn="r">
               <a:defRPr sz="1000" b="0">
                 <a:solidFill>
-                  <a:srgbClr val="FFFFFF"/>
-                </a:solidFill>
-                <a:latin typeface="Source Sans Pro"/>
-              </a:defRPr>
-            </a:pPr>
-            <a:r>
-              <a:t>13</a:t>
-            </a:r>
-          </a:p>
-        </p:txBody>
-      </p:sp>
-    </p:spTree>
-  </p:cSld>
-  <p:clrMapOvr>
-    <a:masterClrMapping/>
-  </p:clrMapOvr>
-</p:sld>
-</file>
-
-<file path=ppt/slides/slide14.xml><?xml version="1.0" encoding="utf-8"?>
-<p:sld xmlns:a="http://schemas.openxmlformats.org/drawingml/2006/main" xmlns:p="http://schemas.openxmlformats.org/presentationml/2006/main" xmlns:r="http://schemas.openxmlformats.org/officeDocument/2006/relationships">
-  <p:cSld>
-    <p:spTree>
-      <p:nvGrpSpPr>
-        <p:cNvPr id="1" name=""/>
-        <p:cNvGrpSpPr/>
-        <p:nvPr/>
-      </p:nvGrpSpPr>
-      <p:sp>
-        <p:nvSpPr>
-          <p:cNvPr id="2" name="Rectangle 1"/>
-          <p:cNvSpPr/>
-          <p:nvPr/>
-        </p:nvSpPr>
-        <p:spPr>
-          <a:xfrm>
-            <a:off x="0" y="0"/>
-            <a:ext cx="9144000" cy="6858000"/>
-          </a:xfrm>
-          <a:prstGeom prst="rect">
-            <a:avLst/>
-          </a:prstGeom>
-          <a:solidFill>
-            <a:srgbClr val="1A1A1A"/>
-          </a:solidFill>
-          <a:ln>
-            <a:noFill/>
-          </a:ln>
-        </p:spPr>
-        <p:style>
-          <a:lnRef idx="1">
-            <a:schemeClr val="accent1"/>
-          </a:lnRef>
-          <a:fillRef idx="3">
-            <a:schemeClr val="accent1"/>
-          </a:fillRef>
-          <a:effectRef idx="2">
-            <a:schemeClr val="accent1"/>
-          </a:effectRef>
-          <a:fontRef idx="minor">
-            <a:schemeClr val="lt1"/>
-          </a:fontRef>
-        </p:style>
-        <p:txBody>
-          <a:bodyPr rtlCol="0" anchor="ctr"/>
-          <a:lstStyle/>
-          <a:p>
-            <a:pPr algn="ctr"/>
-          </a:p>
-        </p:txBody>
-      </p:sp>
-      <p:grpSpPr/>
-      <p:sp>
-        <p:nvSpPr>
-          <p:cNvPr id="3" name="TextBox 2"/>
-          <p:cNvSpPr txBox="1"/>
-          <p:nvPr/>
-        </p:nvSpPr>
-        <p:spPr>
-          <a:xfrm>
-            <a:off x="1143000" y="457200"/>
-            <a:ext cx="6858000" cy="742950"/>
-          </a:xfrm>
-          <a:prstGeom prst="rect">
-            <a:avLst/>
-          </a:prstGeom>
-          <a:noFill/>
-        </p:spPr>
-        <p:txBody>
-          <a:bodyPr wrap="none">
-            <a:spAutoFit/>
-          </a:bodyPr>
-          <a:lstStyle/>
-          <a:p>
-            <a:pPr>
-              <a:defRPr sz="3200" b="1">
-                <a:solidFill>
-                  <a:srgbClr val="FFFFFF"/>
-                </a:solidFill>
-                <a:latin typeface="Inter"/>
-              </a:defRPr>
-            </a:pPr>
-            <a:r>
-              <a:t>Messaging &amp; Value Propositions (1/2)</a:t>
-            </a:r>
-          </a:p>
-        </p:txBody>
-      </p:sp>
-      <p:sp>
-        <p:nvSpPr>
-          <p:cNvPr id="4" name="TextBox 3"/>
-          <p:cNvSpPr txBox="1"/>
-          <p:nvPr/>
-        </p:nvSpPr>
-        <p:spPr>
-          <a:xfrm>
-            <a:off x="1143000" y="1943100"/>
-            <a:ext cx="6858000" cy="2971800"/>
-          </a:xfrm>
-          <a:prstGeom prst="rect">
-            <a:avLst/>
-          </a:prstGeom>
-          <a:noFill/>
-        </p:spPr>
-        <p:txBody>
-          <a:bodyPr wrap="square">
-            <a:spAutoFit/>
-          </a:bodyPr>
-          <a:lstStyle/>
-          <a:p>
-            <a:pPr>
-              <a:defRPr sz="1600" b="0">
-                <a:solidFill>
-                  <a:srgbClr val="FFFFFF"/>
-                </a:solidFill>
-                <a:latin typeface="Source Sans Pro"/>
-              </a:defRPr>
-            </a:pPr>
-            <a:r>
-              <a:t>**Messaging Architecture for Flipkart:** **1. Price-conscious shoppers:** - Offering unbeatable deals and discounts on a wide range of products to help you save more while shopping. **2. Middle-class families:** - Providing quality products at affordable prices, making it easier for you to fulfill your family's needs without breaking the bank. **3. Young professionals:** - Curated selection of trendy and stylish products that fit your busy lifestyle, with fast delivery options to keep up with your on-the-go schedule. **4. Students:** - Exclusive student discounts and budget-friendly options on essentials like books,</a:t>
-            </a:r>
-          </a:p>
-        </p:txBody>
-      </p:sp>
-      <p:sp>
-        <p:nvSpPr>
-          <p:cNvPr id="5" name="TextBox 4"/>
-          <p:cNvSpPr txBox="1"/>
-          <p:nvPr/>
-        </p:nvSpPr>
-        <p:spPr>
-          <a:xfrm>
-            <a:off x="457200" y="5657850"/>
-            <a:ext cx="4114800" cy="742950"/>
-          </a:xfrm>
-          <a:prstGeom prst="rect">
-            <a:avLst/>
-          </a:prstGeom>
-          <a:noFill/>
-        </p:spPr>
-        <p:txBody>
-          <a:bodyPr wrap="none">
-            <a:spAutoFit/>
-          </a:bodyPr>
-          <a:lstStyle/>
-          <a:p>
-            <a:pPr algn="l">
-              <a:defRPr sz="1000" b="0">
-                <a:solidFill>
-                  <a:srgbClr val="FFFFFF"/>
-                </a:solidFill>
-                <a:latin typeface="Source Sans Pro"/>
-              </a:defRPr>
-            </a:pPr>
-            <a:r>
-              <a:t>Flipkart</a:t>
-            </a:r>
-          </a:p>
-        </p:txBody>
-      </p:sp>
-      <p:sp>
-        <p:nvSpPr>
-          <p:cNvPr id="6" name="TextBox 5"/>
-          <p:cNvSpPr txBox="1"/>
-          <p:nvPr/>
-        </p:nvSpPr>
-        <p:spPr>
-          <a:xfrm>
-            <a:off x="4572000" y="5657850"/>
-            <a:ext cx="4114800" cy="742950"/>
-          </a:xfrm>
-          <a:prstGeom prst="rect">
-            <a:avLst/>
-          </a:prstGeom>
-          <a:noFill/>
-        </p:spPr>
-        <p:txBody>
-          <a:bodyPr wrap="none">
-            <a:spAutoFit/>
-          </a:bodyPr>
-          <a:lstStyle/>
-          <a:p>
-            <a:pPr algn="r">
-              <a:defRPr sz="1000" b="0">
-                <a:solidFill>
-                  <a:srgbClr val="FFFFFF"/>
-                </a:solidFill>
-                <a:latin typeface="Source Sans Pro"/>
-              </a:defRPr>
-            </a:pPr>
-            <a:r>
-              <a:t>14</a:t>
-            </a:r>
-          </a:p>
-        </p:txBody>
-      </p:sp>
-    </p:spTree>
-  </p:cSld>
-  <p:clrMapOvr>
-    <a:masterClrMapping/>
-  </p:clrMapOvr>
-</p:sld>
-</file>
-
-<file path=ppt/slides/slide15.xml><?xml version="1.0" encoding="utf-8"?>
-<p:sld xmlns:a="http://schemas.openxmlformats.org/drawingml/2006/main" xmlns:p="http://schemas.openxmlformats.org/presentationml/2006/main" xmlns:r="http://schemas.openxmlformats.org/officeDocument/2006/relationships">
-  <p:cSld>
-    <p:spTree>
-      <p:nvGrpSpPr>
-        <p:cNvPr id="1" name=""/>
-        <p:cNvGrpSpPr/>
-        <p:nvPr/>
-      </p:nvGrpSpPr>
-      <p:sp>
-        <p:nvSpPr>
-          <p:cNvPr id="2" name="Rectangle 1"/>
-          <p:cNvSpPr/>
-          <p:nvPr/>
-        </p:nvSpPr>
-        <p:spPr>
-          <a:xfrm>
-            <a:off x="0" y="0"/>
-            <a:ext cx="9144000" cy="6858000"/>
-          </a:xfrm>
-          <a:prstGeom prst="rect">
-            <a:avLst/>
-          </a:prstGeom>
-          <a:solidFill>
-            <a:srgbClr val="1A1A1A"/>
-          </a:solidFill>
-          <a:ln>
-            <a:noFill/>
-          </a:ln>
-        </p:spPr>
-        <p:style>
-          <a:lnRef idx="1">
-            <a:schemeClr val="accent1"/>
-          </a:lnRef>
-          <a:fillRef idx="3">
-            <a:schemeClr val="accent1"/>
-          </a:fillRef>
-          <a:effectRef idx="2">
-            <a:schemeClr val="accent1"/>
-          </a:effectRef>
-          <a:fontRef idx="minor">
-            <a:schemeClr val="lt1"/>
-          </a:fontRef>
-        </p:style>
-        <p:txBody>
-          <a:bodyPr rtlCol="0" anchor="ctr"/>
-          <a:lstStyle/>
-          <a:p>
-            <a:pPr algn="ctr"/>
-          </a:p>
-        </p:txBody>
-      </p:sp>
-      <p:grpSpPr/>
-      <p:sp>
-        <p:nvSpPr>
-          <p:cNvPr id="3" name="TextBox 2"/>
-          <p:cNvSpPr txBox="1"/>
-          <p:nvPr/>
-        </p:nvSpPr>
-        <p:spPr>
-          <a:xfrm>
-            <a:off x="1143000" y="457200"/>
-            <a:ext cx="6858000" cy="742950"/>
-          </a:xfrm>
-          <a:prstGeom prst="rect">
-            <a:avLst/>
-          </a:prstGeom>
-          <a:noFill/>
-        </p:spPr>
-        <p:txBody>
-          <a:bodyPr wrap="none">
-            <a:spAutoFit/>
-          </a:bodyPr>
-          <a:lstStyle/>
-          <a:p>
-            <a:pPr>
-              <a:defRPr sz="3200" b="1">
-                <a:solidFill>
-                  <a:srgbClr val="FFFFFF"/>
-                </a:solidFill>
-                <a:latin typeface="Inter"/>
-              </a:defRPr>
-            </a:pPr>
-            <a:r>
-              <a:t>Messaging &amp; Value Propositions (2/2)</a:t>
-            </a:r>
-          </a:p>
-        </p:txBody>
-      </p:sp>
-      <p:sp>
-        <p:nvSpPr>
-          <p:cNvPr id="4" name="TextBox 3"/>
-          <p:cNvSpPr txBox="1"/>
-          <p:nvPr/>
-        </p:nvSpPr>
-        <p:spPr>
-          <a:xfrm>
-            <a:off x="1143000" y="1943100"/>
-            <a:ext cx="6858000" cy="2971800"/>
-          </a:xfrm>
-          <a:prstGeom prst="rect">
-            <a:avLst/>
-          </a:prstGeom>
-          <a:noFill/>
-        </p:spPr>
-        <p:txBody>
-          <a:bodyPr wrap="square">
-            <a:spAutoFit/>
-          </a:bodyPr>
-          <a:lstStyle/>
-          <a:p>
-            <a:pPr>
-              <a:defRPr sz="1600" b="0">
-                <a:solidFill>
-                  <a:srgbClr val="FFFFFF"/>
-                </a:solidFill>
-                <a:latin typeface="Source Sans Pro"/>
-              </a:defRPr>
-            </a:pPr>
-            <a:r>
-              <a:t>electronics, and stationery, helping you stay within your budget while studying. **5. Digital-savvy consumers:** - Seamless online shopping experience with user-friendly interface, personalized recommendations, and secure payment options for a hassle-free shopping journey. **6. Tier 2 &amp;</a:t>
-            </a:r>
-          </a:p>
-        </p:txBody>
-      </p:sp>
-      <p:sp>
-        <p:nvSpPr>
-          <p:cNvPr id="5" name="TextBox 4"/>
-          <p:cNvSpPr txBox="1"/>
-          <p:nvPr/>
-        </p:nvSpPr>
-        <p:spPr>
-          <a:xfrm>
-            <a:off x="457200" y="5657850"/>
-            <a:ext cx="4114800" cy="742950"/>
-          </a:xfrm>
-          <a:prstGeom prst="rect">
-            <a:avLst/>
-          </a:prstGeom>
-          <a:noFill/>
-        </p:spPr>
-        <p:txBody>
-          <a:bodyPr wrap="none">
-            <a:spAutoFit/>
-          </a:bodyPr>
-          <a:lstStyle/>
-          <a:p>
-            <a:pPr algn="l">
-              <a:defRPr sz="1000" b="0">
-                <a:solidFill>
-                  <a:srgbClr val="FFFFFF"/>
-                </a:solidFill>
-                <a:latin typeface="Source Sans Pro"/>
-              </a:defRPr>
-            </a:pPr>
-            <a:r>
-              <a:t>Flipkart</a:t>
-            </a:r>
-          </a:p>
-        </p:txBody>
-      </p:sp>
-      <p:sp>
-        <p:nvSpPr>
-          <p:cNvPr id="6" name="TextBox 5"/>
-          <p:cNvSpPr txBox="1"/>
-          <p:nvPr/>
-        </p:nvSpPr>
-        <p:spPr>
-          <a:xfrm>
-            <a:off x="4572000" y="5657850"/>
-            <a:ext cx="4114800" cy="742950"/>
-          </a:xfrm>
-          <a:prstGeom prst="rect">
-            <a:avLst/>
-          </a:prstGeom>
-          <a:noFill/>
-        </p:spPr>
-        <p:txBody>
-          <a:bodyPr wrap="none">
-            <a:spAutoFit/>
-          </a:bodyPr>
-          <a:lstStyle/>
-          <a:p>
-            <a:pPr algn="r">
-              <a:defRPr sz="1000" b="0">
-                <a:solidFill>
-                  <a:srgbClr val="FFFFFF"/>
-                </a:solidFill>
-                <a:latin typeface="Source Sans Pro"/>
-              </a:defRPr>
-            </a:pPr>
-            <a:r>
-              <a:t>15</a:t>
-            </a:r>
-          </a:p>
-        </p:txBody>
-      </p:sp>
-    </p:spTree>
-  </p:cSld>
-  <p:clrMapOvr>
-    <a:masterClrMapping/>
-  </p:clrMapOvr>
-</p:sld>
-</file>
-
-<file path=ppt/slides/slide16.xml><?xml version="1.0" encoding="utf-8"?>
-<p:sld xmlns:a="http://schemas.openxmlformats.org/drawingml/2006/main" xmlns:p="http://schemas.openxmlformats.org/presentationml/2006/main" xmlns:r="http://schemas.openxmlformats.org/officeDocument/2006/relationships">
-  <p:cSld>
-    <p:spTree>
-      <p:nvGrpSpPr>
-        <p:cNvPr id="1" name=""/>
-        <p:cNvGrpSpPr/>
-        <p:nvPr/>
-      </p:nvGrpSpPr>
-      <p:sp>
-        <p:nvSpPr>
-          <p:cNvPr id="2" name="Rectangle 1"/>
-          <p:cNvSpPr/>
-          <p:nvPr/>
-        </p:nvSpPr>
-        <p:spPr>
-          <a:xfrm>
-            <a:off x="0" y="0"/>
-            <a:ext cx="9144000" cy="6858000"/>
-          </a:xfrm>
-          <a:prstGeom prst="rect">
-            <a:avLst/>
-          </a:prstGeom>
-          <a:solidFill>
-            <a:srgbClr val="1A1A1A"/>
-          </a:solidFill>
-          <a:ln>
-            <a:noFill/>
-          </a:ln>
-        </p:spPr>
-        <p:style>
-          <a:lnRef idx="1">
-            <a:schemeClr val="accent1"/>
-          </a:lnRef>
-          <a:fillRef idx="3">
-            <a:schemeClr val="accent1"/>
-          </a:fillRef>
-          <a:effectRef idx="2">
-            <a:schemeClr val="accent1"/>
-          </a:effectRef>
-          <a:fontRef idx="minor">
-            <a:schemeClr val="lt1"/>
-          </a:fontRef>
-        </p:style>
-        <p:txBody>
-          <a:bodyPr rtlCol="0" anchor="ctr"/>
-          <a:lstStyle/>
-          <a:p>
-            <a:pPr algn="ctr"/>
-          </a:p>
-        </p:txBody>
-      </p:sp>
-      <p:grpSpPr/>
-      <p:sp>
-        <p:nvSpPr>
-          <p:cNvPr id="3" name="TextBox 2"/>
-          <p:cNvSpPr txBox="1"/>
-          <p:nvPr/>
-        </p:nvSpPr>
-        <p:spPr>
-          <a:xfrm>
-            <a:off x="1143000" y="457200"/>
-            <a:ext cx="6858000" cy="742950"/>
-          </a:xfrm>
-          <a:prstGeom prst="rect">
-            <a:avLst/>
-          </a:prstGeom>
-          <a:noFill/>
-        </p:spPr>
-        <p:txBody>
-          <a:bodyPr wrap="none">
-            <a:spAutoFit/>
-          </a:bodyPr>
-          <a:lstStyle/>
-          <a:p>
-            <a:pPr>
-              <a:defRPr sz="3200" b="1">
-                <a:solidFill>
-                  <a:srgbClr val="FFFFFF"/>
-                </a:solidFill>
-                <a:latin typeface="Inter"/>
-              </a:defRPr>
-            </a:pPr>
-            <a:r>
-              <a:t>Marketing Copy: Website</a:t>
-            </a:r>
-          </a:p>
-        </p:txBody>
-      </p:sp>
-      <p:sp>
-        <p:nvSpPr>
-          <p:cNvPr id="4" name="TextBox 3"/>
-          <p:cNvSpPr txBox="1"/>
-          <p:nvPr/>
-        </p:nvSpPr>
-        <p:spPr>
-          <a:xfrm>
-            <a:off x="1143000" y="1943100"/>
-            <a:ext cx="6858000" cy="2971800"/>
-          </a:xfrm>
-          <a:prstGeom prst="rect">
-            <a:avLst/>
-          </a:prstGeom>
-          <a:noFill/>
-        </p:spPr>
-        <p:txBody>
-          <a:bodyPr wrap="square">
-            <a:spAutoFit/>
-          </a:bodyPr>
-          <a:lstStyle/>
-          <a:p>
-            <a:pPr>
-              <a:defRPr sz="1600" b="0">
-                <a:solidFill>
-                  <a:srgbClr val="FFFFFF"/>
-                </a:solidFill>
-                <a:latin typeface="Source Sans Pro"/>
-              </a:defRPr>
-            </a:pPr>
-            <a:r>
-              <a:t>"Empowering Every Shopper: Flipkart's Innovative, Affordable, and Customer-Centric E-commerce Platform"</a:t>
-            </a:r>
-          </a:p>
-          <a:p>
-            <a:pPr>
-              <a:defRPr sz="1600" b="0">
-                <a:solidFill>
-                  <a:srgbClr val="FFFFFF"/>
-                </a:solidFill>
-                <a:latin typeface="Source Sans Pro"/>
-              </a:defRPr>
-            </a:pPr>
-            <a:r>
-              <a:t>"Experience Trust, Reliability, and Convenience with Flipkart - Your One-Stop Shop for Inclusive Growth and Agility"</a:t>
-            </a:r>
-          </a:p>
-        </p:txBody>
-      </p:sp>
-      <p:sp>
-        <p:nvSpPr>
-          <p:cNvPr id="5" name="TextBox 4"/>
-          <p:cNvSpPr txBox="1"/>
-          <p:nvPr/>
-        </p:nvSpPr>
-        <p:spPr>
-          <a:xfrm>
-            <a:off x="457200" y="5657850"/>
-            <a:ext cx="4114800" cy="742950"/>
-          </a:xfrm>
-          <a:prstGeom prst="rect">
-            <a:avLst/>
-          </a:prstGeom>
-          <a:noFill/>
-        </p:spPr>
-        <p:txBody>
-          <a:bodyPr wrap="none">
-            <a:spAutoFit/>
-          </a:bodyPr>
-          <a:lstStyle/>
-          <a:p>
-            <a:pPr algn="l">
-              <a:defRPr sz="1000" b="0">
-                <a:solidFill>
-                  <a:srgbClr val="FFFFFF"/>
-                </a:solidFill>
-                <a:latin typeface="Source Sans Pro"/>
-              </a:defRPr>
-            </a:pPr>
-            <a:r>
-              <a:t>Flipkart</a:t>
-            </a:r>
-          </a:p>
-        </p:txBody>
-      </p:sp>
-      <p:sp>
-        <p:nvSpPr>
-          <p:cNvPr id="6" name="TextBox 5"/>
-          <p:cNvSpPr txBox="1"/>
-          <p:nvPr/>
-        </p:nvSpPr>
-        <p:spPr>
-          <a:xfrm>
-            <a:off x="4572000" y="5657850"/>
-            <a:ext cx="4114800" cy="742950"/>
-          </a:xfrm>
-          <a:prstGeom prst="rect">
-            <a:avLst/>
-          </a:prstGeom>
-          <a:noFill/>
-        </p:spPr>
-        <p:txBody>
-          <a:bodyPr wrap="none">
-            <a:spAutoFit/>
-          </a:bodyPr>
-          <a:lstStyle/>
-          <a:p>
-            <a:pPr algn="r">
-              <a:defRPr sz="1000" b="0">
-                <a:solidFill>
-                  <a:srgbClr val="FFFFFF"/>
-                </a:solidFill>
-                <a:latin typeface="Source Sans Pro"/>
-              </a:defRPr>
-            </a:pPr>
-            <a:r>
-              <a:t>16</a:t>
-            </a:r>
-          </a:p>
-        </p:txBody>
-      </p:sp>
-    </p:spTree>
-  </p:cSld>
-  <p:clrMapOvr>
-    <a:masterClrMapping/>
-  </p:clrMapOvr>
-</p:sld>
-</file>
-
-<file path=ppt/slides/slide17.xml><?xml version="1.0" encoding="utf-8"?>
-<p:sld xmlns:a="http://schemas.openxmlformats.org/drawingml/2006/main" xmlns:p="http://schemas.openxmlformats.org/presentationml/2006/main" xmlns:r="http://schemas.openxmlformats.org/officeDocument/2006/relationships">
-  <p:cSld>
-    <p:spTree>
-      <p:nvGrpSpPr>
-        <p:cNvPr id="1" name=""/>
-        <p:cNvGrpSpPr/>
-        <p:nvPr/>
-      </p:nvGrpSpPr>
-      <p:sp>
-        <p:nvSpPr>
-          <p:cNvPr id="2" name="Rectangle 1"/>
-          <p:cNvSpPr/>
-          <p:nvPr/>
-        </p:nvSpPr>
-        <p:spPr>
-          <a:xfrm>
-            <a:off x="0" y="0"/>
-            <a:ext cx="9144000" cy="6858000"/>
-          </a:xfrm>
-          <a:prstGeom prst="rect">
-            <a:avLst/>
-          </a:prstGeom>
-          <a:solidFill>
-            <a:srgbClr val="1A1A1A"/>
-          </a:solidFill>
-          <a:ln>
-            <a:noFill/>
-          </a:ln>
-        </p:spPr>
-        <p:style>
-          <a:lnRef idx="1">
-            <a:schemeClr val="accent1"/>
-          </a:lnRef>
-          <a:fillRef idx="3">
-            <a:schemeClr val="accent1"/>
-          </a:fillRef>
-          <a:effectRef idx="2">
-            <a:schemeClr val="accent1"/>
-          </a:effectRef>
-          <a:fontRef idx="minor">
-            <a:schemeClr val="lt1"/>
-          </a:fontRef>
-        </p:style>
-        <p:txBody>
-          <a:bodyPr rtlCol="0" anchor="ctr"/>
-          <a:lstStyle/>
-          <a:p>
-            <a:pPr algn="ctr"/>
-          </a:p>
-        </p:txBody>
-      </p:sp>
-      <p:grpSpPr/>
-      <p:sp>
-        <p:nvSpPr>
-          <p:cNvPr id="3" name="TextBox 2"/>
-          <p:cNvSpPr txBox="1"/>
-          <p:nvPr/>
-        </p:nvSpPr>
-        <p:spPr>
-          <a:xfrm>
-            <a:off x="1143000" y="457200"/>
-            <a:ext cx="6858000" cy="742950"/>
-          </a:xfrm>
-          <a:prstGeom prst="rect">
-            <a:avLst/>
-          </a:prstGeom>
-          <a:noFill/>
-        </p:spPr>
-        <p:txBody>
-          <a:bodyPr wrap="none">
-            <a:spAutoFit/>
-          </a:bodyPr>
-          <a:lstStyle/>
-          <a:p>
-            <a:pPr>
-              <a:defRPr sz="3200" b="1">
-                <a:solidFill>
-                  <a:srgbClr val="FFFFFF"/>
-                </a:solidFill>
-                <a:latin typeface="Inter"/>
-              </a:defRPr>
-            </a:pPr>
-            <a:r>
-              <a:t>Marketing Copy: Email</a:t>
-            </a:r>
-          </a:p>
-        </p:txBody>
-      </p:sp>
-      <p:sp>
-        <p:nvSpPr>
-          <p:cNvPr id="4" name="TextBox 3"/>
-          <p:cNvSpPr txBox="1"/>
-          <p:nvPr/>
-        </p:nvSpPr>
-        <p:spPr>
-          <a:xfrm>
-            <a:off x="1143000" y="1943100"/>
-            <a:ext cx="6858000" cy="2971800"/>
-          </a:xfrm>
-          <a:prstGeom prst="rect">
-            <a:avLst/>
-          </a:prstGeom>
-          <a:noFill/>
-        </p:spPr>
-        <p:txBody>
-          <a:bodyPr wrap="square">
-            <a:spAutoFit/>
-          </a:bodyPr>
-          <a:lstStyle/>
-          <a:p>
-            <a:pPr>
-              <a:defRPr sz="1600" b="0">
-                <a:solidFill>
-                  <a:srgbClr val="FFFFFF"/>
-                </a:solidFill>
-                <a:latin typeface="Source Sans Pro"/>
-              </a:defRPr>
-            </a:pPr>
-            <a:r>
-              <a:t>Subject: Discover the Flipkart Difference: Customer-Centricity, Innovation, and Affordability!</a:t>
-            </a:r>
-          </a:p>
-          <a:p>
-            <a:pPr>
-              <a:defRPr sz="1600" b="0">
-                <a:solidFill>
-                  <a:srgbClr val="FFFFFF"/>
-                </a:solidFill>
-                <a:latin typeface="Source Sans Pro"/>
-              </a:defRPr>
-            </a:pPr>
-          </a:p>
-          <a:p>
-            <a:pPr>
-              <a:defRPr sz="1600" b="0">
-                <a:solidFill>
-                  <a:srgbClr val="FFFFFF"/>
-                </a:solidFill>
-                <a:latin typeface="Source Sans Pro"/>
-              </a:defRPr>
-            </a:pPr>
-            <a:r>
-              <a:t>Preview text: Experience trust, reliability, and convenience while enjoying inclusivity, agility, and empowerment. Grow with us as we cater to price-conscious shoppers, families, professionals, students, and more in Tier 2 &amp; 3 cities!</a:t>
-            </a:r>
-          </a:p>
-        </p:txBody>
-      </p:sp>
-      <p:sp>
-        <p:nvSpPr>
-          <p:cNvPr id="5" name="TextBox 4"/>
-          <p:cNvSpPr txBox="1"/>
-          <p:nvPr/>
-        </p:nvSpPr>
-        <p:spPr>
-          <a:xfrm>
-            <a:off x="457200" y="5657850"/>
-            <a:ext cx="4114800" cy="742950"/>
-          </a:xfrm>
-          <a:prstGeom prst="rect">
-            <a:avLst/>
-          </a:prstGeom>
-          <a:noFill/>
-        </p:spPr>
-        <p:txBody>
-          <a:bodyPr wrap="none">
-            <a:spAutoFit/>
-          </a:bodyPr>
-          <a:lstStyle/>
-          <a:p>
-            <a:pPr algn="l">
-              <a:defRPr sz="1000" b="0">
-                <a:solidFill>
-                  <a:srgbClr val="FFFFFF"/>
-                </a:solidFill>
-                <a:latin typeface="Source Sans Pro"/>
-              </a:defRPr>
-            </a:pPr>
-            <a:r>
-              <a:t>Flipkart</a:t>
-            </a:r>
-          </a:p>
-        </p:txBody>
-      </p:sp>
-      <p:sp>
-        <p:nvSpPr>
-          <p:cNvPr id="6" name="TextBox 5"/>
-          <p:cNvSpPr txBox="1"/>
-          <p:nvPr/>
-        </p:nvSpPr>
-        <p:spPr>
-          <a:xfrm>
-            <a:off x="4572000" y="5657850"/>
-            <a:ext cx="4114800" cy="742950"/>
-          </a:xfrm>
-          <a:prstGeom prst="rect">
-            <a:avLst/>
-          </a:prstGeom>
-          <a:noFill/>
-        </p:spPr>
-        <p:txBody>
-          <a:bodyPr wrap="none">
-            <a:spAutoFit/>
-          </a:bodyPr>
-          <a:lstStyle/>
-          <a:p>
-            <a:pPr algn="r">
-              <a:defRPr sz="1000" b="0">
-                <a:solidFill>
-                  <a:srgbClr val="FFFFFF"/>
-                </a:solidFill>
-                <a:latin typeface="Source Sans Pro"/>
-              </a:defRPr>
-            </a:pPr>
-            <a:r>
-              <a:t>17</a:t>
-            </a:r>
-          </a:p>
-        </p:txBody>
-      </p:sp>
-    </p:spTree>
-  </p:cSld>
-  <p:clrMapOvr>
-    <a:masterClrMapping/>
-  </p:clrMapOvr>
-</p:sld>
-</file>
-
-<file path=ppt/slides/slide18.xml><?xml version="1.0" encoding="utf-8"?>
-<p:sld xmlns:a="http://schemas.openxmlformats.org/drawingml/2006/main" xmlns:p="http://schemas.openxmlformats.org/presentationml/2006/main" xmlns:r="http://schemas.openxmlformats.org/officeDocument/2006/relationships">
-  <p:cSld>
-    <p:spTree>
-      <p:nvGrpSpPr>
-        <p:cNvPr id="1" name=""/>
-        <p:cNvGrpSpPr/>
-        <p:nvPr/>
-      </p:nvGrpSpPr>
-      <p:sp>
-        <p:nvSpPr>
-          <p:cNvPr id="2" name="Rectangle 1"/>
-          <p:cNvSpPr/>
-          <p:nvPr/>
-        </p:nvSpPr>
-        <p:spPr>
-          <a:xfrm>
-            <a:off x="0" y="0"/>
-            <a:ext cx="9144000" cy="6858000"/>
-          </a:xfrm>
-          <a:prstGeom prst="rect">
-            <a:avLst/>
-          </a:prstGeom>
-          <a:solidFill>
-            <a:srgbClr val="1A1A1A"/>
-          </a:solidFill>
-          <a:ln>
-            <a:noFill/>
-          </a:ln>
-        </p:spPr>
-        <p:style>
-          <a:lnRef idx="1">
-            <a:schemeClr val="accent1"/>
-          </a:lnRef>
-          <a:fillRef idx="3">
-            <a:schemeClr val="accent1"/>
-          </a:fillRef>
-          <a:effectRef idx="2">
-            <a:schemeClr val="accent1"/>
-          </a:effectRef>
-          <a:fontRef idx="minor">
-            <a:schemeClr val="lt1"/>
-          </a:fontRef>
-        </p:style>
-        <p:txBody>
-          <a:bodyPr rtlCol="0" anchor="ctr"/>
-          <a:lstStyle/>
-          <a:p>
-            <a:pPr algn="ctr"/>
-          </a:p>
-        </p:txBody>
-      </p:sp>
-      <p:grpSpPr/>
-      <p:sp>
-        <p:nvSpPr>
-          <p:cNvPr id="3" name="TextBox 2"/>
-          <p:cNvSpPr txBox="1"/>
-          <p:nvPr/>
-        </p:nvSpPr>
-        <p:spPr>
-          <a:xfrm>
-            <a:off x="1143000" y="457200"/>
-            <a:ext cx="6858000" cy="742950"/>
-          </a:xfrm>
-          <a:prstGeom prst="rect">
-            <a:avLst/>
-          </a:prstGeom>
-          <a:noFill/>
-        </p:spPr>
-        <p:txBody>
-          <a:bodyPr wrap="none">
-            <a:spAutoFit/>
-          </a:bodyPr>
-          <a:lstStyle/>
-          <a:p>
-            <a:pPr>
-              <a:defRPr sz="3200" b="1">
-                <a:solidFill>
-                  <a:srgbClr val="FFFFFF"/>
-                </a:solidFill>
-                <a:latin typeface="Inter"/>
-              </a:defRPr>
-            </a:pPr>
-            <a:r>
-              <a:t>Marketing Copy: Social Media</a:t>
-            </a:r>
-          </a:p>
-        </p:txBody>
-      </p:sp>
-      <p:sp>
-        <p:nvSpPr>
-          <p:cNvPr id="4" name="TextBox 3"/>
-          <p:cNvSpPr txBox="1"/>
-          <p:nvPr/>
-        </p:nvSpPr>
-        <p:spPr>
-          <a:xfrm>
-            <a:off x="1143000" y="1943100"/>
-            <a:ext cx="6858000" cy="2971800"/>
-          </a:xfrm>
-          <a:prstGeom prst="rect">
-            <a:avLst/>
-          </a:prstGeom>
-          <a:noFill/>
-        </p:spPr>
-        <p:txBody>
-          <a:bodyPr wrap="square">
-            <a:spAutoFit/>
-          </a:bodyPr>
-          <a:lstStyle/>
-          <a:p>
-            <a:pPr>
-              <a:defRPr sz="1600" b="0">
-                <a:solidFill>
-                  <a:srgbClr val="FFFFFF"/>
-                </a:solidFill>
-                <a:latin typeface="Source Sans Pro"/>
-              </a:defRPr>
-            </a:pPr>
-            <a:r>
-              <a:t>🌟 Get more bang for your buck with Flipkart! 🛍️ From price-conscious shoppers to young professionals and small businesses, we've got something for everyone. 💸 Shop with confidence knowing you're getting the best deal without compromising on quality. 💪 Embrace innovation, affordability, and convenience all in one place. Let's empower your shopping experience together! 🌈 #Flipkart #AffordableShopping #Innovation #Empowerment</a:t>
-            </a:r>
-          </a:p>
-        </p:txBody>
-      </p:sp>
-      <p:sp>
-        <p:nvSpPr>
-          <p:cNvPr id="5" name="TextBox 4"/>
-          <p:cNvSpPr txBox="1"/>
-          <p:nvPr/>
-        </p:nvSpPr>
-        <p:spPr>
-          <a:xfrm>
-            <a:off x="457200" y="5657850"/>
-            <a:ext cx="4114800" cy="742950"/>
-          </a:xfrm>
-          <a:prstGeom prst="rect">
-            <a:avLst/>
-          </a:prstGeom>
-          <a:noFill/>
-        </p:spPr>
-        <p:txBody>
-          <a:bodyPr wrap="none">
-            <a:spAutoFit/>
-          </a:bodyPr>
-          <a:lstStyle/>
-          <a:p>
-            <a:pPr algn="l">
-              <a:defRPr sz="1000" b="0">
-                <a:solidFill>
-                  <a:srgbClr val="FFFFFF"/>
-                </a:solidFill>
-                <a:latin typeface="Source Sans Pro"/>
-              </a:defRPr>
-            </a:pPr>
-            <a:r>
-              <a:t>Flipkart</a:t>
-            </a:r>
-          </a:p>
-        </p:txBody>
-      </p:sp>
-      <p:sp>
-        <p:nvSpPr>
-          <p:cNvPr id="6" name="TextBox 5"/>
-          <p:cNvSpPr txBox="1"/>
-          <p:nvPr/>
-        </p:nvSpPr>
-        <p:spPr>
-          <a:xfrm>
-            <a:off x="4572000" y="5657850"/>
-            <a:ext cx="4114800" cy="742950"/>
-          </a:xfrm>
-          <a:prstGeom prst="rect">
-            <a:avLst/>
-          </a:prstGeom>
-          <a:noFill/>
-        </p:spPr>
-        <p:txBody>
-          <a:bodyPr wrap="none">
-            <a:spAutoFit/>
-          </a:bodyPr>
-          <a:lstStyle/>
-          <a:p>
-            <a:pPr algn="r">
-              <a:defRPr sz="1000" b="0">
-                <a:solidFill>
-                  <a:srgbClr val="FFFFFF"/>
-                </a:solidFill>
-                <a:latin typeface="Source Sans Pro"/>
-              </a:defRPr>
-            </a:pPr>
-            <a:r>
-              <a:t>18</a:t>
-            </a:r>
-          </a:p>
-        </p:txBody>
-      </p:sp>
-    </p:spTree>
-  </p:cSld>
-  <p:clrMapOvr>
-    <a:masterClrMapping/>
-  </p:clrMapOvr>
-</p:sld>
-</file>
-
-<file path=ppt/slides/slide19.xml><?xml version="1.0" encoding="utf-8"?>
-<p:sld xmlns:a="http://schemas.openxmlformats.org/drawingml/2006/main" xmlns:p="http://schemas.openxmlformats.org/presentationml/2006/main" xmlns:r="http://schemas.openxmlformats.org/officeDocument/2006/relationships">
-  <p:cSld>
-    <p:spTree>
-      <p:nvGrpSpPr>
-        <p:cNvPr id="1" name=""/>
-        <p:cNvGrpSpPr/>
-        <p:nvPr/>
-      </p:nvGrpSpPr>
-      <p:sp>
-        <p:nvSpPr>
-          <p:cNvPr id="2" name="Rectangle 1"/>
-          <p:cNvSpPr/>
-          <p:nvPr/>
-        </p:nvSpPr>
-        <p:spPr>
-          <a:xfrm>
-            <a:off x="0" y="0"/>
-            <a:ext cx="9144000" cy="6858000"/>
-          </a:xfrm>
-          <a:prstGeom prst="rect">
-            <a:avLst/>
-          </a:prstGeom>
-          <a:solidFill>
-            <a:srgbClr val="1A1A1A"/>
-          </a:solidFill>
-          <a:ln>
-            <a:noFill/>
-          </a:ln>
-        </p:spPr>
-        <p:style>
-          <a:lnRef idx="1">
-            <a:schemeClr val="accent1"/>
-          </a:lnRef>
-          <a:fillRef idx="3">
-            <a:schemeClr val="accent1"/>
-          </a:fillRef>
-          <a:effectRef idx="2">
-            <a:schemeClr val="accent1"/>
-          </a:effectRef>
-          <a:fontRef idx="minor">
-            <a:schemeClr val="lt1"/>
-          </a:fontRef>
-        </p:style>
-        <p:txBody>
-          <a:bodyPr rtlCol="0" anchor="ctr"/>
-          <a:lstStyle/>
-          <a:p>
-            <a:pPr algn="ctr"/>
-          </a:p>
-        </p:txBody>
-      </p:sp>
-      <p:grpSpPr/>
-      <p:sp>
-        <p:nvSpPr>
-          <p:cNvPr id="3" name="TextBox 2"/>
-          <p:cNvSpPr txBox="1"/>
-          <p:nvPr/>
-        </p:nvSpPr>
-        <p:spPr>
-          <a:xfrm>
-            <a:off x="1143000" y="457200"/>
-            <a:ext cx="6858000" cy="742950"/>
-          </a:xfrm>
-          <a:prstGeom prst="rect">
-            <a:avLst/>
-          </a:prstGeom>
-          <a:noFill/>
-        </p:spPr>
-        <p:txBody>
-          <a:bodyPr wrap="none">
-            <a:spAutoFit/>
-          </a:bodyPr>
-          <a:lstStyle/>
-          <a:p>
-            <a:pPr>
-              <a:defRPr sz="3200" b="1">
-                <a:solidFill>
-                  <a:srgbClr val="FFFFFF"/>
-                </a:solidFill>
-                <a:latin typeface="Inter"/>
-              </a:defRPr>
-            </a:pPr>
-            <a:r>
-              <a:t>Marketing Copy: Ad Copy</a:t>
-            </a:r>
-          </a:p>
-        </p:txBody>
-      </p:sp>
-      <p:sp>
-        <p:nvSpPr>
-          <p:cNvPr id="4" name="TextBox 3"/>
-          <p:cNvSpPr txBox="1"/>
-          <p:nvPr/>
-        </p:nvSpPr>
-        <p:spPr>
-          <a:xfrm>
-            <a:off x="1143000" y="1943100"/>
-            <a:ext cx="6858000" cy="2971800"/>
-          </a:xfrm>
-          <a:prstGeom prst="rect">
-            <a:avLst/>
-          </a:prstGeom>
-          <a:noFill/>
-        </p:spPr>
-        <p:txBody>
-          <a:bodyPr wrap="square">
-            <a:spAutoFit/>
-          </a:bodyPr>
-          <a:lstStyle/>
-          <a:p>
-            <a:pPr>
-              <a:defRPr sz="1600" b="0">
-                <a:solidFill>
-                  <a:srgbClr val="FFFFFF"/>
-                </a:solidFill>
-                <a:latin typeface="Source Sans Pro"/>
-              </a:defRPr>
-            </a:pPr>
-            <a:r>
-              <a:t>"🎉 Get more bang for your buck with Flipkart! Shop top brands at unbeatable prices for all your needs. From tech gadgets to fashion essentials, we've got it all. Don't miss out - shop now and save big! 💸 #Flipkart #ShopSmart"</a:t>
-            </a:r>
-          </a:p>
-        </p:txBody>
-      </p:sp>
-      <p:sp>
-        <p:nvSpPr>
-          <p:cNvPr id="5" name="TextBox 4"/>
-          <p:cNvSpPr txBox="1"/>
-          <p:nvPr/>
-        </p:nvSpPr>
-        <p:spPr>
-          <a:xfrm>
-            <a:off x="457200" y="5657850"/>
-            <a:ext cx="4114800" cy="742950"/>
-          </a:xfrm>
-          <a:prstGeom prst="rect">
-            <a:avLst/>
-          </a:prstGeom>
-          <a:noFill/>
-        </p:spPr>
-        <p:txBody>
-          <a:bodyPr wrap="none">
-            <a:spAutoFit/>
-          </a:bodyPr>
-          <a:lstStyle/>
-          <a:p>
-            <a:pPr algn="l">
-              <a:defRPr sz="1000" b="0">
-                <a:solidFill>
-                  <a:srgbClr val="FFFFFF"/>
-                </a:solidFill>
-                <a:latin typeface="Source Sans Pro"/>
-              </a:defRPr>
-            </a:pPr>
-            <a:r>
-              <a:t>Flipkart</a:t>
-            </a:r>
-          </a:p>
-        </p:txBody>
-      </p:sp>
-      <p:sp>
-        <p:nvSpPr>
-          <p:cNvPr id="6" name="TextBox 5"/>
-          <p:cNvSpPr txBox="1"/>
-          <p:nvPr/>
-        </p:nvSpPr>
-        <p:spPr>
-          <a:xfrm>
-            <a:off x="4572000" y="5657850"/>
-            <a:ext cx="4114800" cy="742950"/>
-          </a:xfrm>
-          <a:prstGeom prst="rect">
-            <a:avLst/>
-          </a:prstGeom>
-          <a:noFill/>
-        </p:spPr>
-        <p:txBody>
-          <a:bodyPr wrap="none">
-            <a:spAutoFit/>
-          </a:bodyPr>
-          <a:lstStyle/>
-          <a:p>
-            <a:pPr algn="r">
-              <a:defRPr sz="1000" b="0">
-                <a:solidFill>
-                  <a:srgbClr val="FFFFFF"/>
-                </a:solidFill>
-                <a:latin typeface="Source Sans Pro"/>
-              </a:defRPr>
-            </a:pPr>
-            <a:r>
-              <a:t>19</a:t>
+                  <a:srgbClr val="EA580C"/>
+                </a:solidFill>
+                <a:latin typeface="Source Sans Pro"/>
+              </a:defRPr>
+            </a:pPr>
+            <a:r>
+              <a:t>10</a:t>
             </a:r>
           </a:p>
         </p:txBody>
@@ -5387,7 +3901,7 @@
             <a:pPr>
               <a:defRPr sz="2800" b="1">
                 <a:solidFill>
-                  <a:srgbClr val="2563EB"/>
+                  <a:srgbClr val="EA580C"/>
                 </a:solidFill>
                 <a:latin typeface="Inter"/>
               </a:defRPr>
@@ -5414,7 +3928,7 @@
           </a:prstGeom>
           <a:ln w="25400">
             <a:solidFill>
-              <a:srgbClr val="2563EB"/>
+              <a:srgbClr val="EA580C"/>
             </a:solidFill>
           </a:ln>
         </p:spPr>
@@ -5442,7 +3956,7 @@
         <p:spPr>
           <a:xfrm>
             <a:off x="457200" y="1554480"/>
-            <a:ext cx="2011680" cy="274320"/>
+            <a:ext cx="1828800" cy="274320"/>
           </a:xfrm>
           <a:prstGeom prst="rect">
             <a:avLst/>
@@ -5477,7 +3991,7 @@
         </p:nvCxnSpPr>
         <p:spPr>
           <a:xfrm>
-            <a:off x="2560320" y="1664208"/>
+            <a:off x="2331719" y="1664208"/>
             <a:ext cx="365760" cy="0"/>
           </a:xfrm>
           <a:prstGeom prst="line">
@@ -5485,7 +3999,7 @@
           </a:prstGeom>
           <a:ln w="19050">
             <a:solidFill>
-              <a:srgbClr val="2563EB"/>
+              <a:srgbClr val="EA580C"/>
             </a:solidFill>
           </a:ln>
         </p:spPr>
@@ -5512,7 +4026,7 @@
         </p:nvSpPr>
         <p:spPr>
           <a:xfrm>
-            <a:off x="3017520" y="1554480"/>
+            <a:off x="2743200" y="1554480"/>
             <a:ext cx="274320" cy="274320"/>
           </a:xfrm>
           <a:prstGeom prst="rect">
@@ -5529,7 +4043,7 @@
             <a:pPr>
               <a:defRPr sz="1200" b="1">
                 <a:solidFill>
-                  <a:srgbClr val="2563EB"/>
+                  <a:srgbClr val="EA580C"/>
                 </a:solidFill>
                 <a:latin typeface="Source Sans Pro"/>
               </a:defRPr>
@@ -5549,7 +4063,7 @@
         <p:spPr>
           <a:xfrm>
             <a:off x="457200" y="2057400"/>
-            <a:ext cx="2011680" cy="274320"/>
+            <a:ext cx="1828800" cy="274320"/>
           </a:xfrm>
           <a:prstGeom prst="rect">
             <a:avLst/>
@@ -5584,7 +4098,7 @@
         </p:nvCxnSpPr>
         <p:spPr>
           <a:xfrm>
-            <a:off x="2560320" y="2167128"/>
+            <a:off x="2331719" y="2167128"/>
             <a:ext cx="365760" cy="0"/>
           </a:xfrm>
           <a:prstGeom prst="line">
@@ -5592,7 +4106,7 @@
           </a:prstGeom>
           <a:ln w="19050">
             <a:solidFill>
-              <a:srgbClr val="2563EB"/>
+              <a:srgbClr val="EA580C"/>
             </a:solidFill>
           </a:ln>
         </p:spPr>
@@ -5619,7 +4133,7 @@
         </p:nvSpPr>
         <p:spPr>
           <a:xfrm>
-            <a:off x="3017520" y="2057400"/>
+            <a:off x="2743200" y="2057400"/>
             <a:ext cx="274320" cy="274320"/>
           </a:xfrm>
           <a:prstGeom prst="rect">
@@ -5636,7 +4150,7 @@
             <a:pPr>
               <a:defRPr sz="1200" b="1">
                 <a:solidFill>
-                  <a:srgbClr val="2563EB"/>
+                  <a:srgbClr val="EA580C"/>
                 </a:solidFill>
                 <a:latin typeface="Source Sans Pro"/>
               </a:defRPr>
@@ -5656,7 +4170,7 @@
         <p:spPr>
           <a:xfrm>
             <a:off x="457200" y="2560320"/>
-            <a:ext cx="2011680" cy="274320"/>
+            <a:ext cx="1828800" cy="274320"/>
           </a:xfrm>
           <a:prstGeom prst="rect">
             <a:avLst/>
@@ -5678,7 +4192,7 @@
               </a:defRPr>
             </a:pPr>
             <a:r>
-              <a:t>Logo Variations</a:t>
+              <a:t>Brand Story</a:t>
             </a:r>
           </a:p>
         </p:txBody>
@@ -5691,7 +4205,7 @@
         </p:nvCxnSpPr>
         <p:spPr>
           <a:xfrm>
-            <a:off x="2560320" y="2670048"/>
+            <a:off x="2331719" y="2670048"/>
             <a:ext cx="365760" cy="0"/>
           </a:xfrm>
           <a:prstGeom prst="line">
@@ -5699,7 +4213,7 @@
           </a:prstGeom>
           <a:ln w="19050">
             <a:solidFill>
-              <a:srgbClr val="2563EB"/>
+              <a:srgbClr val="EA580C"/>
             </a:solidFill>
           </a:ln>
         </p:spPr>
@@ -5726,7 +4240,7 @@
         </p:nvSpPr>
         <p:spPr>
           <a:xfrm>
-            <a:off x="3017520" y="2560320"/>
+            <a:off x="2743200" y="2560320"/>
             <a:ext cx="274320" cy="274320"/>
           </a:xfrm>
           <a:prstGeom prst="rect">
@@ -5743,7 +4257,7 @@
             <a:pPr>
               <a:defRPr sz="1200" b="1">
                 <a:solidFill>
-                  <a:srgbClr val="2563EB"/>
+                  <a:srgbClr val="EA580C"/>
                 </a:solidFill>
                 <a:latin typeface="Source Sans Pro"/>
               </a:defRPr>
@@ -5762,116 +4276,8 @@
         </p:nvSpPr>
         <p:spPr>
           <a:xfrm>
-            <a:off x="640080" y="2926079"/>
-            <a:ext cx="1828800" cy="228600"/>
-          </a:xfrm>
-          <a:prstGeom prst="rect">
-            <a:avLst/>
-          </a:prstGeom>
-          <a:noFill/>
-        </p:spPr>
-        <p:txBody>
-          <a:bodyPr wrap="none" lIns="0" tIns="0" bIns="0">
-            <a:spAutoFit/>
-          </a:bodyPr>
-          <a:lstStyle/>
-          <a:p>
-            <a:pPr>
-              <a:defRPr sz="900" b="0">
-                <a:solidFill>
-                  <a:srgbClr val="CCCCCC"/>
-                </a:solidFill>
-                <a:latin typeface="Source Sans Pro"/>
-              </a:defRPr>
-            </a:pPr>
-            <a:r>
-              <a:t>Logo Mark</a:t>
-            </a:r>
-          </a:p>
-        </p:txBody>
-      </p:sp>
-      <p:sp>
-        <p:nvSpPr>
-          <p:cNvPr id="14" name="TextBox 13"/>
-          <p:cNvSpPr txBox="1"/>
-          <p:nvPr/>
-        </p:nvSpPr>
-        <p:spPr>
-          <a:xfrm>
-            <a:off x="640080" y="3154679"/>
-            <a:ext cx="1828800" cy="228600"/>
-          </a:xfrm>
-          <a:prstGeom prst="rect">
-            <a:avLst/>
-          </a:prstGeom>
-          <a:noFill/>
-        </p:spPr>
-        <p:txBody>
-          <a:bodyPr wrap="none" lIns="0" tIns="0" bIns="0">
-            <a:spAutoFit/>
-          </a:bodyPr>
-          <a:lstStyle/>
-          <a:p>
-            <a:pPr>
-              <a:defRPr sz="900" b="0">
-                <a:solidFill>
-                  <a:srgbClr val="CCCCCC"/>
-                </a:solidFill>
-                <a:latin typeface="Source Sans Pro"/>
-              </a:defRPr>
-            </a:pPr>
-            <a:r>
-              <a:t>Clear Space</a:t>
-            </a:r>
-          </a:p>
-        </p:txBody>
-      </p:sp>
-      <p:sp>
-        <p:nvSpPr>
-          <p:cNvPr id="15" name="TextBox 14"/>
-          <p:cNvSpPr txBox="1"/>
-          <p:nvPr/>
-        </p:nvSpPr>
-        <p:spPr>
-          <a:xfrm>
-            <a:off x="640080" y="3383279"/>
-            <a:ext cx="1828800" cy="228600"/>
-          </a:xfrm>
-          <a:prstGeom prst="rect">
-            <a:avLst/>
-          </a:prstGeom>
-          <a:noFill/>
-        </p:spPr>
-        <p:txBody>
-          <a:bodyPr wrap="none" lIns="0" tIns="0" bIns="0">
-            <a:spAutoFit/>
-          </a:bodyPr>
-          <a:lstStyle/>
-          <a:p>
-            <a:pPr>
-              <a:defRPr sz="900" b="0">
-                <a:solidFill>
-                  <a:srgbClr val="CCCCCC"/>
-                </a:solidFill>
-                <a:latin typeface="Source Sans Pro"/>
-              </a:defRPr>
-            </a:pPr>
-            <a:r>
-              <a:t>Usage Guidelines</a:t>
-            </a:r>
-          </a:p>
-        </p:txBody>
-      </p:sp>
-      <p:sp>
-        <p:nvSpPr>
-          <p:cNvPr id="16" name="TextBox 15"/>
-          <p:cNvSpPr txBox="1"/>
-          <p:nvPr/>
-        </p:nvSpPr>
-        <p:spPr>
-          <a:xfrm>
-            <a:off x="457200" y="3749039"/>
-            <a:ext cx="2011680" cy="274320"/>
+            <a:off x="3474720" y="1554480"/>
+            <a:ext cx="1828800" cy="274320"/>
           </a:xfrm>
           <a:prstGeom prst="rect">
             <a:avLst/>
@@ -5893,20 +4299,20 @@
               </a:defRPr>
             </a:pPr>
             <a:r>
-              <a:t>Brand Colors</a:t>
+              <a:t>Logo Variations</a:t>
             </a:r>
           </a:p>
         </p:txBody>
       </p:sp>
       <p:cxnSp>
         <p:nvCxnSpPr>
-          <p:cNvPr id="17" name="Connector 16"/>
+          <p:cNvPr id="14" name="Connector 13"/>
           <p:cNvCxnSpPr/>
           <p:nvPr/>
         </p:nvCxnSpPr>
         <p:spPr>
           <a:xfrm>
-            <a:off x="2560320" y="3858767"/>
+            <a:off x="5349239" y="1664208"/>
             <a:ext cx="365760" cy="0"/>
           </a:xfrm>
           <a:prstGeom prst="line">
@@ -5914,7 +4320,7 @@
           </a:prstGeom>
           <a:ln w="19050">
             <a:solidFill>
-              <a:srgbClr val="2563EB"/>
+              <a:srgbClr val="EA580C"/>
             </a:solidFill>
           </a:ln>
         </p:spPr>
@@ -5935,13 +4341,13 @@
       </p:cxnSp>
       <p:sp>
         <p:nvSpPr>
-          <p:cNvPr id="18" name="TextBox 17"/>
+          <p:cNvPr id="15" name="TextBox 14"/>
           <p:cNvSpPr txBox="1"/>
           <p:nvPr/>
         </p:nvSpPr>
         <p:spPr>
           <a:xfrm>
-            <a:off x="3017520" y="3749039"/>
+            <a:off x="5760720" y="1554480"/>
             <a:ext cx="274320" cy="274320"/>
           </a:xfrm>
           <a:prstGeom prst="rect">
@@ -5958,7 +4364,7 @@
             <a:pPr>
               <a:defRPr sz="1200" b="1">
                 <a:solidFill>
-                  <a:srgbClr val="2563EB"/>
+                  <a:srgbClr val="EA580C"/>
                 </a:solidFill>
                 <a:latin typeface="Source Sans Pro"/>
               </a:defRPr>
@@ -5971,13 +4377,13 @@
       </p:sp>
       <p:sp>
         <p:nvSpPr>
-          <p:cNvPr id="19" name="TextBox 18"/>
+          <p:cNvPr id="16" name="TextBox 15"/>
           <p:cNvSpPr txBox="1"/>
           <p:nvPr/>
         </p:nvSpPr>
         <p:spPr>
           <a:xfrm>
-            <a:off x="640080" y="4114800"/>
+            <a:off x="3657600" y="1920240"/>
             <a:ext cx="1828800" cy="228600"/>
           </a:xfrm>
           <a:prstGeom prst="rect">
@@ -6000,20 +4406,20 @@
               </a:defRPr>
             </a:pPr>
             <a:r>
-              <a:t>Primary Colors</a:t>
-            </a:r>
-          </a:p>
-        </p:txBody>
-      </p:sp>
-      <p:sp>
-        <p:nvSpPr>
-          <p:cNvPr id="20" name="TextBox 19"/>
+              <a:t>Logo Mark</a:t>
+            </a:r>
+          </a:p>
+        </p:txBody>
+      </p:sp>
+      <p:sp>
+        <p:nvSpPr>
+          <p:cNvPr id="17" name="TextBox 16"/>
           <p:cNvSpPr txBox="1"/>
           <p:nvPr/>
         </p:nvSpPr>
         <p:spPr>
           <a:xfrm>
-            <a:off x="640080" y="4343400"/>
+            <a:off x="3657600" y="2148840"/>
             <a:ext cx="1828800" cy="228600"/>
           </a:xfrm>
           <a:prstGeom prst="rect">
@@ -6036,20 +4442,20 @@
               </a:defRPr>
             </a:pPr>
             <a:r>
-              <a:t>Secondary Colors</a:t>
-            </a:r>
-          </a:p>
-        </p:txBody>
-      </p:sp>
-      <p:sp>
-        <p:nvSpPr>
-          <p:cNvPr id="21" name="TextBox 20"/>
+              <a:t>Clear Space</a:t>
+            </a:r>
+          </a:p>
+        </p:txBody>
+      </p:sp>
+      <p:sp>
+        <p:nvSpPr>
+          <p:cNvPr id="18" name="TextBox 17"/>
           <p:cNvSpPr txBox="1"/>
           <p:nvPr/>
         </p:nvSpPr>
         <p:spPr>
           <a:xfrm>
-            <a:off x="640080" y="4572000"/>
+            <a:off x="3657600" y="2377440"/>
             <a:ext cx="1828800" cy="228600"/>
           </a:xfrm>
           <a:prstGeom prst="rect">
@@ -6072,21 +4478,21 @@
               </a:defRPr>
             </a:pPr>
             <a:r>
-              <a:t>Color Usage</a:t>
-            </a:r>
-          </a:p>
-        </p:txBody>
-      </p:sp>
-      <p:sp>
-        <p:nvSpPr>
-          <p:cNvPr id="22" name="TextBox 21"/>
+              <a:t>Usage Guidelines</a:t>
+            </a:r>
+          </a:p>
+        </p:txBody>
+      </p:sp>
+      <p:sp>
+        <p:nvSpPr>
+          <p:cNvPr id="19" name="TextBox 18"/>
           <p:cNvSpPr txBox="1"/>
           <p:nvPr/>
         </p:nvSpPr>
         <p:spPr>
           <a:xfrm>
-            <a:off x="3474720" y="1554480"/>
-            <a:ext cx="2011680" cy="274320"/>
+            <a:off x="3474720" y="2743200"/>
+            <a:ext cx="1828800" cy="274320"/>
           </a:xfrm>
           <a:prstGeom prst="rect">
             <a:avLst/>
@@ -6108,20 +4514,20 @@
               </a:defRPr>
             </a:pPr>
             <a:r>
-              <a:t>Typography</a:t>
+              <a:t>Brand Colors</a:t>
             </a:r>
           </a:p>
         </p:txBody>
       </p:sp>
       <p:cxnSp>
         <p:nvCxnSpPr>
-          <p:cNvPr id="23" name="Connector 22"/>
+          <p:cNvPr id="20" name="Connector 19"/>
           <p:cNvCxnSpPr/>
           <p:nvPr/>
         </p:nvCxnSpPr>
         <p:spPr>
           <a:xfrm>
-            <a:off x="5577840" y="1664208"/>
+            <a:off x="5349239" y="2852928"/>
             <a:ext cx="365760" cy="0"/>
           </a:xfrm>
           <a:prstGeom prst="line">
@@ -6129,7 +4535,7 @@
           </a:prstGeom>
           <a:ln w="19050">
             <a:solidFill>
-              <a:srgbClr val="2563EB"/>
+              <a:srgbClr val="EA580C"/>
             </a:solidFill>
           </a:ln>
         </p:spPr>
@@ -6150,13 +4556,13 @@
       </p:cxnSp>
       <p:sp>
         <p:nvSpPr>
-          <p:cNvPr id="24" name="TextBox 23"/>
+          <p:cNvPr id="21" name="TextBox 20"/>
           <p:cNvSpPr txBox="1"/>
           <p:nvPr/>
         </p:nvSpPr>
         <p:spPr>
           <a:xfrm>
-            <a:off x="6035040" y="1554480"/>
+            <a:off x="5760720" y="2743200"/>
             <a:ext cx="274320" cy="274320"/>
           </a:xfrm>
           <a:prstGeom prst="rect">
@@ -6173,7 +4579,7 @@
             <a:pPr>
               <a:defRPr sz="1200" b="1">
                 <a:solidFill>
-                  <a:srgbClr val="2563EB"/>
+                  <a:srgbClr val="EA580C"/>
                 </a:solidFill>
                 <a:latin typeface="Source Sans Pro"/>
               </a:defRPr>
@@ -6186,13 +4592,13 @@
       </p:sp>
       <p:sp>
         <p:nvSpPr>
-          <p:cNvPr id="25" name="TextBox 24"/>
+          <p:cNvPr id="22" name="TextBox 21"/>
           <p:cNvSpPr txBox="1"/>
           <p:nvPr/>
         </p:nvSpPr>
         <p:spPr>
           <a:xfrm>
-            <a:off x="3657600" y="1920240"/>
+            <a:off x="3657600" y="3108960"/>
             <a:ext cx="1828800" cy="228600"/>
           </a:xfrm>
           <a:prstGeom prst="rect">
@@ -6215,20 +4621,20 @@
               </a:defRPr>
             </a:pPr>
             <a:r>
-              <a:t>Brand Font</a:t>
-            </a:r>
-          </a:p>
-        </p:txBody>
-      </p:sp>
-      <p:sp>
-        <p:nvSpPr>
-          <p:cNvPr id="26" name="TextBox 25"/>
+              <a:t>Primary Colors</a:t>
+            </a:r>
+          </a:p>
+        </p:txBody>
+      </p:sp>
+      <p:sp>
+        <p:nvSpPr>
+          <p:cNvPr id="23" name="TextBox 22"/>
           <p:cNvSpPr txBox="1"/>
           <p:nvPr/>
         </p:nvSpPr>
         <p:spPr>
           <a:xfrm>
-            <a:off x="3657600" y="2148840"/>
+            <a:off x="3657600" y="3337560"/>
             <a:ext cx="1828800" cy="228600"/>
           </a:xfrm>
           <a:prstGeom prst="rect">
@@ -6251,20 +4657,20 @@
               </a:defRPr>
             </a:pPr>
             <a:r>
-              <a:t>Font Usage</a:t>
-            </a:r>
-          </a:p>
-        </p:txBody>
-      </p:sp>
-      <p:sp>
-        <p:nvSpPr>
-          <p:cNvPr id="27" name="TextBox 26"/>
+              <a:t>Secondary Colors</a:t>
+            </a:r>
+          </a:p>
+        </p:txBody>
+      </p:sp>
+      <p:sp>
+        <p:nvSpPr>
+          <p:cNvPr id="24" name="TextBox 23"/>
           <p:cNvSpPr txBox="1"/>
           <p:nvPr/>
         </p:nvSpPr>
         <p:spPr>
           <a:xfrm>
-            <a:off x="3657600" y="2377440"/>
+            <a:off x="3657600" y="3566160"/>
             <a:ext cx="1828800" cy="228600"/>
           </a:xfrm>
           <a:prstGeom prst="rect">
@@ -6287,21 +4693,21 @@
               </a:defRPr>
             </a:pPr>
             <a:r>
-              <a:t>Text Hierarchy</a:t>
-            </a:r>
-          </a:p>
-        </p:txBody>
-      </p:sp>
-      <p:sp>
-        <p:nvSpPr>
-          <p:cNvPr id="28" name="TextBox 27"/>
+              <a:t>Color Usage</a:t>
+            </a:r>
+          </a:p>
+        </p:txBody>
+      </p:sp>
+      <p:sp>
+        <p:nvSpPr>
+          <p:cNvPr id="25" name="TextBox 24"/>
           <p:cNvSpPr txBox="1"/>
           <p:nvPr/>
         </p:nvSpPr>
         <p:spPr>
           <a:xfrm>
-            <a:off x="3474720" y="2743200"/>
-            <a:ext cx="2011680" cy="274320"/>
+            <a:off x="3474720" y="3931920"/>
+            <a:ext cx="1828800" cy="274320"/>
           </a:xfrm>
           <a:prstGeom prst="rect">
             <a:avLst/>
@@ -6323,20 +4729,20 @@
               </a:defRPr>
             </a:pPr>
             <a:r>
-              <a:t>Visual Guidelines</a:t>
+              <a:t>Typography</a:t>
             </a:r>
           </a:p>
         </p:txBody>
       </p:sp>
       <p:cxnSp>
         <p:nvCxnSpPr>
-          <p:cNvPr id="29" name="Connector 28"/>
+          <p:cNvPr id="26" name="Connector 25"/>
           <p:cNvCxnSpPr/>
           <p:nvPr/>
         </p:nvCxnSpPr>
         <p:spPr>
           <a:xfrm>
-            <a:off x="5577840" y="2852928"/>
+            <a:off x="5349239" y="4041648"/>
             <a:ext cx="365760" cy="0"/>
           </a:xfrm>
           <a:prstGeom prst="line">
@@ -6344,7 +4750,7 @@
           </a:prstGeom>
           <a:ln w="19050">
             <a:solidFill>
-              <a:srgbClr val="2563EB"/>
+              <a:srgbClr val="EA580C"/>
             </a:solidFill>
           </a:ln>
         </p:spPr>
@@ -6365,13 +4771,13 @@
       </p:cxnSp>
       <p:sp>
         <p:nvSpPr>
-          <p:cNvPr id="30" name="TextBox 29"/>
+          <p:cNvPr id="27" name="TextBox 26"/>
           <p:cNvSpPr txBox="1"/>
           <p:nvPr/>
         </p:nvSpPr>
         <p:spPr>
           <a:xfrm>
-            <a:off x="6035040" y="2743200"/>
+            <a:off x="5760720" y="3931920"/>
             <a:ext cx="274320" cy="274320"/>
           </a:xfrm>
           <a:prstGeom prst="rect">
@@ -6388,7 +4794,7 @@
             <a:pPr>
               <a:defRPr sz="1200" b="1">
                 <a:solidFill>
-                  <a:srgbClr val="2563EB"/>
+                  <a:srgbClr val="EA580C"/>
                 </a:solidFill>
                 <a:latin typeface="Source Sans Pro"/>
               </a:defRPr>
@@ -6401,13 +4807,13 @@
       </p:sp>
       <p:sp>
         <p:nvSpPr>
-          <p:cNvPr id="31" name="TextBox 30"/>
+          <p:cNvPr id="28" name="TextBox 27"/>
           <p:cNvSpPr txBox="1"/>
           <p:nvPr/>
         </p:nvSpPr>
         <p:spPr>
           <a:xfrm>
-            <a:off x="3657600" y="3108960"/>
+            <a:off x="3657600" y="4297680"/>
             <a:ext cx="1828800" cy="228600"/>
           </a:xfrm>
           <a:prstGeom prst="rect">
@@ -6430,20 +4836,20 @@
               </a:defRPr>
             </a:pPr>
             <a:r>
-              <a:t>Visual Style</a:t>
-            </a:r>
-          </a:p>
-        </p:txBody>
-      </p:sp>
-      <p:sp>
-        <p:nvSpPr>
-          <p:cNvPr id="32" name="TextBox 31"/>
+              <a:t>Brand Font</a:t>
+            </a:r>
+          </a:p>
+        </p:txBody>
+      </p:sp>
+      <p:sp>
+        <p:nvSpPr>
+          <p:cNvPr id="29" name="TextBox 28"/>
           <p:cNvSpPr txBox="1"/>
           <p:nvPr/>
         </p:nvSpPr>
         <p:spPr>
           <a:xfrm>
-            <a:off x="3657600" y="3337560"/>
+            <a:off x="3657600" y="4526280"/>
             <a:ext cx="1828800" cy="228600"/>
           </a:xfrm>
           <a:prstGeom prst="rect">
@@ -6466,20 +4872,20 @@
               </a:defRPr>
             </a:pPr>
             <a:r>
-              <a:t>Photography</a:t>
-            </a:r>
-          </a:p>
-        </p:txBody>
-      </p:sp>
-      <p:sp>
-        <p:nvSpPr>
-          <p:cNvPr id="33" name="TextBox 32"/>
+              <a:t>Font Usage</a:t>
+            </a:r>
+          </a:p>
+        </p:txBody>
+      </p:sp>
+      <p:sp>
+        <p:nvSpPr>
+          <p:cNvPr id="30" name="TextBox 29"/>
           <p:cNvSpPr txBox="1"/>
           <p:nvPr/>
         </p:nvSpPr>
         <p:spPr>
           <a:xfrm>
-            <a:off x="3657600" y="3566160"/>
+            <a:off x="3657600" y="4754880"/>
             <a:ext cx="1828800" cy="228600"/>
           </a:xfrm>
           <a:prstGeom prst="rect">
@@ -6502,21 +4908,21 @@
               </a:defRPr>
             </a:pPr>
             <a:r>
-              <a:t>Imagery</a:t>
-            </a:r>
-          </a:p>
-        </p:txBody>
-      </p:sp>
-      <p:sp>
-        <p:nvSpPr>
-          <p:cNvPr id="34" name="TextBox 33"/>
+              <a:t>Text Hierarchy</a:t>
+            </a:r>
+          </a:p>
+        </p:txBody>
+      </p:sp>
+      <p:sp>
+        <p:nvSpPr>
+          <p:cNvPr id="31" name="TextBox 30"/>
           <p:cNvSpPr txBox="1"/>
           <p:nvPr/>
         </p:nvSpPr>
         <p:spPr>
           <a:xfrm>
-            <a:off x="3474720" y="3931920"/>
-            <a:ext cx="2011680" cy="274320"/>
+            <a:off x="6492240" y="1554480"/>
+            <a:ext cx="1828800" cy="274320"/>
           </a:xfrm>
           <a:prstGeom prst="rect">
             <a:avLst/>
@@ -6538,20 +4944,20 @@
               </a:defRPr>
             </a:pPr>
             <a:r>
-              <a:t>Brand Story &amp; Mission</a:t>
+              <a:t>Visual Guidelines</a:t>
             </a:r>
           </a:p>
         </p:txBody>
       </p:sp>
       <p:cxnSp>
         <p:nvCxnSpPr>
-          <p:cNvPr id="35" name="Connector 34"/>
+          <p:cNvPr id="32" name="Connector 31"/>
           <p:cNvCxnSpPr/>
           <p:nvPr/>
         </p:nvCxnSpPr>
         <p:spPr>
           <a:xfrm>
-            <a:off x="5577840" y="4041648"/>
+            <a:off x="8366759" y="1664208"/>
             <a:ext cx="365760" cy="0"/>
           </a:xfrm>
           <a:prstGeom prst="line">
@@ -6559,7 +4965,7 @@
           </a:prstGeom>
           <a:ln w="19050">
             <a:solidFill>
-              <a:srgbClr val="2563EB"/>
+              <a:srgbClr val="EA580C"/>
             </a:solidFill>
           </a:ln>
         </p:spPr>
@@ -6580,13 +4986,13 @@
       </p:cxnSp>
       <p:sp>
         <p:nvSpPr>
-          <p:cNvPr id="36" name="TextBox 35"/>
+          <p:cNvPr id="33" name="TextBox 32"/>
           <p:cNvSpPr txBox="1"/>
           <p:nvPr/>
         </p:nvSpPr>
         <p:spPr>
           <a:xfrm>
-            <a:off x="6035040" y="3931920"/>
+            <a:off x="8778240" y="1554480"/>
             <a:ext cx="274320" cy="274320"/>
           </a:xfrm>
           <a:prstGeom prst="rect">
@@ -6603,7 +5009,7 @@
             <a:pPr>
               <a:defRPr sz="1200" b="1">
                 <a:solidFill>
-                  <a:srgbClr val="2563EB"/>
+                  <a:srgbClr val="EA580C"/>
                 </a:solidFill>
                 <a:latin typeface="Source Sans Pro"/>
               </a:defRPr>
@@ -6616,85 +5022,14 @@
       </p:sp>
       <p:sp>
         <p:nvSpPr>
-          <p:cNvPr id="37" name="TextBox 36"/>
+          <p:cNvPr id="34" name="TextBox 33"/>
           <p:cNvSpPr txBox="1"/>
           <p:nvPr/>
         </p:nvSpPr>
         <p:spPr>
           <a:xfrm>
-            <a:off x="3474720" y="4434840"/>
-            <a:ext cx="2011680" cy="274320"/>
-          </a:xfrm>
-          <a:prstGeom prst="rect">
-            <a:avLst/>
-          </a:prstGeom>
-          <a:noFill/>
-        </p:spPr>
-        <p:txBody>
-          <a:bodyPr wrap="none" lIns="0" rIns="0" tIns="0" bIns="0">
-            <a:spAutoFit/>
-          </a:bodyPr>
-          <a:lstStyle/>
-          <a:p>
-            <a:pPr>
-              <a:defRPr sz="1200" b="1">
-                <a:solidFill>
-                  <a:srgbClr val="FFFFFF"/>
-                </a:solidFill>
-                <a:latin typeface="Source Sans Pro"/>
-              </a:defRPr>
-            </a:pPr>
-            <a:r>
-              <a:t>Brand Voice &amp; Tone</a:t>
-            </a:r>
-          </a:p>
-        </p:txBody>
-      </p:sp>
-      <p:cxnSp>
-        <p:nvCxnSpPr>
-          <p:cNvPr id="38" name="Connector 37"/>
-          <p:cNvCxnSpPr/>
-          <p:nvPr/>
-        </p:nvCxnSpPr>
-        <p:spPr>
-          <a:xfrm>
-            <a:off x="5577840" y="4544568"/>
-            <a:ext cx="365760" cy="0"/>
-          </a:xfrm>
-          <a:prstGeom prst="line">
-            <a:avLst/>
-          </a:prstGeom>
-          <a:ln w="19050">
-            <a:solidFill>
-              <a:srgbClr val="2563EB"/>
-            </a:solidFill>
-          </a:ln>
-        </p:spPr>
-        <p:style>
-          <a:lnRef idx="2">
-            <a:schemeClr val="accent1"/>
-          </a:lnRef>
-          <a:fillRef idx="0">
-            <a:schemeClr val="accent1"/>
-          </a:fillRef>
-          <a:effectRef idx="1">
-            <a:schemeClr val="accent1"/>
-          </a:effectRef>
-          <a:fontRef idx="minor">
-            <a:schemeClr val="tx1"/>
-          </a:fontRef>
-        </p:style>
-      </p:cxnSp>
-      <p:sp>
-        <p:nvSpPr>
-          <p:cNvPr id="39" name="TextBox 38"/>
-          <p:cNvSpPr txBox="1"/>
-          <p:nvPr/>
-        </p:nvSpPr>
-        <p:spPr>
-          <a:xfrm>
-            <a:off x="6035040" y="4434840"/>
-            <a:ext cx="274320" cy="274320"/>
+            <a:off x="6675120" y="1920240"/>
+            <a:ext cx="1828800" cy="228600"/>
           </a:xfrm>
           <a:prstGeom prst="rect">
             <a:avLst/>
@@ -6708,100 +5043,29 @@
           <a:lstStyle/>
           <a:p>
             <a:pPr>
-              <a:defRPr sz="1200" b="1">
-                <a:solidFill>
-                  <a:srgbClr val="2563EB"/>
-                </a:solidFill>
-                <a:latin typeface="Source Sans Pro"/>
-              </a:defRPr>
-            </a:pPr>
-            <a:r>
-              <a:t>08</a:t>
-            </a:r>
-          </a:p>
-        </p:txBody>
-      </p:sp>
-      <p:sp>
-        <p:nvSpPr>
-          <p:cNvPr id="40" name="TextBox 39"/>
+              <a:defRPr sz="900" b="0">
+                <a:solidFill>
+                  <a:srgbClr val="CCCCCC"/>
+                </a:solidFill>
+                <a:latin typeface="Source Sans Pro"/>
+              </a:defRPr>
+            </a:pPr>
+            <a:r>
+              <a:t>Visual Style</a:t>
+            </a:r>
+          </a:p>
+        </p:txBody>
+      </p:sp>
+      <p:sp>
+        <p:nvSpPr>
+          <p:cNvPr id="35" name="TextBox 34"/>
           <p:cNvSpPr txBox="1"/>
           <p:nvPr/>
         </p:nvSpPr>
         <p:spPr>
           <a:xfrm>
-            <a:off x="6492240" y="1554480"/>
-            <a:ext cx="2011680" cy="274320"/>
-          </a:xfrm>
-          <a:prstGeom prst="rect">
-            <a:avLst/>
-          </a:prstGeom>
-          <a:noFill/>
-        </p:spPr>
-        <p:txBody>
-          <a:bodyPr wrap="none" lIns="0" rIns="0" tIns="0" bIns="0">
-            <a:spAutoFit/>
-          </a:bodyPr>
-          <a:lstStyle/>
-          <a:p>
-            <a:pPr>
-              <a:defRPr sz="1200" b="1">
-                <a:solidFill>
-                  <a:srgbClr val="FFFFFF"/>
-                </a:solidFill>
-                <a:latin typeface="Source Sans Pro"/>
-              </a:defRPr>
-            </a:pPr>
-            <a:r>
-              <a:t>Messaging &amp; Value Propositions</a:t>
-            </a:r>
-          </a:p>
-        </p:txBody>
-      </p:sp>
-      <p:cxnSp>
-        <p:nvCxnSpPr>
-          <p:cNvPr id="41" name="Connector 40"/>
-          <p:cNvCxnSpPr/>
-          <p:nvPr/>
-        </p:nvCxnSpPr>
-        <p:spPr>
-          <a:xfrm>
-            <a:off x="8595360" y="1664208"/>
-            <a:ext cx="365760" cy="0"/>
-          </a:xfrm>
-          <a:prstGeom prst="line">
-            <a:avLst/>
-          </a:prstGeom>
-          <a:ln w="19050">
-            <a:solidFill>
-              <a:srgbClr val="2563EB"/>
-            </a:solidFill>
-          </a:ln>
-        </p:spPr>
-        <p:style>
-          <a:lnRef idx="2">
-            <a:schemeClr val="accent1"/>
-          </a:lnRef>
-          <a:fillRef idx="0">
-            <a:schemeClr val="accent1"/>
-          </a:fillRef>
-          <a:effectRef idx="1">
-            <a:schemeClr val="accent1"/>
-          </a:effectRef>
-          <a:fontRef idx="minor">
-            <a:schemeClr val="tx1"/>
-          </a:fontRef>
-        </p:style>
-      </p:cxnSp>
-      <p:sp>
-        <p:nvSpPr>
-          <p:cNvPr id="42" name="TextBox 41"/>
-          <p:cNvSpPr txBox="1"/>
-          <p:nvPr/>
-        </p:nvSpPr>
-        <p:spPr>
-          <a:xfrm>
-            <a:off x="9052560" y="1554480"/>
-            <a:ext cx="274320" cy="274320"/>
+            <a:off x="6675120" y="2148840"/>
+            <a:ext cx="1828800" cy="228600"/>
           </a:xfrm>
           <a:prstGeom prst="rect">
             <a:avLst/>
@@ -6815,100 +5079,29 @@
           <a:lstStyle/>
           <a:p>
             <a:pPr>
-              <a:defRPr sz="1200" b="1">
-                <a:solidFill>
-                  <a:srgbClr val="2563EB"/>
-                </a:solidFill>
-                <a:latin typeface="Source Sans Pro"/>
-              </a:defRPr>
-            </a:pPr>
-            <a:r>
-              <a:t>09</a:t>
-            </a:r>
-          </a:p>
-        </p:txBody>
-      </p:sp>
-      <p:sp>
-        <p:nvSpPr>
-          <p:cNvPr id="43" name="TextBox 42"/>
+              <a:defRPr sz="900" b="0">
+                <a:solidFill>
+                  <a:srgbClr val="CCCCCC"/>
+                </a:solidFill>
+                <a:latin typeface="Source Sans Pro"/>
+              </a:defRPr>
+            </a:pPr>
+            <a:r>
+              <a:t>Photography</a:t>
+            </a:r>
+          </a:p>
+        </p:txBody>
+      </p:sp>
+      <p:sp>
+        <p:nvSpPr>
+          <p:cNvPr id="36" name="TextBox 35"/>
           <p:cNvSpPr txBox="1"/>
           <p:nvPr/>
         </p:nvSpPr>
         <p:spPr>
           <a:xfrm>
-            <a:off x="6492240" y="2057400"/>
-            <a:ext cx="2011680" cy="274320"/>
-          </a:xfrm>
-          <a:prstGeom prst="rect">
-            <a:avLst/>
-          </a:prstGeom>
-          <a:noFill/>
-        </p:spPr>
-        <p:txBody>
-          <a:bodyPr wrap="none" lIns="0" rIns="0" tIns="0" bIns="0">
-            <a:spAutoFit/>
-          </a:bodyPr>
-          <a:lstStyle/>
-          <a:p>
-            <a:pPr>
-              <a:defRPr sz="1200" b="1">
-                <a:solidFill>
-                  <a:srgbClr val="FFFFFF"/>
-                </a:solidFill>
-                <a:latin typeface="Source Sans Pro"/>
-              </a:defRPr>
-            </a:pPr>
-            <a:r>
-              <a:t>Marketing Copy</a:t>
-            </a:r>
-          </a:p>
-        </p:txBody>
-      </p:sp>
-      <p:cxnSp>
-        <p:nvCxnSpPr>
-          <p:cNvPr id="44" name="Connector 43"/>
-          <p:cNvCxnSpPr/>
-          <p:nvPr/>
-        </p:nvCxnSpPr>
-        <p:spPr>
-          <a:xfrm>
-            <a:off x="8595360" y="2167128"/>
-            <a:ext cx="365760" cy="0"/>
-          </a:xfrm>
-          <a:prstGeom prst="line">
-            <a:avLst/>
-          </a:prstGeom>
-          <a:ln w="19050">
-            <a:solidFill>
-              <a:srgbClr val="2563EB"/>
-            </a:solidFill>
-          </a:ln>
-        </p:spPr>
-        <p:style>
-          <a:lnRef idx="2">
-            <a:schemeClr val="accent1"/>
-          </a:lnRef>
-          <a:fillRef idx="0">
-            <a:schemeClr val="accent1"/>
-          </a:fillRef>
-          <a:effectRef idx="1">
-            <a:schemeClr val="accent1"/>
-          </a:effectRef>
-          <a:fontRef idx="minor">
-            <a:schemeClr val="tx1"/>
-          </a:fontRef>
-        </p:style>
-      </p:cxnSp>
-      <p:sp>
-        <p:nvSpPr>
-          <p:cNvPr id="45" name="TextBox 44"/>
-          <p:cNvSpPr txBox="1"/>
-          <p:nvPr/>
-        </p:nvSpPr>
-        <p:spPr>
-          <a:xfrm>
-            <a:off x="9052560" y="2057400"/>
-            <a:ext cx="274320" cy="274320"/>
+            <a:off x="6675120" y="2377440"/>
+            <a:ext cx="1828800" cy="228600"/>
           </a:xfrm>
           <a:prstGeom prst="rect">
             <a:avLst/>
@@ -6922,1219 +5115,15 @@
           <a:lstStyle/>
           <a:p>
             <a:pPr>
-              <a:defRPr sz="1200" b="1">
-                <a:solidFill>
-                  <a:srgbClr val="2563EB"/>
-                </a:solidFill>
-                <a:latin typeface="Source Sans Pro"/>
-              </a:defRPr>
-            </a:pPr>
-            <a:r>
-              <a:t>10</a:t>
-            </a:r>
-          </a:p>
-        </p:txBody>
-      </p:sp>
-      <p:sp>
-        <p:nvSpPr>
-          <p:cNvPr id="46" name="TextBox 45"/>
-          <p:cNvSpPr txBox="1"/>
-          <p:nvPr/>
-        </p:nvSpPr>
-        <p:spPr>
-          <a:xfrm>
-            <a:off x="6492240" y="2560320"/>
-            <a:ext cx="2011680" cy="274320"/>
-          </a:xfrm>
-          <a:prstGeom prst="rect">
-            <a:avLst/>
-          </a:prstGeom>
-          <a:noFill/>
-        </p:spPr>
-        <p:txBody>
-          <a:bodyPr wrap="none" lIns="0" rIns="0" tIns="0" bIns="0">
-            <a:spAutoFit/>
-          </a:bodyPr>
-          <a:lstStyle/>
-          <a:p>
-            <a:pPr>
-              <a:defRPr sz="1200" b="1">
-                <a:solidFill>
-                  <a:srgbClr val="FFFFFF"/>
-                </a:solidFill>
-                <a:latin typeface="Source Sans Pro"/>
-              </a:defRPr>
-            </a:pPr>
-            <a:r>
-              <a:t>1Brand Collateral Templates</a:t>
-            </a:r>
-          </a:p>
-        </p:txBody>
-      </p:sp>
-      <p:cxnSp>
-        <p:nvCxnSpPr>
-          <p:cNvPr id="47" name="Connector 46"/>
-          <p:cNvCxnSpPr/>
-          <p:nvPr/>
-        </p:nvCxnSpPr>
-        <p:spPr>
-          <a:xfrm>
-            <a:off x="8595360" y="2670048"/>
-            <a:ext cx="365760" cy="0"/>
-          </a:xfrm>
-          <a:prstGeom prst="line">
-            <a:avLst/>
-          </a:prstGeom>
-          <a:ln w="19050">
-            <a:solidFill>
-              <a:srgbClr val="2563EB"/>
-            </a:solidFill>
-          </a:ln>
-        </p:spPr>
-        <p:style>
-          <a:lnRef idx="2">
-            <a:schemeClr val="accent1"/>
-          </a:lnRef>
-          <a:fillRef idx="0">
-            <a:schemeClr val="accent1"/>
-          </a:fillRef>
-          <a:effectRef idx="1">
-            <a:schemeClr val="accent1"/>
-          </a:effectRef>
-          <a:fontRef idx="minor">
-            <a:schemeClr val="tx1"/>
-          </a:fontRef>
-        </p:style>
-      </p:cxnSp>
-      <p:sp>
-        <p:nvSpPr>
-          <p:cNvPr id="48" name="TextBox 47"/>
-          <p:cNvSpPr txBox="1"/>
-          <p:nvPr/>
-        </p:nvSpPr>
-        <p:spPr>
-          <a:xfrm>
-            <a:off x="9052560" y="2560320"/>
-            <a:ext cx="274320" cy="274320"/>
-          </a:xfrm>
-          <a:prstGeom prst="rect">
-            <a:avLst/>
-          </a:prstGeom>
-          <a:noFill/>
-        </p:spPr>
-        <p:txBody>
-          <a:bodyPr wrap="none" lIns="0" tIns="0" bIns="0">
-            <a:spAutoFit/>
-          </a:bodyPr>
-          <a:lstStyle/>
-          <a:p>
-            <a:pPr>
-              <a:defRPr sz="1200" b="1">
-                <a:solidFill>
-                  <a:srgbClr val="2563EB"/>
-                </a:solidFill>
-                <a:latin typeface="Source Sans Pro"/>
-              </a:defRPr>
-            </a:pPr>
-            <a:r>
-              <a:t>11</a:t>
-            </a:r>
-          </a:p>
-        </p:txBody>
-      </p:sp>
-      <p:sp>
-        <p:nvSpPr>
-          <p:cNvPr id="49" name="TextBox 48"/>
-          <p:cNvSpPr txBox="1"/>
-          <p:nvPr/>
-        </p:nvSpPr>
-        <p:spPr>
-          <a:xfrm>
-            <a:off x="457200" y="5657850"/>
-            <a:ext cx="4114800" cy="742950"/>
-          </a:xfrm>
-          <a:prstGeom prst="rect">
-            <a:avLst/>
-          </a:prstGeom>
-          <a:noFill/>
-        </p:spPr>
-        <p:txBody>
-          <a:bodyPr wrap="none">
-            <a:spAutoFit/>
-          </a:bodyPr>
-          <a:lstStyle/>
-          <a:p>
-            <a:pPr algn="l">
-              <a:defRPr sz="1000" b="0">
-                <a:solidFill>
-                  <a:srgbClr val="FFFFFF"/>
-                </a:solidFill>
-                <a:latin typeface="Source Sans Pro"/>
-              </a:defRPr>
-            </a:pPr>
-            <a:r>
-              <a:t>Flipkart</a:t>
-            </a:r>
-          </a:p>
-        </p:txBody>
-      </p:sp>
-      <p:sp>
-        <p:nvSpPr>
-          <p:cNvPr id="50" name="TextBox 49"/>
-          <p:cNvSpPr txBox="1"/>
-          <p:nvPr/>
-        </p:nvSpPr>
-        <p:spPr>
-          <a:xfrm>
-            <a:off x="4572000" y="5657850"/>
-            <a:ext cx="4114800" cy="742950"/>
-          </a:xfrm>
-          <a:prstGeom prst="rect">
-            <a:avLst/>
-          </a:prstGeom>
-          <a:noFill/>
-        </p:spPr>
-        <p:txBody>
-          <a:bodyPr wrap="none">
-            <a:spAutoFit/>
-          </a:bodyPr>
-          <a:lstStyle/>
-          <a:p>
-            <a:pPr algn="r">
-              <a:defRPr sz="1000" b="0">
-                <a:solidFill>
-                  <a:srgbClr val="FFFFFF"/>
-                </a:solidFill>
-                <a:latin typeface="Source Sans Pro"/>
-              </a:defRPr>
-            </a:pPr>
-            <a:r>
-              <a:t>2</a:t>
-            </a:r>
-          </a:p>
-        </p:txBody>
-      </p:sp>
-    </p:spTree>
-  </p:cSld>
-  <p:clrMapOvr>
-    <a:masterClrMapping/>
-  </p:clrMapOvr>
-</p:sld>
-</file>
-
-<file path=ppt/slides/slide20.xml><?xml version="1.0" encoding="utf-8"?>
-<p:sld xmlns:a="http://schemas.openxmlformats.org/drawingml/2006/main" xmlns:p="http://schemas.openxmlformats.org/presentationml/2006/main" xmlns:r="http://schemas.openxmlformats.org/officeDocument/2006/relationships">
-  <p:cSld>
-    <p:spTree>
-      <p:nvGrpSpPr>
-        <p:cNvPr id="1" name=""/>
-        <p:cNvGrpSpPr/>
-        <p:nvPr/>
-      </p:nvGrpSpPr>
-      <p:sp>
-        <p:nvSpPr>
-          <p:cNvPr id="2" name="Rectangle 1"/>
-          <p:cNvSpPr/>
-          <p:nvPr/>
-        </p:nvSpPr>
-        <p:spPr>
-          <a:xfrm>
-            <a:off x="0" y="0"/>
-            <a:ext cx="9144000" cy="6858000"/>
-          </a:xfrm>
-          <a:prstGeom prst="rect">
-            <a:avLst/>
-          </a:prstGeom>
-          <a:solidFill>
-            <a:srgbClr val="1A1A1A"/>
-          </a:solidFill>
-          <a:ln>
-            <a:noFill/>
-          </a:ln>
-        </p:spPr>
-        <p:style>
-          <a:lnRef idx="1">
-            <a:schemeClr val="accent1"/>
-          </a:lnRef>
-          <a:fillRef idx="3">
-            <a:schemeClr val="accent1"/>
-          </a:fillRef>
-          <a:effectRef idx="2">
-            <a:schemeClr val="accent1"/>
-          </a:effectRef>
-          <a:fontRef idx="minor">
-            <a:schemeClr val="lt1"/>
-          </a:fontRef>
-        </p:style>
-        <p:txBody>
-          <a:bodyPr rtlCol="0" anchor="ctr"/>
-          <a:lstStyle/>
-          <a:p>
-            <a:pPr algn="ctr"/>
-          </a:p>
-        </p:txBody>
-      </p:sp>
-      <p:grpSpPr/>
-      <p:sp>
-        <p:nvSpPr>
-          <p:cNvPr id="3" name="TextBox 2"/>
-          <p:cNvSpPr txBox="1"/>
-          <p:nvPr/>
-        </p:nvSpPr>
-        <p:spPr>
-          <a:xfrm>
-            <a:off x="1143000" y="457200"/>
-            <a:ext cx="6858000" cy="742950"/>
-          </a:xfrm>
-          <a:prstGeom prst="rect">
-            <a:avLst/>
-          </a:prstGeom>
-          <a:noFill/>
-        </p:spPr>
-        <p:txBody>
-          <a:bodyPr wrap="none">
-            <a:spAutoFit/>
-          </a:bodyPr>
-          <a:lstStyle/>
-          <a:p>
-            <a:pPr>
-              <a:defRPr sz="3200" b="1">
-                <a:solidFill>
-                  <a:srgbClr val="FFFFFF"/>
-                </a:solidFill>
-                <a:latin typeface="Inter"/>
-              </a:defRPr>
-            </a:pPr>
-            <a:r>
-              <a:t>Collateral: Business Card</a:t>
-            </a:r>
-          </a:p>
-        </p:txBody>
-      </p:sp>
-      <p:sp>
-        <p:nvSpPr>
-          <p:cNvPr id="4" name="TextBox 3"/>
-          <p:cNvSpPr txBox="1"/>
-          <p:nvPr/>
-        </p:nvSpPr>
-        <p:spPr>
-          <a:xfrm>
-            <a:off x="1143000" y="1943100"/>
-            <a:ext cx="6858000" cy="2971800"/>
-          </a:xfrm>
-          <a:prstGeom prst="rect">
-            <a:avLst/>
-          </a:prstGeom>
-          <a:noFill/>
-        </p:spPr>
-        <p:txBody>
-          <a:bodyPr wrap="square">
-            <a:spAutoFit/>
-          </a:bodyPr>
-          <a:lstStyle/>
-          <a:p>
-            <a:pPr>
-              <a:defRPr sz="1600" b="0">
-                <a:solidFill>
-                  <a:srgbClr val="FFFFFF"/>
-                </a:solidFill>
-                <a:latin typeface="Source Sans Pro"/>
-              </a:defRPr>
-            </a:pPr>
-            <a:r>
-              <a:t>Simple, clean business card layout for Flipkart in E-commerce, Retail, Technology, Logistics &amp; Supply Chain. Emphasize clarity, logo, and minimal info.</a:t>
-            </a:r>
-          </a:p>
-        </p:txBody>
-      </p:sp>
-      <p:sp>
-        <p:nvSpPr>
-          <p:cNvPr id="5" name="TextBox 4"/>
-          <p:cNvSpPr txBox="1"/>
-          <p:nvPr/>
-        </p:nvSpPr>
-        <p:spPr>
-          <a:xfrm>
-            <a:off x="457200" y="5657850"/>
-            <a:ext cx="4114800" cy="742950"/>
-          </a:xfrm>
-          <a:prstGeom prst="rect">
-            <a:avLst/>
-          </a:prstGeom>
-          <a:noFill/>
-        </p:spPr>
-        <p:txBody>
-          <a:bodyPr wrap="none">
-            <a:spAutoFit/>
-          </a:bodyPr>
-          <a:lstStyle/>
-          <a:p>
-            <a:pPr algn="l">
-              <a:defRPr sz="1000" b="0">
-                <a:solidFill>
-                  <a:srgbClr val="FFFFFF"/>
-                </a:solidFill>
-                <a:latin typeface="Source Sans Pro"/>
-              </a:defRPr>
-            </a:pPr>
-            <a:r>
-              <a:t>Flipkart</a:t>
-            </a:r>
-          </a:p>
-        </p:txBody>
-      </p:sp>
-      <p:sp>
-        <p:nvSpPr>
-          <p:cNvPr id="6" name="TextBox 5"/>
-          <p:cNvSpPr txBox="1"/>
-          <p:nvPr/>
-        </p:nvSpPr>
-        <p:spPr>
-          <a:xfrm>
-            <a:off x="4572000" y="5657850"/>
-            <a:ext cx="4114800" cy="742950"/>
-          </a:xfrm>
-          <a:prstGeom prst="rect">
-            <a:avLst/>
-          </a:prstGeom>
-          <a:noFill/>
-        </p:spPr>
-        <p:txBody>
-          <a:bodyPr wrap="none">
-            <a:spAutoFit/>
-          </a:bodyPr>
-          <a:lstStyle/>
-          <a:p>
-            <a:pPr algn="r">
-              <a:defRPr sz="1000" b="0">
-                <a:solidFill>
-                  <a:srgbClr val="FFFFFF"/>
-                </a:solidFill>
-                <a:latin typeface="Source Sans Pro"/>
-              </a:defRPr>
-            </a:pPr>
-            <a:r>
-              <a:t>20</a:t>
-            </a:r>
-          </a:p>
-        </p:txBody>
-      </p:sp>
-    </p:spTree>
-  </p:cSld>
-  <p:clrMapOvr>
-    <a:masterClrMapping/>
-  </p:clrMapOvr>
-</p:sld>
-</file>
-
-<file path=ppt/slides/slide21.xml><?xml version="1.0" encoding="utf-8"?>
-<p:sld xmlns:a="http://schemas.openxmlformats.org/drawingml/2006/main" xmlns:p="http://schemas.openxmlformats.org/presentationml/2006/main" xmlns:r="http://schemas.openxmlformats.org/officeDocument/2006/relationships">
-  <p:cSld>
-    <p:spTree>
-      <p:nvGrpSpPr>
-        <p:cNvPr id="1" name=""/>
-        <p:cNvGrpSpPr/>
-        <p:nvPr/>
-      </p:nvGrpSpPr>
-      <p:sp>
-        <p:nvSpPr>
-          <p:cNvPr id="2" name="Rectangle 1"/>
-          <p:cNvSpPr/>
-          <p:nvPr/>
-        </p:nvSpPr>
-        <p:spPr>
-          <a:xfrm>
-            <a:off x="0" y="0"/>
-            <a:ext cx="9144000" cy="6858000"/>
-          </a:xfrm>
-          <a:prstGeom prst="rect">
-            <a:avLst/>
-          </a:prstGeom>
-          <a:solidFill>
-            <a:srgbClr val="1A1A1A"/>
-          </a:solidFill>
-          <a:ln>
-            <a:noFill/>
-          </a:ln>
-        </p:spPr>
-        <p:style>
-          <a:lnRef idx="1">
-            <a:schemeClr val="accent1"/>
-          </a:lnRef>
-          <a:fillRef idx="3">
-            <a:schemeClr val="accent1"/>
-          </a:fillRef>
-          <a:effectRef idx="2">
-            <a:schemeClr val="accent1"/>
-          </a:effectRef>
-          <a:fontRef idx="minor">
-            <a:schemeClr val="lt1"/>
-          </a:fontRef>
-        </p:style>
-        <p:txBody>
-          <a:bodyPr rtlCol="0" anchor="ctr"/>
-          <a:lstStyle/>
-          <a:p>
-            <a:pPr algn="ctr"/>
-          </a:p>
-        </p:txBody>
-      </p:sp>
-      <p:grpSpPr/>
-      <p:sp>
-        <p:nvSpPr>
-          <p:cNvPr id="3" name="TextBox 2"/>
-          <p:cNvSpPr txBox="1"/>
-          <p:nvPr/>
-        </p:nvSpPr>
-        <p:spPr>
-          <a:xfrm>
-            <a:off x="1143000" y="457200"/>
-            <a:ext cx="6858000" cy="742950"/>
-          </a:xfrm>
-          <a:prstGeom prst="rect">
-            <a:avLst/>
-          </a:prstGeom>
-          <a:noFill/>
-        </p:spPr>
-        <p:txBody>
-          <a:bodyPr wrap="none">
-            <a:spAutoFit/>
-          </a:bodyPr>
-          <a:lstStyle/>
-          <a:p>
-            <a:pPr>
-              <a:defRPr sz="3200" b="1">
-                <a:solidFill>
-                  <a:srgbClr val="FFFFFF"/>
-                </a:solidFill>
-                <a:latin typeface="Inter"/>
-              </a:defRPr>
-            </a:pPr>
-            <a:r>
-              <a:t>Collateral: Letterhead</a:t>
-            </a:r>
-          </a:p>
-        </p:txBody>
-      </p:sp>
-      <p:sp>
-        <p:nvSpPr>
-          <p:cNvPr id="4" name="TextBox 3"/>
-          <p:cNvSpPr txBox="1"/>
-          <p:nvPr/>
-        </p:nvSpPr>
-        <p:spPr>
-          <a:xfrm>
-            <a:off x="1143000" y="1943100"/>
-            <a:ext cx="6858000" cy="2971800"/>
-          </a:xfrm>
-          <a:prstGeom prst="rect">
-            <a:avLst/>
-          </a:prstGeom>
-          <a:noFill/>
-        </p:spPr>
-        <p:txBody>
-          <a:bodyPr wrap="square">
-            <a:spAutoFit/>
-          </a:bodyPr>
-          <a:lstStyle/>
-          <a:p>
-            <a:pPr>
-              <a:defRPr sz="1600" b="0">
-                <a:solidFill>
-                  <a:srgbClr val="FFFFFF"/>
-                </a:solidFill>
-                <a:latin typeface="Source Sans Pro"/>
-              </a:defRPr>
-            </a:pPr>
-            <a:r>
-              <a:t>Letterhead with Flipkart branding, address, and subtle color accent from brand palette.</a:t>
-            </a:r>
-          </a:p>
-        </p:txBody>
-      </p:sp>
-      <p:sp>
-        <p:nvSpPr>
-          <p:cNvPr id="5" name="TextBox 4"/>
-          <p:cNvSpPr txBox="1"/>
-          <p:nvPr/>
-        </p:nvSpPr>
-        <p:spPr>
-          <a:xfrm>
-            <a:off x="457200" y="5657850"/>
-            <a:ext cx="4114800" cy="742950"/>
-          </a:xfrm>
-          <a:prstGeom prst="rect">
-            <a:avLst/>
-          </a:prstGeom>
-          <a:noFill/>
-        </p:spPr>
-        <p:txBody>
-          <a:bodyPr wrap="none">
-            <a:spAutoFit/>
-          </a:bodyPr>
-          <a:lstStyle/>
-          <a:p>
-            <a:pPr algn="l">
-              <a:defRPr sz="1000" b="0">
-                <a:solidFill>
-                  <a:srgbClr val="FFFFFF"/>
-                </a:solidFill>
-                <a:latin typeface="Source Sans Pro"/>
-              </a:defRPr>
-            </a:pPr>
-            <a:r>
-              <a:t>Flipkart</a:t>
-            </a:r>
-          </a:p>
-        </p:txBody>
-      </p:sp>
-      <p:sp>
-        <p:nvSpPr>
-          <p:cNvPr id="6" name="TextBox 5"/>
-          <p:cNvSpPr txBox="1"/>
-          <p:nvPr/>
-        </p:nvSpPr>
-        <p:spPr>
-          <a:xfrm>
-            <a:off x="4572000" y="5657850"/>
-            <a:ext cx="4114800" cy="742950"/>
-          </a:xfrm>
-          <a:prstGeom prst="rect">
-            <a:avLst/>
-          </a:prstGeom>
-          <a:noFill/>
-        </p:spPr>
-        <p:txBody>
-          <a:bodyPr wrap="none">
-            <a:spAutoFit/>
-          </a:bodyPr>
-          <a:lstStyle/>
-          <a:p>
-            <a:pPr algn="r">
-              <a:defRPr sz="1000" b="0">
-                <a:solidFill>
-                  <a:srgbClr val="FFFFFF"/>
-                </a:solidFill>
-                <a:latin typeface="Source Sans Pro"/>
-              </a:defRPr>
-            </a:pPr>
-            <a:r>
-              <a:t>21</a:t>
-            </a:r>
-          </a:p>
-        </p:txBody>
-      </p:sp>
-    </p:spTree>
-  </p:cSld>
-  <p:clrMapOvr>
-    <a:masterClrMapping/>
-  </p:clrMapOvr>
-</p:sld>
-</file>
-
-<file path=ppt/slides/slide22.xml><?xml version="1.0" encoding="utf-8"?>
-<p:sld xmlns:a="http://schemas.openxmlformats.org/drawingml/2006/main" xmlns:p="http://schemas.openxmlformats.org/presentationml/2006/main" xmlns:r="http://schemas.openxmlformats.org/officeDocument/2006/relationships">
-  <p:cSld>
-    <p:spTree>
-      <p:nvGrpSpPr>
-        <p:cNvPr id="1" name=""/>
-        <p:cNvGrpSpPr/>
-        <p:nvPr/>
-      </p:nvGrpSpPr>
-      <p:sp>
-        <p:nvSpPr>
-          <p:cNvPr id="2" name="Rectangle 1"/>
-          <p:cNvSpPr/>
-          <p:nvPr/>
-        </p:nvSpPr>
-        <p:spPr>
-          <a:xfrm>
-            <a:off x="0" y="0"/>
-            <a:ext cx="9144000" cy="6858000"/>
-          </a:xfrm>
-          <a:prstGeom prst="rect">
-            <a:avLst/>
-          </a:prstGeom>
-          <a:solidFill>
-            <a:srgbClr val="1A1A1A"/>
-          </a:solidFill>
-          <a:ln>
-            <a:noFill/>
-          </a:ln>
-        </p:spPr>
-        <p:style>
-          <a:lnRef idx="1">
-            <a:schemeClr val="accent1"/>
-          </a:lnRef>
-          <a:fillRef idx="3">
-            <a:schemeClr val="accent1"/>
-          </a:fillRef>
-          <a:effectRef idx="2">
-            <a:schemeClr val="accent1"/>
-          </a:effectRef>
-          <a:fontRef idx="minor">
-            <a:schemeClr val="lt1"/>
-          </a:fontRef>
-        </p:style>
-        <p:txBody>
-          <a:bodyPr rtlCol="0" anchor="ctr"/>
-          <a:lstStyle/>
-          <a:p>
-            <a:pPr algn="ctr"/>
-          </a:p>
-        </p:txBody>
-      </p:sp>
-      <p:grpSpPr/>
-      <p:sp>
-        <p:nvSpPr>
-          <p:cNvPr id="3" name="TextBox 2"/>
-          <p:cNvSpPr txBox="1"/>
-          <p:nvPr/>
-        </p:nvSpPr>
-        <p:spPr>
-          <a:xfrm>
-            <a:off x="1143000" y="457200"/>
-            <a:ext cx="6858000" cy="742950"/>
-          </a:xfrm>
-          <a:prstGeom prst="rect">
-            <a:avLst/>
-          </a:prstGeom>
-          <a:noFill/>
-        </p:spPr>
-        <p:txBody>
-          <a:bodyPr wrap="none">
-            <a:spAutoFit/>
-          </a:bodyPr>
-          <a:lstStyle/>
-          <a:p>
-            <a:pPr>
-              <a:defRPr sz="3200" b="1">
-                <a:solidFill>
-                  <a:srgbClr val="FFFFFF"/>
-                </a:solidFill>
-                <a:latin typeface="Inter"/>
-              </a:defRPr>
-            </a:pPr>
-            <a:r>
-              <a:t>Collateral: Email Signature</a:t>
-            </a:r>
-          </a:p>
-        </p:txBody>
-      </p:sp>
-      <p:sp>
-        <p:nvSpPr>
-          <p:cNvPr id="4" name="TextBox 3"/>
-          <p:cNvSpPr txBox="1"/>
-          <p:nvPr/>
-        </p:nvSpPr>
-        <p:spPr>
-          <a:xfrm>
-            <a:off x="1143000" y="1943100"/>
-            <a:ext cx="6858000" cy="2971800"/>
-          </a:xfrm>
-          <a:prstGeom prst="rect">
-            <a:avLst/>
-          </a:prstGeom>
-          <a:noFill/>
-        </p:spPr>
-        <p:txBody>
-          <a:bodyPr wrap="square">
-            <a:spAutoFit/>
-          </a:bodyPr>
-          <a:lstStyle/>
-          <a:p>
-            <a:pPr>
-              <a:defRPr sz="1600" b="0">
-                <a:solidFill>
-                  <a:srgbClr val="FFFFFF"/>
-                </a:solidFill>
-                <a:latin typeface="Source Sans Pro"/>
-              </a:defRPr>
-            </a:pPr>
-            <a:r>
-              <a:t>Professional email signature for Flipkart with logo, name, title, and key contact details.</a:t>
-            </a:r>
-          </a:p>
-        </p:txBody>
-      </p:sp>
-      <p:sp>
-        <p:nvSpPr>
-          <p:cNvPr id="5" name="TextBox 4"/>
-          <p:cNvSpPr txBox="1"/>
-          <p:nvPr/>
-        </p:nvSpPr>
-        <p:spPr>
-          <a:xfrm>
-            <a:off x="457200" y="5657850"/>
-            <a:ext cx="4114800" cy="742950"/>
-          </a:xfrm>
-          <a:prstGeom prst="rect">
-            <a:avLst/>
-          </a:prstGeom>
-          <a:noFill/>
-        </p:spPr>
-        <p:txBody>
-          <a:bodyPr wrap="none">
-            <a:spAutoFit/>
-          </a:bodyPr>
-          <a:lstStyle/>
-          <a:p>
-            <a:pPr algn="l">
-              <a:defRPr sz="1000" b="0">
-                <a:solidFill>
-                  <a:srgbClr val="FFFFFF"/>
-                </a:solidFill>
-                <a:latin typeface="Source Sans Pro"/>
-              </a:defRPr>
-            </a:pPr>
-            <a:r>
-              <a:t>Flipkart</a:t>
-            </a:r>
-          </a:p>
-        </p:txBody>
-      </p:sp>
-      <p:sp>
-        <p:nvSpPr>
-          <p:cNvPr id="6" name="TextBox 5"/>
-          <p:cNvSpPr txBox="1"/>
-          <p:nvPr/>
-        </p:nvSpPr>
-        <p:spPr>
-          <a:xfrm>
-            <a:off x="4572000" y="5657850"/>
-            <a:ext cx="4114800" cy="742950"/>
-          </a:xfrm>
-          <a:prstGeom prst="rect">
-            <a:avLst/>
-          </a:prstGeom>
-          <a:noFill/>
-        </p:spPr>
-        <p:txBody>
-          <a:bodyPr wrap="none">
-            <a:spAutoFit/>
-          </a:bodyPr>
-          <a:lstStyle/>
-          <a:p>
-            <a:pPr algn="r">
-              <a:defRPr sz="1000" b="0">
-                <a:solidFill>
-                  <a:srgbClr val="FFFFFF"/>
-                </a:solidFill>
-                <a:latin typeface="Source Sans Pro"/>
-              </a:defRPr>
-            </a:pPr>
-            <a:r>
-              <a:t>22</a:t>
-            </a:r>
-          </a:p>
-        </p:txBody>
-      </p:sp>
-    </p:spTree>
-  </p:cSld>
-  <p:clrMapOvr>
-    <a:masterClrMapping/>
-  </p:clrMapOvr>
-</p:sld>
-</file>
-
-<file path=ppt/slides/slide23.xml><?xml version="1.0" encoding="utf-8"?>
-<p:sld xmlns:a="http://schemas.openxmlformats.org/drawingml/2006/main" xmlns:p="http://schemas.openxmlformats.org/presentationml/2006/main" xmlns:r="http://schemas.openxmlformats.org/officeDocument/2006/relationships">
-  <p:cSld>
-    <p:spTree>
-      <p:nvGrpSpPr>
-        <p:cNvPr id="1" name=""/>
-        <p:cNvGrpSpPr/>
-        <p:nvPr/>
-      </p:nvGrpSpPr>
-      <p:sp>
-        <p:nvSpPr>
-          <p:cNvPr id="2" name="Rectangle 1"/>
-          <p:cNvSpPr/>
-          <p:nvPr/>
-        </p:nvSpPr>
-        <p:spPr>
-          <a:xfrm>
-            <a:off x="0" y="0"/>
-            <a:ext cx="9144000" cy="6858000"/>
-          </a:xfrm>
-          <a:prstGeom prst="rect">
-            <a:avLst/>
-          </a:prstGeom>
-          <a:solidFill>
-            <a:srgbClr val="1A1A1A"/>
-          </a:solidFill>
-          <a:ln>
-            <a:noFill/>
-          </a:ln>
-        </p:spPr>
-        <p:style>
-          <a:lnRef idx="1">
-            <a:schemeClr val="accent1"/>
-          </a:lnRef>
-          <a:fillRef idx="3">
-            <a:schemeClr val="accent1"/>
-          </a:fillRef>
-          <a:effectRef idx="2">
-            <a:schemeClr val="accent1"/>
-          </a:effectRef>
-          <a:fontRef idx="minor">
-            <a:schemeClr val="lt1"/>
-          </a:fontRef>
-        </p:style>
-        <p:txBody>
-          <a:bodyPr rtlCol="0" anchor="ctr"/>
-          <a:lstStyle/>
-          <a:p>
-            <a:pPr algn="ctr"/>
-          </a:p>
-        </p:txBody>
-      </p:sp>
-      <p:grpSpPr/>
-      <p:sp>
-        <p:nvSpPr>
-          <p:cNvPr id="3" name="TextBox 2"/>
-          <p:cNvSpPr txBox="1"/>
-          <p:nvPr/>
-        </p:nvSpPr>
-        <p:spPr>
-          <a:xfrm>
-            <a:off x="1143000" y="457200"/>
-            <a:ext cx="6858000" cy="742950"/>
-          </a:xfrm>
-          <a:prstGeom prst="rect">
-            <a:avLst/>
-          </a:prstGeom>
-          <a:noFill/>
-        </p:spPr>
-        <p:txBody>
-          <a:bodyPr wrap="none">
-            <a:spAutoFit/>
-          </a:bodyPr>
-          <a:lstStyle/>
-          <a:p>
-            <a:pPr>
-              <a:defRPr sz="3200" b="1">
-                <a:solidFill>
-                  <a:srgbClr val="FFFFFF"/>
-                </a:solidFill>
-                <a:latin typeface="Inter"/>
-              </a:defRPr>
-            </a:pPr>
-            <a:r>
-              <a:t>Collateral: Presentation Template</a:t>
-            </a:r>
-          </a:p>
-        </p:txBody>
-      </p:sp>
-      <p:sp>
-        <p:nvSpPr>
-          <p:cNvPr id="4" name="TextBox 3"/>
-          <p:cNvSpPr txBox="1"/>
-          <p:nvPr/>
-        </p:nvSpPr>
-        <p:spPr>
-          <a:xfrm>
-            <a:off x="1143000" y="1943100"/>
-            <a:ext cx="6858000" cy="2971800"/>
-          </a:xfrm>
-          <a:prstGeom prst="rect">
-            <a:avLst/>
-          </a:prstGeom>
-          <a:noFill/>
-        </p:spPr>
-        <p:txBody>
-          <a:bodyPr wrap="square">
-            <a:spAutoFit/>
-          </a:bodyPr>
-          <a:lstStyle/>
-          <a:p>
-            <a:pPr>
-              <a:defRPr sz="1600" b="0">
-                <a:solidFill>
-                  <a:srgbClr val="FFFFFF"/>
-                </a:solidFill>
-                <a:latin typeface="Source Sans Pro"/>
-              </a:defRPr>
-            </a:pPr>
-            <a:r>
-              <a:t>PPT cover slide and content slide layouts using Flipkart palette and fonts.</a:t>
-            </a:r>
-          </a:p>
-        </p:txBody>
-      </p:sp>
-      <p:sp>
-        <p:nvSpPr>
-          <p:cNvPr id="5" name="TextBox 4"/>
-          <p:cNvSpPr txBox="1"/>
-          <p:nvPr/>
-        </p:nvSpPr>
-        <p:spPr>
-          <a:xfrm>
-            <a:off x="457200" y="5657850"/>
-            <a:ext cx="4114800" cy="742950"/>
-          </a:xfrm>
-          <a:prstGeom prst="rect">
-            <a:avLst/>
-          </a:prstGeom>
-          <a:noFill/>
-        </p:spPr>
-        <p:txBody>
-          <a:bodyPr wrap="none">
-            <a:spAutoFit/>
-          </a:bodyPr>
-          <a:lstStyle/>
-          <a:p>
-            <a:pPr algn="l">
-              <a:defRPr sz="1000" b="0">
-                <a:solidFill>
-                  <a:srgbClr val="FFFFFF"/>
-                </a:solidFill>
-                <a:latin typeface="Source Sans Pro"/>
-              </a:defRPr>
-            </a:pPr>
-            <a:r>
-              <a:t>Flipkart</a:t>
-            </a:r>
-          </a:p>
-        </p:txBody>
-      </p:sp>
-      <p:sp>
-        <p:nvSpPr>
-          <p:cNvPr id="6" name="TextBox 5"/>
-          <p:cNvSpPr txBox="1"/>
-          <p:nvPr/>
-        </p:nvSpPr>
-        <p:spPr>
-          <a:xfrm>
-            <a:off x="4572000" y="5657850"/>
-            <a:ext cx="4114800" cy="742950"/>
-          </a:xfrm>
-          <a:prstGeom prst="rect">
-            <a:avLst/>
-          </a:prstGeom>
-          <a:noFill/>
-        </p:spPr>
-        <p:txBody>
-          <a:bodyPr wrap="none">
-            <a:spAutoFit/>
-          </a:bodyPr>
-          <a:lstStyle/>
-          <a:p>
-            <a:pPr algn="r">
-              <a:defRPr sz="1000" b="0">
-                <a:solidFill>
-                  <a:srgbClr val="FFFFFF"/>
-                </a:solidFill>
-                <a:latin typeface="Source Sans Pro"/>
-              </a:defRPr>
-            </a:pPr>
-            <a:r>
-              <a:t>23</a:t>
-            </a:r>
-          </a:p>
-        </p:txBody>
-      </p:sp>
-    </p:spTree>
-  </p:cSld>
-  <p:clrMapOvr>
-    <a:masterClrMapping/>
-  </p:clrMapOvr>
-</p:sld>
-</file>
-
-<file path=ppt/slides/slide24.xml><?xml version="1.0" encoding="utf-8"?>
-<p:sld xmlns:a="http://schemas.openxmlformats.org/drawingml/2006/main" xmlns:p="http://schemas.openxmlformats.org/presentationml/2006/main" xmlns:r="http://schemas.openxmlformats.org/officeDocument/2006/relationships">
-  <p:cSld>
-    <p:spTree>
-      <p:nvGrpSpPr>
-        <p:cNvPr id="1" name=""/>
-        <p:cNvGrpSpPr/>
-        <p:nvPr/>
-      </p:nvGrpSpPr>
-      <p:sp>
-        <p:nvSpPr>
-          <p:cNvPr id="2" name="Rectangle 1"/>
-          <p:cNvSpPr/>
-          <p:nvPr/>
-        </p:nvSpPr>
-        <p:spPr>
-          <a:xfrm>
-            <a:off x="0" y="0"/>
-            <a:ext cx="9144000" cy="6858000"/>
-          </a:xfrm>
-          <a:prstGeom prst="rect">
-            <a:avLst/>
-          </a:prstGeom>
-          <a:solidFill>
-            <a:srgbClr val="1A1A1A"/>
-          </a:solidFill>
-          <a:ln>
-            <a:noFill/>
-          </a:ln>
-        </p:spPr>
-        <p:style>
-          <a:lnRef idx="1">
-            <a:schemeClr val="accent1"/>
-          </a:lnRef>
-          <a:fillRef idx="3">
-            <a:schemeClr val="accent1"/>
-          </a:fillRef>
-          <a:effectRef idx="2">
-            <a:schemeClr val="accent1"/>
-          </a:effectRef>
-          <a:fontRef idx="minor">
-            <a:schemeClr val="lt1"/>
-          </a:fontRef>
-        </p:style>
-        <p:txBody>
-          <a:bodyPr rtlCol="0" anchor="ctr"/>
-          <a:lstStyle/>
-          <a:p>
-            <a:pPr algn="ctr"/>
-          </a:p>
-        </p:txBody>
-      </p:sp>
-      <p:grpSpPr/>
-      <p:sp>
-        <p:nvSpPr>
-          <p:cNvPr id="3" name="TextBox 2"/>
-          <p:cNvSpPr txBox="1"/>
-          <p:nvPr/>
-        </p:nvSpPr>
-        <p:spPr>
-          <a:xfrm>
-            <a:off x="1143000" y="457200"/>
-            <a:ext cx="6858000" cy="742950"/>
-          </a:xfrm>
-          <a:prstGeom prst="rect">
-            <a:avLst/>
-          </a:prstGeom>
-          <a:noFill/>
-        </p:spPr>
-        <p:txBody>
-          <a:bodyPr wrap="none">
-            <a:spAutoFit/>
-          </a:bodyPr>
-          <a:lstStyle/>
-          <a:p>
-            <a:pPr>
-              <a:defRPr sz="3200" b="1">
-                <a:solidFill>
-                  <a:srgbClr val="FFFFFF"/>
-                </a:solidFill>
-                <a:latin typeface="Inter"/>
-              </a:defRPr>
-            </a:pPr>
-            <a:r>
-              <a:t>Collateral: Social Templates</a:t>
-            </a:r>
-          </a:p>
-        </p:txBody>
-      </p:sp>
-      <p:sp>
-        <p:nvSpPr>
-          <p:cNvPr id="4" name="TextBox 3"/>
-          <p:cNvSpPr txBox="1"/>
-          <p:nvPr/>
-        </p:nvSpPr>
-        <p:spPr>
-          <a:xfrm>
-            <a:off x="1143000" y="1943100"/>
-            <a:ext cx="6858000" cy="2971800"/>
-          </a:xfrm>
-          <a:prstGeom prst="rect">
-            <a:avLst/>
-          </a:prstGeom>
-          <a:noFill/>
-        </p:spPr>
-        <p:txBody>
-          <a:bodyPr wrap="square">
-            <a:spAutoFit/>
-          </a:bodyPr>
-          <a:lstStyle/>
-          <a:p>
-            <a:pPr>
-              <a:defRPr sz="1600" b="0">
-                <a:solidFill>
-                  <a:srgbClr val="FFFFFF"/>
-                </a:solidFill>
-                <a:latin typeface="Source Sans Pro"/>
-              </a:defRPr>
-            </a:pPr>
-            <a:r>
-              <a:t>Instagram/Facebook post and story templates reflecting Flipkart's style and values.</a:t>
-            </a:r>
-          </a:p>
-        </p:txBody>
-      </p:sp>
-      <p:sp>
-        <p:nvSpPr>
-          <p:cNvPr id="5" name="TextBox 4"/>
-          <p:cNvSpPr txBox="1"/>
-          <p:nvPr/>
-        </p:nvSpPr>
-        <p:spPr>
-          <a:xfrm>
-            <a:off x="457200" y="5657850"/>
-            <a:ext cx="4114800" cy="742950"/>
-          </a:xfrm>
-          <a:prstGeom prst="rect">
-            <a:avLst/>
-          </a:prstGeom>
-          <a:noFill/>
-        </p:spPr>
-        <p:txBody>
-          <a:bodyPr wrap="none">
-            <a:spAutoFit/>
-          </a:bodyPr>
-          <a:lstStyle/>
-          <a:p>
-            <a:pPr algn="l">
-              <a:defRPr sz="1000" b="0">
-                <a:solidFill>
-                  <a:srgbClr val="FFFFFF"/>
-                </a:solidFill>
-                <a:latin typeface="Source Sans Pro"/>
-              </a:defRPr>
-            </a:pPr>
-            <a:r>
-              <a:t>Flipkart</a:t>
-            </a:r>
-          </a:p>
-        </p:txBody>
-      </p:sp>
-      <p:sp>
-        <p:nvSpPr>
-          <p:cNvPr id="6" name="TextBox 5"/>
-          <p:cNvSpPr txBox="1"/>
-          <p:nvPr/>
-        </p:nvSpPr>
-        <p:spPr>
-          <a:xfrm>
-            <a:off x="4572000" y="5657850"/>
-            <a:ext cx="4114800" cy="742950"/>
-          </a:xfrm>
-          <a:prstGeom prst="rect">
-            <a:avLst/>
-          </a:prstGeom>
-          <a:noFill/>
-        </p:spPr>
-        <p:txBody>
-          <a:bodyPr wrap="none">
-            <a:spAutoFit/>
-          </a:bodyPr>
-          <a:lstStyle/>
-          <a:p>
-            <a:pPr algn="r">
-              <a:defRPr sz="1000" b="0">
-                <a:solidFill>
-                  <a:srgbClr val="FFFFFF"/>
-                </a:solidFill>
-                <a:latin typeface="Source Sans Pro"/>
-              </a:defRPr>
-            </a:pPr>
-            <a:r>
-              <a:t>24</a:t>
+              <a:defRPr sz="900" b="0">
+                <a:solidFill>
+                  <a:srgbClr val="CCCCCC"/>
+                </a:solidFill>
+                <a:latin typeface="Source Sans Pro"/>
+              </a:defRPr>
+            </a:pPr>
+            <a:r>
+              <a:t>Imagery</a:t>
             </a:r>
           </a:p>
         </p:txBody>
@@ -8173,8 +5162,146 @@
         </p:nvSpPr>
         <p:spPr>
           <a:xfrm>
-            <a:off x="1143000" y="457200"/>
-            <a:ext cx="6858000" cy="742950"/>
+            <a:off x="800100" y="1051560"/>
+            <a:ext cx="6858000" cy="2971800"/>
+          </a:xfrm>
+          <a:prstGeom prst="rect">
+            <a:avLst/>
+          </a:prstGeom>
+          <a:noFill/>
+        </p:spPr>
+        <p:txBody>
+          <a:bodyPr wrap="square" lIns="0" rIns="0" tIns="0" bIns="0">
+            <a:spAutoFit/>
+          </a:bodyPr>
+          <a:lstStyle/>
+          <a:p>
+            <a:pPr algn="l">
+              <a:spcAft>
+                <a:spcPts val="800"/>
+              </a:spcAft>
+              <a:defRPr sz="2000" b="0">
+                <a:solidFill>
+                  <a:srgbClr val="FFFFFF"/>
+                </a:solidFill>
+                <a:latin typeface="Source Sans Pro"/>
+              </a:defRPr>
+            </a:pPr>
+            <a:r>
+              <a:t>The following brand identity system for Flipkart</a:t>
+            </a:r>
+          </a:p>
+          <a:p>
+            <a:pPr algn="l">
+              <a:spcAft>
+                <a:spcPts val="800"/>
+              </a:spcAft>
+              <a:defRPr sz="2000" b="0">
+                <a:solidFill>
+                  <a:srgbClr val="FFFFFF"/>
+                </a:solidFill>
+                <a:latin typeface="Source Sans Pro"/>
+              </a:defRPr>
+            </a:pPr>
+            <a:r>
+              <a:t>is thoughtfully crafted to present our brand in</a:t>
+            </a:r>
+          </a:p>
+          <a:p>
+            <a:pPr algn="l">
+              <a:spcAft>
+                <a:spcPts val="800"/>
+              </a:spcAft>
+              <a:defRPr sz="2000" b="0">
+                <a:solidFill>
+                  <a:srgbClr val="FFFFFF"/>
+                </a:solidFill>
+                <a:latin typeface="Source Sans Pro"/>
+              </a:defRPr>
+            </a:pPr>
+            <a:r>
+              <a:t>an international, engaging, consistent, recognizable</a:t>
+            </a:r>
+          </a:p>
+          <a:p>
+            <a:pPr algn="l">
+              <a:spcAft>
+                <a:spcPts val="800"/>
+              </a:spcAft>
+              <a:defRPr sz="2000" b="0">
+                <a:solidFill>
+                  <a:srgbClr val="FFFFFF"/>
+                </a:solidFill>
+                <a:latin typeface="Source Sans Pro"/>
+              </a:defRPr>
+            </a:pPr>
+            <a:r>
+              <a:t>and proprietary way. Unique in form, versatile in its</a:t>
+            </a:r>
+          </a:p>
+          <a:p>
+            <a:pPr algn="l">
+              <a:spcAft>
+                <a:spcPts val="800"/>
+              </a:spcAft>
+              <a:defRPr sz="2000" b="0">
+                <a:solidFill>
+                  <a:srgbClr val="FFFFFF"/>
+                </a:solidFill>
+                <a:latin typeface="Source Sans Pro"/>
+              </a:defRPr>
+            </a:pPr>
+            <a:r>
+              <a:t>application and unified by a fundamental principle.</a:t>
+            </a:r>
+          </a:p>
+        </p:txBody>
+      </p:sp>
+      <p:cxnSp>
+        <p:nvCxnSpPr>
+          <p:cNvPr id="3" name="Connector 2"/>
+          <p:cNvCxnSpPr/>
+          <p:nvPr/>
+        </p:nvCxnSpPr>
+        <p:spPr>
+          <a:xfrm>
+            <a:off x="457200" y="4914900.0"/>
+            <a:ext cx="8229600" cy="0.0"/>
+          </a:xfrm>
+          <a:prstGeom prst="line">
+            <a:avLst/>
+          </a:prstGeom>
+          <a:ln w="25400">
+            <a:solidFill>
+              <a:srgbClr val="EA580C"/>
+            </a:solidFill>
+          </a:ln>
+        </p:spPr>
+        <p:style>
+          <a:lnRef idx="2">
+            <a:schemeClr val="accent1"/>
+          </a:lnRef>
+          <a:fillRef idx="0">
+            <a:schemeClr val="accent1"/>
+          </a:fillRef>
+          <a:effectRef idx="1">
+            <a:schemeClr val="accent1"/>
+          </a:effectRef>
+          <a:fontRef idx="minor">
+            <a:schemeClr val="tx1"/>
+          </a:fontRef>
+        </p:style>
+      </p:cxnSp>
+      <p:sp>
+        <p:nvSpPr>
+          <p:cNvPr id="4" name="TextBox 3"/>
+          <p:cNvSpPr txBox="1"/>
+          <p:nvPr/>
+        </p:nvSpPr>
+        <p:spPr>
+          <a:xfrm>
+            <a:off x="800100" y="5189220"/>
+            <a:ext cx="3657600" cy="731520"/>
           </a:xfrm>
           <a:prstGeom prst="rect">
             <a:avLst/>
@@ -8187,98 +5314,16 @@
           </a:bodyPr>
           <a:lstStyle/>
           <a:p>
-            <a:pPr algn="ctr">
-              <a:defRPr sz="3200" b="1">
-                <a:solidFill>
-                  <a:srgbClr val="2563EB"/>
+            <a:pPr algn="l">
+              <a:defRPr sz="2800" b="1">
+                <a:solidFill>
+                  <a:srgbClr val="EA580C"/>
                 </a:solidFill>
                 <a:latin typeface="Inter"/>
               </a:defRPr>
             </a:pPr>
             <a:r>
-              <a:t>Introduction</a:t>
-            </a:r>
-          </a:p>
-        </p:txBody>
-      </p:sp>
-      <p:sp>
-        <p:nvSpPr>
-          <p:cNvPr id="3" name="TextBox 2"/>
-          <p:cNvSpPr txBox="1"/>
-          <p:nvPr/>
-        </p:nvSpPr>
-        <p:spPr>
-          <a:xfrm>
-            <a:off x="1828800" y="1943100"/>
-            <a:ext cx="5486400" cy="2971800"/>
-          </a:xfrm>
-          <a:prstGeom prst="rect">
-            <a:avLst/>
-          </a:prstGeom>
-          <a:noFill/>
-        </p:spPr>
-        <p:txBody>
-          <a:bodyPr wrap="square">
-            <a:spAutoFit/>
-          </a:bodyPr>
-          <a:lstStyle/>
-          <a:p>
-            <a:pPr algn="ctr">
-              <a:defRPr sz="1800" b="0">
-                <a:solidFill>
-                  <a:srgbClr val="FFFFFF"/>
-                </a:solidFill>
-                <a:latin typeface="Source Sans Pro"/>
-              </a:defRPr>
-            </a:pPr>
-            <a:r>
-              <a:t>Welcome to the Flipkart Brand Book.</a:t>
-            </a:r>
-          </a:p>
-          <a:p>
-            <a:pPr algn="ctr">
-              <a:defRPr sz="1800" b="0">
-                <a:solidFill>
-                  <a:srgbClr val="FFFFFF"/>
-                </a:solidFill>
-                <a:latin typeface="Source Sans Pro"/>
-              </a:defRPr>
-            </a:pPr>
-          </a:p>
-          <a:p>
-            <a:pPr algn="ctr">
-              <a:defRPr sz="1800" b="0">
-                <a:solidFill>
-                  <a:srgbClr val="FFFFFF"/>
-                </a:solidFill>
-                <a:latin typeface="Source Sans Pro"/>
-              </a:defRPr>
-            </a:pPr>
-            <a:r>
-              <a:t>This comprehensive guide outlines our brand identity, values, and visual standards to ensure consistent brand representation across all touchpoints.</a:t>
-            </a:r>
-          </a:p>
-          <a:p>
-            <a:pPr algn="ctr">
-              <a:defRPr sz="1800" b="0">
-                <a:solidFill>
-                  <a:srgbClr val="FFFFFF"/>
-                </a:solidFill>
-                <a:latin typeface="Source Sans Pro"/>
-              </a:defRPr>
-            </a:pPr>
-          </a:p>
-          <a:p>
-            <a:pPr algn="ctr">
-              <a:defRPr sz="1800" b="0">
-                <a:solidFill>
-                  <a:srgbClr val="FFFFFF"/>
-                </a:solidFill>
-                <a:latin typeface="Source Sans Pro"/>
-              </a:defRPr>
-            </a:pPr>
-            <a:r>
-              <a:t>Our mission is to serve Price-conscious shoppers, Middle-class families, Young professionals, Students, Digital-savvy consumers, Tier 2 &amp; Tier 3 city customers, Small businesses, Value-seeking online buyers. with excellence and innovation.</a:t>
+              <a:t>INTRODUCTION</a:t>
             </a:r>
           </a:p>
         </p:txBody>
@@ -8334,7 +5379,7 @@
             <a:pPr algn="ctr">
               <a:defRPr sz="3200" b="1">
                 <a:solidFill>
-                  <a:srgbClr val="2563EB"/>
+                  <a:srgbClr val="EA580C"/>
                 </a:solidFill>
                 <a:latin typeface="Inter"/>
               </a:defRPr>
@@ -8370,7 +5415,7 @@
             <a:pPr algn="ctr">
               <a:defRPr sz="2400" b="0">
                 <a:solidFill>
-                  <a:srgbClr val="2563EB"/>
+                  <a:srgbClr val="EA580C"/>
                 </a:solidFill>
                 <a:latin typeface="Source Sans Pro"/>
               </a:defRPr>
@@ -8399,7 +5444,7 @@
               </a:defRPr>
             </a:pPr>
             <a:r>
-              <a:t>Vision: Distinctive E-commerce, Retail, Technology, Logistics &amp; Supply Chain solution focused on Price-conscious shoppers, Middle-class families, Young professionals, Students, Digital-savvy consumers, Tier 2 &amp; Tier 3 city customers, Small businesses, Value-seeking online buyers.</a:t>
+              <a:t>Vision: To be the leading force in technological innovation that empowers businesses and individuals to achieve their full potential.</a:t>
             </a:r>
           </a:p>
           <a:p>
@@ -8422,7 +5467,7 @@
               </a:defRPr>
             </a:pPr>
             <a:r>
-              <a:t>Mission: Empowering Price-conscious shoppers, Middle-class families, Young professionals, Students, Digital-savvy consumers, Tier 2 &amp; Tier 3 city customers, Small businesses, Value-seeking online buyers. through innovative E-commerce, Retail, Technology, Logistics &amp; Supply Chain solutions</a:t>
+              <a:t>Mission: We create cutting-edge technology solutions that simplify complex challenges and drive meaningful progress for our clients.</a:t>
             </a:r>
           </a:p>
           <a:p>
@@ -8458,7 +5503,7 @@
               </a:defRPr>
             </a:pPr>
             <a:r>
-              <a:t>• Customer-Centricity</a:t>
+              <a:t>• Customer-Centricity: Driving progress through creative thinking and breakthrough solutions</a:t>
             </a:r>
           </a:p>
           <a:p>
@@ -8471,7 +5516,7 @@
               </a:defRPr>
             </a:pPr>
             <a:r>
-              <a:t>• Innovation</a:t>
+              <a:t>• Innovation: Building trust through transparent and reliable service delivery</a:t>
             </a:r>
           </a:p>
           <a:p>
@@ -8484,7 +5529,7 @@
               </a:defRPr>
             </a:pPr>
             <a:r>
-              <a:t>• Affordability</a:t>
+              <a:t>• Affordability: Putting people at the center of everything we do</a:t>
             </a:r>
           </a:p>
           <a:p>
@@ -8497,7 +5542,7 @@
               </a:defRPr>
             </a:pPr>
             <a:r>
-              <a:t>• Trust</a:t>
+              <a:t>• Trust: Commitment to excellence in all our endeavors</a:t>
             </a:r>
           </a:p>
           <a:p>
@@ -8510,7 +5555,7 @@
               </a:defRPr>
             </a:pPr>
             <a:r>
-              <a:t>• Reliability</a:t>
+              <a:t>• Reliability: Commitment to excellence in all our endeavors</a:t>
             </a:r>
           </a:p>
           <a:p>
@@ -8523,7 +5568,7 @@
               </a:defRPr>
             </a:pPr>
             <a:r>
-              <a:t>• Convenience</a:t>
+              <a:t>• Convenience: Commitment to excellence in all our endeavors</a:t>
             </a:r>
           </a:p>
           <a:p>
@@ -8536,7 +5581,7 @@
               </a:defRPr>
             </a:pPr>
             <a:r>
-              <a:t>• Inclusivity</a:t>
+              <a:t>• Inclusivity: Commitment to excellence in all our endeavors</a:t>
             </a:r>
           </a:p>
           <a:p>
@@ -8549,7 +5594,7 @@
               </a:defRPr>
             </a:pPr>
             <a:r>
-              <a:t>• Agility</a:t>
+              <a:t>• Agility: Commitment to excellence in all our endeavors</a:t>
             </a:r>
           </a:p>
           <a:p>
@@ -8562,7 +5607,7 @@
               </a:defRPr>
             </a:pPr>
             <a:r>
-              <a:t>• Empowerment</a:t>
+              <a:t>• Empowerment: Commitment to excellence in all our endeavors</a:t>
             </a:r>
           </a:p>
           <a:p>
@@ -8575,7 +5620,7 @@
               </a:defRPr>
             </a:pPr>
             <a:r>
-              <a:t>• Growth</a:t>
+              <a:t>• Growth: Commitment to excellence in all our endeavors</a:t>
             </a:r>
           </a:p>
           <a:p>
@@ -8676,94 +5721,63 @@
             <a:pPr>
               <a:defRPr sz="3200" b="1">
                 <a:solidFill>
-                  <a:srgbClr val="FFFFFF"/>
+                  <a:srgbClr val="EA580C"/>
                 </a:solidFill>
                 <a:latin typeface="Inter"/>
               </a:defRPr>
             </a:pPr>
             <a:r>
-              <a:t>Logo Variations (3 designs)</a:t>
-            </a:r>
-          </a:p>
-        </p:txBody>
-      </p:sp>
-      <p:sp>
-        <p:nvSpPr>
-          <p:cNvPr id="4" name="Rectangle 3"/>
-          <p:cNvSpPr/>
-          <p:nvPr/>
-        </p:nvSpPr>
-        <p:spPr>
-          <a:xfrm>
-            <a:off x="1051560" y="1851660"/>
-            <a:ext cx="1554480" cy="1668780"/>
-          </a:xfrm>
-          <a:prstGeom prst="rect">
-            <a:avLst/>
-          </a:prstGeom>
-          <a:solidFill>
-            <a:srgbClr val="FFFFFF"/>
-          </a:solidFill>
-          <a:ln>
-            <a:noFill/>
-          </a:ln>
-        </p:spPr>
-        <p:style>
-          <a:lnRef idx="1">
-            <a:schemeClr val="accent1"/>
-          </a:lnRef>
-          <a:fillRef idx="3">
-            <a:schemeClr val="accent1"/>
-          </a:fillRef>
-          <a:effectRef idx="2">
-            <a:schemeClr val="accent1"/>
-          </a:effectRef>
-          <a:fontRef idx="minor">
-            <a:schemeClr val="lt1"/>
-          </a:fontRef>
-        </p:style>
-        <p:txBody>
-          <a:bodyPr rtlCol="0" anchor="ctr"/>
-          <a:lstStyle/>
-          <a:p>
-            <a:pPr algn="ctr"/>
-          </a:p>
-        </p:txBody>
-      </p:sp>
-      <p:pic>
-        <p:nvPicPr>
-          <p:cNvPr id="5" name="Picture 4" descr="flipkart_logo_1_20250828_172836_18c40558.png"/>
-          <p:cNvPicPr>
-            <a:picLocks noChangeAspect="1"/>
-          </p:cNvPicPr>
-          <p:nvPr/>
-        </p:nvPicPr>
-        <p:blipFill>
-          <a:blip r:embed="rId2"/>
-          <a:stretch>
-            <a:fillRect/>
-          </a:stretch>
-        </p:blipFill>
+              <a:t>Brand Story (1/2)</a:t>
+            </a:r>
+          </a:p>
+        </p:txBody>
+      </p:sp>
+      <p:sp>
+        <p:nvSpPr>
+          <p:cNvPr id="4" name="TextBox 3"/>
+          <p:cNvSpPr txBox="1"/>
+          <p:nvPr/>
+        </p:nvSpPr>
         <p:spPr>
           <a:xfrm>
             <a:off x="1143000" y="1943100"/>
-            <a:ext cx="1371600" cy="1485900"/>
-          </a:xfrm>
-          <a:prstGeom prst="rect">
-            <a:avLst/>
-          </a:prstGeom>
-        </p:spPr>
-      </p:pic>
-      <p:sp>
-        <p:nvSpPr>
-          <p:cNvPr id="6" name="TextBox 5"/>
+            <a:ext cx="6858000" cy="2971800"/>
+          </a:xfrm>
+          <a:prstGeom prst="rect">
+            <a:avLst/>
+          </a:prstGeom>
+          <a:noFill/>
+        </p:spPr>
+        <p:txBody>
+          <a:bodyPr wrap="square">
+            <a:spAutoFit/>
+          </a:bodyPr>
+          <a:lstStyle/>
+          <a:p>
+            <a:pPr>
+              <a:defRPr sz="1600" b="0">
+                <a:solidFill>
+                  <a:srgbClr val="EA580C"/>
+                </a:solidFill>
+                <a:latin typeface="Source Sans Pro"/>
+              </a:defRPr>
+            </a:pPr>
+            <a:r>
+              <a:t>In the bustling streets of India, where tradition meets modernity, there is a beacon of innovation that shines brightly – Flipkart. Born out of a vision to revolutionize the way Price-conscious shoppers, Middle-class families, Young professionals, Students, Digital-savvy consumers, Tier 2 &amp; Tier 3 city customers, Small businesses, and Value-seeking online buyers shop, Flipkart has become synonymous with cutting-edge E-commerce, Retail, Technology, Logistics &amp; Supply Chain solutions. At the heart of Flipkart's success lies a deep-rooted commitment to its core values – Customer-Centricity, Innovation, Affordability, Trust, Reliability, Convenience, Inclusivity, Agility, Empowerment, and Growth. From its humble beginnings, Flipkart has always placed the customer at the center of everything it does.</a:t>
+            </a:r>
+          </a:p>
+        </p:txBody>
+      </p:sp>
+      <p:sp>
+        <p:nvSpPr>
+          <p:cNvPr id="5" name="TextBox 4"/>
           <p:cNvSpPr txBox="1"/>
           <p:nvPr/>
         </p:nvSpPr>
         <p:spPr>
           <a:xfrm>
-            <a:off x="1143000" y="3429000"/>
-            <a:ext cx="1371600" cy="742950"/>
+            <a:off x="457200" y="5657850"/>
+            <a:ext cx="4114800" cy="742950"/>
           </a:xfrm>
           <a:prstGeom prst="rect">
             <a:avLst/>
@@ -8776,97 +5790,30 @@
           </a:bodyPr>
           <a:lstStyle/>
           <a:p>
-            <a:pPr algn="ctr">
-              <a:defRPr sz="1200" b="0">
-                <a:solidFill>
-                  <a:srgbClr val="FFFFFF"/>
-                </a:solidFill>
-                <a:latin typeface="Source Sans Pro"/>
-              </a:defRPr>
-            </a:pPr>
-            <a:r>
-              <a:t>Version 1</a:t>
-            </a:r>
-          </a:p>
-        </p:txBody>
-      </p:sp>
-      <p:sp>
-        <p:nvSpPr>
-          <p:cNvPr id="7" name="Rectangle 6"/>
-          <p:cNvSpPr/>
-          <p:nvPr/>
-        </p:nvSpPr>
-        <p:spPr>
-          <a:xfrm>
-            <a:off x="3108960" y="1851660"/>
-            <a:ext cx="1554480" cy="1668780"/>
-          </a:xfrm>
-          <a:prstGeom prst="rect">
-            <a:avLst/>
-          </a:prstGeom>
-          <a:solidFill>
-            <a:srgbClr val="FFFFFF"/>
-          </a:solidFill>
-          <a:ln>
-            <a:noFill/>
-          </a:ln>
-        </p:spPr>
-        <p:style>
-          <a:lnRef idx="1">
-            <a:schemeClr val="accent1"/>
-          </a:lnRef>
-          <a:fillRef idx="3">
-            <a:schemeClr val="accent1"/>
-          </a:fillRef>
-          <a:effectRef idx="2">
-            <a:schemeClr val="accent1"/>
-          </a:effectRef>
-          <a:fontRef idx="minor">
-            <a:schemeClr val="lt1"/>
-          </a:fontRef>
-        </p:style>
-        <p:txBody>
-          <a:bodyPr rtlCol="0" anchor="ctr"/>
-          <a:lstStyle/>
-          <a:p>
-            <a:pPr algn="ctr"/>
-          </a:p>
-        </p:txBody>
-      </p:sp>
-      <p:pic>
-        <p:nvPicPr>
-          <p:cNvPr id="8" name="Picture 7" descr="flipkart_logo_2_20250828_172855_a83833dd.png"/>
-          <p:cNvPicPr>
-            <a:picLocks noChangeAspect="1"/>
-          </p:cNvPicPr>
-          <p:nvPr/>
-        </p:nvPicPr>
-        <p:blipFill>
-          <a:blip r:embed="rId3"/>
-          <a:stretch>
-            <a:fillRect/>
-          </a:stretch>
-        </p:blipFill>
-        <p:spPr>
-          <a:xfrm>
-            <a:off x="3200400" y="1943100"/>
-            <a:ext cx="1371600" cy="1485900"/>
-          </a:xfrm>
-          <a:prstGeom prst="rect">
-            <a:avLst/>
-          </a:prstGeom>
-        </p:spPr>
-      </p:pic>
-      <p:sp>
-        <p:nvSpPr>
-          <p:cNvPr id="9" name="TextBox 8"/>
+            <a:pPr algn="l">
+              <a:defRPr sz="1000" b="0">
+                <a:solidFill>
+                  <a:srgbClr val="EA580C"/>
+                </a:solidFill>
+                <a:latin typeface="Source Sans Pro"/>
+              </a:defRPr>
+            </a:pPr>
+            <a:r>
+              <a:t>Flipkart</a:t>
+            </a:r>
+          </a:p>
+        </p:txBody>
+      </p:sp>
+      <p:sp>
+        <p:nvSpPr>
+          <p:cNvPr id="6" name="TextBox 5"/>
           <p:cNvSpPr txBox="1"/>
           <p:nvPr/>
         </p:nvSpPr>
         <p:spPr>
           <a:xfrm>
-            <a:off x="3200400" y="3429000"/>
-            <a:ext cx="1371600" cy="742950"/>
+            <a:off x="4572000" y="5657850"/>
+            <a:ext cx="4114800" cy="742950"/>
           </a:xfrm>
           <a:prstGeom prst="rect">
             <a:avLst/>
@@ -8879,221 +5826,10 @@
           </a:bodyPr>
           <a:lstStyle/>
           <a:p>
-            <a:pPr algn="ctr">
-              <a:defRPr sz="1200" b="0">
-                <a:solidFill>
-                  <a:srgbClr val="FFFFFF"/>
-                </a:solidFill>
-                <a:latin typeface="Source Sans Pro"/>
-              </a:defRPr>
-            </a:pPr>
-            <a:r>
-              <a:t>Version 2</a:t>
-            </a:r>
-          </a:p>
-        </p:txBody>
-      </p:sp>
-      <p:sp>
-        <p:nvSpPr>
-          <p:cNvPr id="10" name="Rectangle 9"/>
-          <p:cNvSpPr/>
-          <p:nvPr/>
-        </p:nvSpPr>
-        <p:spPr>
-          <a:xfrm>
-            <a:off x="5166360" y="1851660"/>
-            <a:ext cx="1554480" cy="1668780"/>
-          </a:xfrm>
-          <a:prstGeom prst="rect">
-            <a:avLst/>
-          </a:prstGeom>
-          <a:solidFill>
-            <a:srgbClr val="FFFFFF"/>
-          </a:solidFill>
-          <a:ln>
-            <a:noFill/>
-          </a:ln>
-        </p:spPr>
-        <p:style>
-          <a:lnRef idx="1">
-            <a:schemeClr val="accent1"/>
-          </a:lnRef>
-          <a:fillRef idx="3">
-            <a:schemeClr val="accent1"/>
-          </a:fillRef>
-          <a:effectRef idx="2">
-            <a:schemeClr val="accent1"/>
-          </a:effectRef>
-          <a:fontRef idx="minor">
-            <a:schemeClr val="lt1"/>
-          </a:fontRef>
-        </p:style>
-        <p:txBody>
-          <a:bodyPr rtlCol="0" anchor="ctr"/>
-          <a:lstStyle/>
-          <a:p>
-            <a:pPr algn="ctr"/>
-          </a:p>
-        </p:txBody>
-      </p:sp>
-      <p:pic>
-        <p:nvPicPr>
-          <p:cNvPr id="11" name="Picture 10" descr="flipkart_logo_3_20250828_172914_22af2aa2.png"/>
-          <p:cNvPicPr>
-            <a:picLocks noChangeAspect="1"/>
-          </p:cNvPicPr>
-          <p:nvPr/>
-        </p:nvPicPr>
-        <p:blipFill>
-          <a:blip r:embed="rId4"/>
-          <a:stretch>
-            <a:fillRect/>
-          </a:stretch>
-        </p:blipFill>
-        <p:spPr>
-          <a:xfrm>
-            <a:off x="5257800" y="1943100"/>
-            <a:ext cx="1371600" cy="1485900"/>
-          </a:xfrm>
-          <a:prstGeom prst="rect">
-            <a:avLst/>
-          </a:prstGeom>
-        </p:spPr>
-      </p:pic>
-      <p:sp>
-        <p:nvSpPr>
-          <p:cNvPr id="12" name="TextBox 11"/>
-          <p:cNvSpPr txBox="1"/>
-          <p:nvPr/>
-        </p:nvSpPr>
-        <p:spPr>
-          <a:xfrm>
-            <a:off x="5257800" y="3429000"/>
-            <a:ext cx="1371600" cy="742950"/>
-          </a:xfrm>
-          <a:prstGeom prst="rect">
-            <a:avLst/>
-          </a:prstGeom>
-          <a:noFill/>
-        </p:spPr>
-        <p:txBody>
-          <a:bodyPr wrap="none">
-            <a:spAutoFit/>
-          </a:bodyPr>
-          <a:lstStyle/>
-          <a:p>
-            <a:pPr algn="ctr">
-              <a:defRPr sz="1200" b="0">
-                <a:solidFill>
-                  <a:srgbClr val="FFFFFF"/>
-                </a:solidFill>
-                <a:latin typeface="Source Sans Pro"/>
-              </a:defRPr>
-            </a:pPr>
-            <a:r>
-              <a:t>Version 3</a:t>
-            </a:r>
-          </a:p>
-        </p:txBody>
-      </p:sp>
-      <p:sp>
-        <p:nvSpPr>
-          <p:cNvPr id="13" name="TextBox 12"/>
-          <p:cNvSpPr txBox="1"/>
-          <p:nvPr/>
-        </p:nvSpPr>
-        <p:spPr>
-          <a:xfrm>
-            <a:off x="1143000" y="4914900"/>
-            <a:ext cx="7543800" cy="742950"/>
-          </a:xfrm>
-          <a:prstGeom prst="rect">
-            <a:avLst/>
-          </a:prstGeom>
-          <a:noFill/>
-        </p:spPr>
-        <p:txBody>
-          <a:bodyPr wrap="none">
-            <a:spAutoFit/>
-          </a:bodyPr>
-          <a:lstStyle/>
-          <a:p>
-            <a:pPr algn="ctr">
-              <a:defRPr sz="1200" b="0">
-                <a:solidFill>
-                  <a:srgbClr val="FFFFFF"/>
-                </a:solidFill>
-                <a:latin typeface="Source Sans Pro"/>
-              </a:defRPr>
-            </a:pPr>
-            <a:r>
-              <a:t>Minimum size: 0.5 inches • Clearspace: 0.25 inches on all sides</a:t>
-            </a:r>
-          </a:p>
-        </p:txBody>
-      </p:sp>
-      <p:sp>
-        <p:nvSpPr>
-          <p:cNvPr id="14" name="TextBox 13"/>
-          <p:cNvSpPr txBox="1"/>
-          <p:nvPr/>
-        </p:nvSpPr>
-        <p:spPr>
-          <a:xfrm>
-            <a:off x="457200" y="5657850"/>
-            <a:ext cx="4114800" cy="742950"/>
-          </a:xfrm>
-          <a:prstGeom prst="rect">
-            <a:avLst/>
-          </a:prstGeom>
-          <a:noFill/>
-        </p:spPr>
-        <p:txBody>
-          <a:bodyPr wrap="none">
-            <a:spAutoFit/>
-          </a:bodyPr>
-          <a:lstStyle/>
-          <a:p>
-            <a:pPr algn="l">
-              <a:defRPr sz="1000" b="0">
-                <a:solidFill>
-                  <a:srgbClr val="FFFFFF"/>
-                </a:solidFill>
-                <a:latin typeface="Source Sans Pro"/>
-              </a:defRPr>
-            </a:pPr>
-            <a:r>
-              <a:t>Flipkart</a:t>
-            </a:r>
-          </a:p>
-        </p:txBody>
-      </p:sp>
-      <p:sp>
-        <p:nvSpPr>
-          <p:cNvPr id="15" name="TextBox 14"/>
-          <p:cNvSpPr txBox="1"/>
-          <p:nvPr/>
-        </p:nvSpPr>
-        <p:spPr>
-          <a:xfrm>
-            <a:off x="4572000" y="5657850"/>
-            <a:ext cx="4114800" cy="742950"/>
-          </a:xfrm>
-          <a:prstGeom prst="rect">
-            <a:avLst/>
-          </a:prstGeom>
-          <a:noFill/>
-        </p:spPr>
-        <p:txBody>
-          <a:bodyPr wrap="none">
-            <a:spAutoFit/>
-          </a:bodyPr>
-          <a:lstStyle/>
-          <a:p>
             <a:pPr algn="r">
               <a:defRPr sz="1000" b="0">
                 <a:solidFill>
-                  <a:srgbClr val="FFFFFF"/>
+                  <a:srgbClr val="EA580C"/>
                 </a:solidFill>
                 <a:latin typeface="Source Sans Pro"/>
               </a:defRPr>
@@ -9190,72 +5926,27 @@
             <a:pPr>
               <a:defRPr sz="3200" b="1">
                 <a:solidFill>
-                  <a:srgbClr val="FFFFFF"/>
+                  <a:srgbClr val="EA580C"/>
                 </a:solidFill>
                 <a:latin typeface="Inter"/>
               </a:defRPr>
             </a:pPr>
             <a:r>
-              <a:t>Color Palette</a:t>
-            </a:r>
-          </a:p>
-        </p:txBody>
-      </p:sp>
-      <p:sp>
-        <p:nvSpPr>
-          <p:cNvPr id="4" name="Rectangle 3"/>
-          <p:cNvSpPr/>
+              <a:t>Brand Story (2/2)</a:t>
+            </a:r>
+          </a:p>
+        </p:txBody>
+      </p:sp>
+      <p:sp>
+        <p:nvSpPr>
+          <p:cNvPr id="4" name="TextBox 3"/>
+          <p:cNvSpPr txBox="1"/>
           <p:nvPr/>
         </p:nvSpPr>
         <p:spPr>
           <a:xfrm>
             <a:off x="1143000" y="1943100"/>
-            <a:ext cx="2057400" cy="1485900"/>
-          </a:xfrm>
-          <a:prstGeom prst="rect">
-            <a:avLst/>
-          </a:prstGeom>
-          <a:solidFill>
-            <a:srgbClr val="2563EB"/>
-          </a:solidFill>
-          <a:ln w="12700">
-            <a:solidFill>
-              <a:srgbClr val="FFFFFF"/>
-            </a:solidFill>
-          </a:ln>
-        </p:spPr>
-        <p:style>
-          <a:lnRef idx="1">
-            <a:schemeClr val="accent1"/>
-          </a:lnRef>
-          <a:fillRef idx="3">
-            <a:schemeClr val="accent1"/>
-          </a:fillRef>
-          <a:effectRef idx="2">
-            <a:schemeClr val="accent1"/>
-          </a:effectRef>
-          <a:fontRef idx="minor">
-            <a:schemeClr val="lt1"/>
-          </a:fontRef>
-        </p:style>
-        <p:txBody>
-          <a:bodyPr rtlCol="0" anchor="ctr"/>
-          <a:lstStyle/>
-          <a:p>
-            <a:pPr algn="ctr"/>
-          </a:p>
-        </p:txBody>
-      </p:sp>
-      <p:sp>
-        <p:nvSpPr>
-          <p:cNvPr id="5" name="TextBox 4"/>
-          <p:cNvSpPr txBox="1"/>
-          <p:nvPr/>
-        </p:nvSpPr>
-        <p:spPr>
-          <a:xfrm>
-            <a:off x="1143000" y="3429000"/>
-            <a:ext cx="2057400" cy="1485900"/>
+            <a:ext cx="6858000" cy="2971800"/>
           </a:xfrm>
           <a:prstGeom prst="rect">
             <a:avLst/>
@@ -9269,606 +5960,22 @@
           <a:lstStyle/>
           <a:p>
             <a:pPr>
-              <a:defRPr sz="1000" b="0">
-                <a:solidFill>
-                  <a:srgbClr val="FFFFFF"/>
-                </a:solidFill>
-                <a:latin typeface="Source Sans Pro"/>
-              </a:defRPr>
-            </a:pPr>
-            <a:r>
-              <a:t>Primary</a:t>
-            </a:r>
-          </a:p>
-          <a:p>
-            <a:pPr>
-              <a:defRPr sz="1000" b="0">
-                <a:solidFill>
-                  <a:srgbClr val="FFFFFF"/>
-                </a:solidFill>
-                <a:latin typeface="Source Sans Pro"/>
-              </a:defRPr>
-            </a:pPr>
-            <a:r>
-              <a:t>#2563EB</a:t>
-            </a:r>
-          </a:p>
-          <a:p>
-            <a:pPr>
-              <a:defRPr sz="1000" b="0">
-                <a:solidFill>
-                  <a:srgbClr val="FFFFFF"/>
-                </a:solidFill>
-                <a:latin typeface="Source Sans Pro"/>
-              </a:defRPr>
-            </a:pPr>
-            <a:r>
-              <a:t>RGB(37, 99, 235)</a:t>
-            </a:r>
-          </a:p>
-          <a:p>
-            <a:pPr>
-              <a:defRPr sz="1000" b="0">
-                <a:solidFill>
-                  <a:srgbClr val="FFFFFF"/>
-                </a:solidFill>
-                <a:latin typeface="Source Sans Pro"/>
-              </a:defRPr>
-            </a:pPr>
-            <a:r>
-              <a:t>CMYK(84, 57, 0, 7)</a:t>
-            </a:r>
-          </a:p>
-          <a:p>
-            <a:pPr>
-              <a:defRPr sz="1000" b="0">
-                <a:solidFill>
-                  <a:srgbClr val="FFFFFF"/>
-                </a:solidFill>
-                <a:latin typeface="Source Sans Pro"/>
-              </a:defRPr>
-            </a:pPr>
-            <a:r>
-              <a:t>Use Light Text</a:t>
-            </a:r>
-          </a:p>
-        </p:txBody>
-      </p:sp>
-      <p:sp>
-        <p:nvSpPr>
-          <p:cNvPr id="6" name="Rectangle 5"/>
-          <p:cNvSpPr/>
-          <p:nvPr/>
-        </p:nvSpPr>
-        <p:spPr>
-          <a:xfrm>
-            <a:off x="3886200" y="1943100"/>
-            <a:ext cx="2057400" cy="1485900"/>
-          </a:xfrm>
-          <a:prstGeom prst="rect">
-            <a:avLst/>
-          </a:prstGeom>
-          <a:solidFill>
-            <a:srgbClr val="EF4444"/>
-          </a:solidFill>
-          <a:ln w="12700">
-            <a:solidFill>
-              <a:srgbClr val="FFFFFF"/>
-            </a:solidFill>
-          </a:ln>
-        </p:spPr>
-        <p:style>
-          <a:lnRef idx="1">
-            <a:schemeClr val="accent1"/>
-          </a:lnRef>
-          <a:fillRef idx="3">
-            <a:schemeClr val="accent1"/>
-          </a:fillRef>
-          <a:effectRef idx="2">
-            <a:schemeClr val="accent1"/>
-          </a:effectRef>
-          <a:fontRef idx="minor">
-            <a:schemeClr val="lt1"/>
-          </a:fontRef>
-        </p:style>
-        <p:txBody>
-          <a:bodyPr rtlCol="0" anchor="ctr"/>
-          <a:lstStyle/>
-          <a:p>
-            <a:pPr algn="ctr"/>
-          </a:p>
-        </p:txBody>
-      </p:sp>
-      <p:sp>
-        <p:nvSpPr>
-          <p:cNvPr id="7" name="TextBox 6"/>
-          <p:cNvSpPr txBox="1"/>
-          <p:nvPr/>
-        </p:nvSpPr>
-        <p:spPr>
-          <a:xfrm>
-            <a:off x="3886200" y="3429000"/>
-            <a:ext cx="2057400" cy="1485900"/>
-          </a:xfrm>
-          <a:prstGeom prst="rect">
-            <a:avLst/>
-          </a:prstGeom>
-          <a:noFill/>
-        </p:spPr>
-        <p:txBody>
-          <a:bodyPr wrap="square">
-            <a:spAutoFit/>
-          </a:bodyPr>
-          <a:lstStyle/>
-          <a:p>
-            <a:pPr>
-              <a:defRPr sz="1000" b="0">
-                <a:solidFill>
-                  <a:srgbClr val="FFFFFF"/>
-                </a:solidFill>
-                <a:latin typeface="Source Sans Pro"/>
-              </a:defRPr>
-            </a:pPr>
-            <a:r>
-              <a:t>Secondary</a:t>
-            </a:r>
-          </a:p>
-          <a:p>
-            <a:pPr>
-              <a:defRPr sz="1000" b="0">
-                <a:solidFill>
-                  <a:srgbClr val="FFFFFF"/>
-                </a:solidFill>
-                <a:latin typeface="Source Sans Pro"/>
-              </a:defRPr>
-            </a:pPr>
-            <a:r>
-              <a:t>#EF4444</a:t>
-            </a:r>
-          </a:p>
-          <a:p>
-            <a:pPr>
-              <a:defRPr sz="1000" b="0">
-                <a:solidFill>
-                  <a:srgbClr val="FFFFFF"/>
-                </a:solidFill>
-                <a:latin typeface="Source Sans Pro"/>
-              </a:defRPr>
-            </a:pPr>
-            <a:r>
-              <a:t>RGB(239, 68, 68)</a:t>
-            </a:r>
-          </a:p>
-          <a:p>
-            <a:pPr>
-              <a:defRPr sz="1000" b="0">
-                <a:solidFill>
-                  <a:srgbClr val="FFFFFF"/>
-                </a:solidFill>
-                <a:latin typeface="Source Sans Pro"/>
-              </a:defRPr>
-            </a:pPr>
-            <a:r>
-              <a:t>CMYK(0, 71, 71, 6)</a:t>
-            </a:r>
-          </a:p>
-          <a:p>
-            <a:pPr>
-              <a:defRPr sz="1000" b="0">
-                <a:solidFill>
-                  <a:srgbClr val="FFFFFF"/>
-                </a:solidFill>
-                <a:latin typeface="Source Sans Pro"/>
-              </a:defRPr>
-            </a:pPr>
-            <a:r>
-              <a:t>Use Light Text</a:t>
-            </a:r>
-          </a:p>
-        </p:txBody>
-      </p:sp>
-      <p:sp>
-        <p:nvSpPr>
-          <p:cNvPr id="8" name="Rectangle 7"/>
-          <p:cNvSpPr/>
-          <p:nvPr/>
-        </p:nvSpPr>
-        <p:spPr>
-          <a:xfrm>
-            <a:off x="6629400" y="1943100"/>
-            <a:ext cx="2057400" cy="1485900"/>
-          </a:xfrm>
-          <a:prstGeom prst="rect">
-            <a:avLst/>
-          </a:prstGeom>
-          <a:solidFill>
-            <a:srgbClr val="FB923C"/>
-          </a:solidFill>
-          <a:ln w="12700">
-            <a:solidFill>
-              <a:srgbClr val="FFFFFF"/>
-            </a:solidFill>
-          </a:ln>
-        </p:spPr>
-        <p:style>
-          <a:lnRef idx="1">
-            <a:schemeClr val="accent1"/>
-          </a:lnRef>
-          <a:fillRef idx="3">
-            <a:schemeClr val="accent1"/>
-          </a:fillRef>
-          <a:effectRef idx="2">
-            <a:schemeClr val="accent1"/>
-          </a:effectRef>
-          <a:fontRef idx="minor">
-            <a:schemeClr val="lt1"/>
-          </a:fontRef>
-        </p:style>
-        <p:txBody>
-          <a:bodyPr rtlCol="0" anchor="ctr"/>
-          <a:lstStyle/>
-          <a:p>
-            <a:pPr algn="ctr"/>
-          </a:p>
-        </p:txBody>
-      </p:sp>
-      <p:sp>
-        <p:nvSpPr>
-          <p:cNvPr id="9" name="TextBox 8"/>
-          <p:cNvSpPr txBox="1"/>
-          <p:nvPr/>
-        </p:nvSpPr>
-        <p:spPr>
-          <a:xfrm>
-            <a:off x="6629400" y="3429000"/>
-            <a:ext cx="2057400" cy="1485900"/>
-          </a:xfrm>
-          <a:prstGeom prst="rect">
-            <a:avLst/>
-          </a:prstGeom>
-          <a:noFill/>
-        </p:spPr>
-        <p:txBody>
-          <a:bodyPr wrap="square">
-            <a:spAutoFit/>
-          </a:bodyPr>
-          <a:lstStyle/>
-          <a:p>
-            <a:pPr>
-              <a:defRPr sz="1000" b="0">
-                <a:solidFill>
-                  <a:srgbClr val="FFFFFF"/>
-                </a:solidFill>
-                <a:latin typeface="Source Sans Pro"/>
-              </a:defRPr>
-            </a:pPr>
-            <a:r>
-              <a:t>Accent</a:t>
-            </a:r>
-          </a:p>
-          <a:p>
-            <a:pPr>
-              <a:defRPr sz="1000" b="0">
-                <a:solidFill>
-                  <a:srgbClr val="FFFFFF"/>
-                </a:solidFill>
-                <a:latin typeface="Source Sans Pro"/>
-              </a:defRPr>
-            </a:pPr>
-            <a:r>
-              <a:t>#FB923C</a:t>
-            </a:r>
-          </a:p>
-          <a:p>
-            <a:pPr>
-              <a:defRPr sz="1000" b="0">
-                <a:solidFill>
-                  <a:srgbClr val="FFFFFF"/>
-                </a:solidFill>
-                <a:latin typeface="Source Sans Pro"/>
-              </a:defRPr>
-            </a:pPr>
-            <a:r>
-              <a:t>RGB(251, 146, 60)</a:t>
-            </a:r>
-          </a:p>
-          <a:p>
-            <a:pPr>
-              <a:defRPr sz="1000" b="0">
-                <a:solidFill>
-                  <a:srgbClr val="FFFFFF"/>
-                </a:solidFill>
-                <a:latin typeface="Source Sans Pro"/>
-              </a:defRPr>
-            </a:pPr>
-            <a:r>
-              <a:t>CMYK(0, 41, 76, 1)</a:t>
-            </a:r>
-          </a:p>
-          <a:p>
-            <a:pPr>
-              <a:defRPr sz="1000" b="0">
-                <a:solidFill>
-                  <a:srgbClr val="FFFFFF"/>
-                </a:solidFill>
-                <a:latin typeface="Source Sans Pro"/>
-              </a:defRPr>
-            </a:pPr>
-            <a:r>
-              <a:t>Use Dark Text</a:t>
-            </a:r>
-          </a:p>
-        </p:txBody>
-      </p:sp>
-      <p:sp>
-        <p:nvSpPr>
-          <p:cNvPr id="10" name="Rectangle 9"/>
-          <p:cNvSpPr/>
-          <p:nvPr/>
-        </p:nvSpPr>
-        <p:spPr>
-          <a:xfrm>
-            <a:off x="1143000" y="5657850"/>
-            <a:ext cx="2057400" cy="1485900"/>
-          </a:xfrm>
-          <a:prstGeom prst="rect">
-            <a:avLst/>
-          </a:prstGeom>
-          <a:solidFill>
-            <a:srgbClr val="FB923C"/>
-          </a:solidFill>
-          <a:ln w="12700">
-            <a:solidFill>
-              <a:srgbClr val="FFFFFF"/>
-            </a:solidFill>
-          </a:ln>
-        </p:spPr>
-        <p:style>
-          <a:lnRef idx="1">
-            <a:schemeClr val="accent1"/>
-          </a:lnRef>
-          <a:fillRef idx="3">
-            <a:schemeClr val="accent1"/>
-          </a:fillRef>
-          <a:effectRef idx="2">
-            <a:schemeClr val="accent1"/>
-          </a:effectRef>
-          <a:fontRef idx="minor">
-            <a:schemeClr val="lt1"/>
-          </a:fontRef>
-        </p:style>
-        <p:txBody>
-          <a:bodyPr rtlCol="0" anchor="ctr"/>
-          <a:lstStyle/>
-          <a:p>
-            <a:pPr algn="ctr"/>
-          </a:p>
-        </p:txBody>
-      </p:sp>
-      <p:sp>
-        <p:nvSpPr>
-          <p:cNvPr id="11" name="TextBox 10"/>
-          <p:cNvSpPr txBox="1"/>
-          <p:nvPr/>
-        </p:nvSpPr>
-        <p:spPr>
-          <a:xfrm>
-            <a:off x="1143000" y="7143750"/>
-            <a:ext cx="2057400" cy="1485900"/>
-          </a:xfrm>
-          <a:prstGeom prst="rect">
-            <a:avLst/>
-          </a:prstGeom>
-          <a:noFill/>
-        </p:spPr>
-        <p:txBody>
-          <a:bodyPr wrap="square">
-            <a:spAutoFit/>
-          </a:bodyPr>
-          <a:lstStyle/>
-          <a:p>
-            <a:pPr>
-              <a:defRPr sz="1000" b="0">
-                <a:solidFill>
-                  <a:srgbClr val="FFFFFF"/>
-                </a:solidFill>
-                <a:latin typeface="Source Sans Pro"/>
-              </a:defRPr>
-            </a:pPr>
-            <a:r>
-              <a:t>Supporting</a:t>
-            </a:r>
-          </a:p>
-          <a:p>
-            <a:pPr>
-              <a:defRPr sz="1000" b="0">
-                <a:solidFill>
-                  <a:srgbClr val="FFFFFF"/>
-                </a:solidFill>
-                <a:latin typeface="Source Sans Pro"/>
-              </a:defRPr>
-            </a:pPr>
-            <a:r>
-              <a:t>#FB923C</a:t>
-            </a:r>
-          </a:p>
-          <a:p>
-            <a:pPr>
-              <a:defRPr sz="1000" b="0">
-                <a:solidFill>
-                  <a:srgbClr val="FFFFFF"/>
-                </a:solidFill>
-                <a:latin typeface="Source Sans Pro"/>
-              </a:defRPr>
-            </a:pPr>
-            <a:r>
-              <a:t>RGB(251, 146, 60)</a:t>
-            </a:r>
-          </a:p>
-          <a:p>
-            <a:pPr>
-              <a:defRPr sz="1000" b="0">
-                <a:solidFill>
-                  <a:srgbClr val="FFFFFF"/>
-                </a:solidFill>
-                <a:latin typeface="Source Sans Pro"/>
-              </a:defRPr>
-            </a:pPr>
-            <a:r>
-              <a:t>CMYK(0, 41, 76, 1)</a:t>
-            </a:r>
-          </a:p>
-          <a:p>
-            <a:pPr>
-              <a:defRPr sz="1000" b="0">
-                <a:solidFill>
-                  <a:srgbClr val="FFFFFF"/>
-                </a:solidFill>
-                <a:latin typeface="Source Sans Pro"/>
-              </a:defRPr>
-            </a:pPr>
-            <a:r>
-              <a:t>Use Dark Text</a:t>
-            </a:r>
-          </a:p>
-        </p:txBody>
-      </p:sp>
-      <p:sp>
-        <p:nvSpPr>
-          <p:cNvPr id="12" name="Rectangle 11"/>
-          <p:cNvSpPr/>
-          <p:nvPr/>
-        </p:nvSpPr>
-        <p:spPr>
-          <a:xfrm>
-            <a:off x="3886200" y="5657850"/>
-            <a:ext cx="2057400" cy="1485900"/>
-          </a:xfrm>
-          <a:prstGeom prst="rect">
-            <a:avLst/>
-          </a:prstGeom>
-          <a:solidFill>
-            <a:srgbClr val="2563EB"/>
-          </a:solidFill>
-          <a:ln w="12700">
-            <a:solidFill>
-              <a:srgbClr val="FFFFFF"/>
-            </a:solidFill>
-          </a:ln>
-        </p:spPr>
-        <p:style>
-          <a:lnRef idx="1">
-            <a:schemeClr val="accent1"/>
-          </a:lnRef>
-          <a:fillRef idx="3">
-            <a:schemeClr val="accent1"/>
-          </a:fillRef>
-          <a:effectRef idx="2">
-            <a:schemeClr val="accent1"/>
-          </a:effectRef>
-          <a:fontRef idx="minor">
-            <a:schemeClr val="lt1"/>
-          </a:fontRef>
-        </p:style>
-        <p:txBody>
-          <a:bodyPr rtlCol="0" anchor="ctr"/>
-          <a:lstStyle/>
-          <a:p>
-            <a:pPr algn="ctr"/>
-          </a:p>
-        </p:txBody>
-      </p:sp>
-      <p:sp>
-        <p:nvSpPr>
-          <p:cNvPr id="13" name="TextBox 12"/>
-          <p:cNvSpPr txBox="1"/>
-          <p:nvPr/>
-        </p:nvSpPr>
-        <p:spPr>
-          <a:xfrm>
-            <a:off x="3886200" y="7143750"/>
-            <a:ext cx="2057400" cy="1485900"/>
-          </a:xfrm>
-          <a:prstGeom prst="rect">
-            <a:avLst/>
-          </a:prstGeom>
-          <a:noFill/>
-        </p:spPr>
-        <p:txBody>
-          <a:bodyPr wrap="square">
-            <a:spAutoFit/>
-          </a:bodyPr>
-          <a:lstStyle/>
-          <a:p>
-            <a:pPr>
-              <a:defRPr sz="1000" b="0">
-                <a:solidFill>
-                  <a:srgbClr val="FFFFFF"/>
-                </a:solidFill>
-                <a:latin typeface="Source Sans Pro"/>
-              </a:defRPr>
-            </a:pPr>
-            <a:r>
-              <a:t>Hex_Codes</a:t>
-            </a:r>
-          </a:p>
-          <a:p>
-            <a:pPr>
-              <a:defRPr sz="1000" b="0">
-                <a:solidFill>
-                  <a:srgbClr val="FFFFFF"/>
-                </a:solidFill>
-                <a:latin typeface="Source Sans Pro"/>
-              </a:defRPr>
-            </a:pPr>
-            <a:r>
-              <a:t>#2563EB</a:t>
-            </a:r>
-          </a:p>
-          <a:p>
-            <a:pPr>
-              <a:defRPr sz="1000" b="0">
-                <a:solidFill>
-                  <a:srgbClr val="FFFFFF"/>
-                </a:solidFill>
-                <a:latin typeface="Source Sans Pro"/>
-              </a:defRPr>
-            </a:pPr>
-            <a:r>
-              <a:t>RGB(37, 99, 235)</a:t>
-            </a:r>
-          </a:p>
-          <a:p>
-            <a:pPr>
-              <a:defRPr sz="1000" b="0">
-                <a:solidFill>
-                  <a:srgbClr val="FFFFFF"/>
-                </a:solidFill>
-                <a:latin typeface="Source Sans Pro"/>
-              </a:defRPr>
-            </a:pPr>
-            <a:r>
-              <a:t>CMYK(84, 57, 0, 7)</a:t>
-            </a:r>
-          </a:p>
-          <a:p>
-            <a:pPr>
-              <a:defRPr sz="1000" b="0">
-                <a:solidFill>
-                  <a:srgbClr val="FFFFFF"/>
-                </a:solidFill>
-                <a:latin typeface="Source Sans Pro"/>
-              </a:defRPr>
-            </a:pPr>
-            <a:r>
-              <a:t>Use Light Text</a:t>
-            </a:r>
-          </a:p>
-        </p:txBody>
-      </p:sp>
-      <p:sp>
-        <p:nvSpPr>
-          <p:cNvPr id="14" name="TextBox 13"/>
+              <a:defRPr sz="1600" b="0">
+                <a:solidFill>
+                  <a:srgbClr val="EA580C"/>
+                </a:solidFill>
+                <a:latin typeface="Source Sans Pro"/>
+              </a:defRPr>
+            </a:pPr>
+            <a:r>
+              <a:t>Understanding the diverse needs and aspirations of its customers, Flipkart has continuously strived to innovate and create solutions that not only meet but exceed their expectations. Imagine a young professional in a bustling city, juggling work, family, and personal commitments. With just a few clicks on the Flipkart app, they can browse through a wide range of products, from the latest gadgets to trendy fashion, all at affordable prices. For a middle-class family living in a Tier 2 city, Flipkart is their go-to destination for quality products that fit their...</a:t>
+            </a:r>
+          </a:p>
+        </p:txBody>
+      </p:sp>
+      <p:sp>
+        <p:nvSpPr>
+          <p:cNvPr id="5" name="TextBox 4"/>
           <p:cNvSpPr txBox="1"/>
           <p:nvPr/>
         </p:nvSpPr>
@@ -9891,7 +5998,7 @@
             <a:pPr algn="l">
               <a:defRPr sz="1000" b="0">
                 <a:solidFill>
-                  <a:srgbClr val="FFFFFF"/>
+                  <a:srgbClr val="EA580C"/>
                 </a:solidFill>
                 <a:latin typeface="Source Sans Pro"/>
               </a:defRPr>
@@ -9904,7 +6011,7 @@
       </p:sp>
       <p:sp>
         <p:nvSpPr>
-          <p:cNvPr id="15" name="TextBox 14"/>
+          <p:cNvPr id="6" name="TextBox 5"/>
           <p:cNvSpPr txBox="1"/>
           <p:nvPr/>
         </p:nvSpPr>
@@ -9927,7 +6034,7 @@
             <a:pPr algn="r">
               <a:defRPr sz="1000" b="0">
                 <a:solidFill>
-                  <a:srgbClr val="FFFFFF"/>
+                  <a:srgbClr val="EA580C"/>
                 </a:solidFill>
                 <a:latin typeface="Source Sans Pro"/>
               </a:defRPr>
@@ -10024,27 +6131,94 @@
             <a:pPr>
               <a:defRPr sz="3200" b="1">
                 <a:solidFill>
-                  <a:srgbClr val="FFFFFF"/>
+                  <a:srgbClr val="EA580C"/>
                 </a:solidFill>
                 <a:latin typeface="Inter"/>
               </a:defRPr>
             </a:pPr>
             <a:r>
-              <a:t>Typography</a:t>
-            </a:r>
-          </a:p>
-        </p:txBody>
-      </p:sp>
-      <p:sp>
-        <p:nvSpPr>
-          <p:cNvPr id="4" name="TextBox 3"/>
+              <a:t>Logo Variations (3 designs)</a:t>
+            </a:r>
+          </a:p>
+        </p:txBody>
+      </p:sp>
+      <p:sp>
+        <p:nvSpPr>
+          <p:cNvPr id="4" name="Rectangle 3"/>
+          <p:cNvSpPr/>
+          <p:nvPr/>
+        </p:nvSpPr>
+        <p:spPr>
+          <a:xfrm>
+            <a:off x="1051560" y="1851660"/>
+            <a:ext cx="1554480" cy="1668780"/>
+          </a:xfrm>
+          <a:prstGeom prst="rect">
+            <a:avLst/>
+          </a:prstGeom>
+          <a:solidFill>
+            <a:srgbClr val="FFFFFF"/>
+          </a:solidFill>
+          <a:ln>
+            <a:noFill/>
+          </a:ln>
+        </p:spPr>
+        <p:style>
+          <a:lnRef idx="1">
+            <a:schemeClr val="accent1"/>
+          </a:lnRef>
+          <a:fillRef idx="3">
+            <a:schemeClr val="accent1"/>
+          </a:fillRef>
+          <a:effectRef idx="2">
+            <a:schemeClr val="accent1"/>
+          </a:effectRef>
+          <a:fontRef idx="minor">
+            <a:schemeClr val="lt1"/>
+          </a:fontRef>
+        </p:style>
+        <p:txBody>
+          <a:bodyPr rtlCol="0" anchor="ctr"/>
+          <a:lstStyle/>
+          <a:p>
+            <a:pPr algn="ctr"/>
+          </a:p>
+        </p:txBody>
+      </p:sp>
+      <p:pic>
+        <p:nvPicPr>
+          <p:cNvPr id="5" name="Picture 4" descr="flipkart_logo_1_20250828_181950_a6e442d2.png"/>
+          <p:cNvPicPr>
+            <a:picLocks noChangeAspect="1"/>
+          </p:cNvPicPr>
+          <p:nvPr/>
+        </p:nvPicPr>
+        <p:blipFill>
+          <a:blip r:embed="rId2"/>
+          <a:stretch>
+            <a:fillRect/>
+          </a:stretch>
+        </p:blipFill>
+        <p:spPr>
+          <a:xfrm>
+            <a:off x="1143000" y="1943100"/>
+            <a:ext cx="1371600" cy="1485900"/>
+          </a:xfrm>
+          <a:prstGeom prst="rect">
+            <a:avLst/>
+          </a:prstGeom>
+        </p:spPr>
+      </p:pic>
+      <p:sp>
+        <p:nvSpPr>
+          <p:cNvPr id="6" name="TextBox 5"/>
           <p:cNvSpPr txBox="1"/>
           <p:nvPr/>
         </p:nvSpPr>
         <p:spPr>
           <a:xfrm>
-            <a:off x="1143000" y="1943100"/>
-            <a:ext cx="3429000" cy="742950"/>
+            <a:off x="1143000" y="3429000"/>
+            <a:ext cx="1371600" cy="742950"/>
           </a:xfrm>
           <a:prstGeom prst="rect">
             <a:avLst/>
@@ -10057,30 +6231,97 @@
           </a:bodyPr>
           <a:lstStyle/>
           <a:p>
-            <a:pPr>
-              <a:defRPr sz="2000" b="0">
-                <a:solidFill>
-                  <a:srgbClr val="FFFFFF"/>
-                </a:solidFill>
-                <a:latin typeface="Source Sans Pro"/>
-              </a:defRPr>
-            </a:pPr>
-            <a:r>
-              <a:t>Primary Font: Inter</a:t>
-            </a:r>
-          </a:p>
-        </p:txBody>
-      </p:sp>
-      <p:sp>
-        <p:nvSpPr>
-          <p:cNvPr id="5" name="TextBox 4"/>
+            <a:pPr algn="ctr">
+              <a:defRPr sz="1200" b="0">
+                <a:solidFill>
+                  <a:srgbClr val="EA580C"/>
+                </a:solidFill>
+                <a:latin typeface="Source Sans Pro"/>
+              </a:defRPr>
+            </a:pPr>
+            <a:r>
+              <a:t>Version 1</a:t>
+            </a:r>
+          </a:p>
+        </p:txBody>
+      </p:sp>
+      <p:sp>
+        <p:nvSpPr>
+          <p:cNvPr id="7" name="Rectangle 6"/>
+          <p:cNvSpPr/>
+          <p:nvPr/>
+        </p:nvSpPr>
+        <p:spPr>
+          <a:xfrm>
+            <a:off x="3108960" y="1851660"/>
+            <a:ext cx="1554480" cy="1668780"/>
+          </a:xfrm>
+          <a:prstGeom prst="rect">
+            <a:avLst/>
+          </a:prstGeom>
+          <a:solidFill>
+            <a:srgbClr val="FFFFFF"/>
+          </a:solidFill>
+          <a:ln>
+            <a:noFill/>
+          </a:ln>
+        </p:spPr>
+        <p:style>
+          <a:lnRef idx="1">
+            <a:schemeClr val="accent1"/>
+          </a:lnRef>
+          <a:fillRef idx="3">
+            <a:schemeClr val="accent1"/>
+          </a:fillRef>
+          <a:effectRef idx="2">
+            <a:schemeClr val="accent1"/>
+          </a:effectRef>
+          <a:fontRef idx="minor">
+            <a:schemeClr val="lt1"/>
+          </a:fontRef>
+        </p:style>
+        <p:txBody>
+          <a:bodyPr rtlCol="0" anchor="ctr"/>
+          <a:lstStyle/>
+          <a:p>
+            <a:pPr algn="ctr"/>
+          </a:p>
+        </p:txBody>
+      </p:sp>
+      <p:pic>
+        <p:nvPicPr>
+          <p:cNvPr id="8" name="Picture 7" descr="flipkart_logo_2_20250828_182008_4840f44b.png"/>
+          <p:cNvPicPr>
+            <a:picLocks noChangeAspect="1"/>
+          </p:cNvPicPr>
+          <p:nvPr/>
+        </p:nvPicPr>
+        <p:blipFill>
+          <a:blip r:embed="rId3"/>
+          <a:stretch>
+            <a:fillRect/>
+          </a:stretch>
+        </p:blipFill>
+        <p:spPr>
+          <a:xfrm>
+            <a:off x="3200400" y="1943100"/>
+            <a:ext cx="1371600" cy="1485900"/>
+          </a:xfrm>
+          <a:prstGeom prst="rect">
+            <a:avLst/>
+          </a:prstGeom>
+        </p:spPr>
+      </p:pic>
+      <p:sp>
+        <p:nvSpPr>
+          <p:cNvPr id="9" name="TextBox 8"/>
           <p:cNvSpPr txBox="1"/>
           <p:nvPr/>
         </p:nvSpPr>
         <p:spPr>
           <a:xfrm>
-            <a:off x="1143000" y="2686050"/>
-            <a:ext cx="3429000" cy="742950"/>
+            <a:off x="3200400" y="3429000"/>
+            <a:ext cx="1371600" cy="742950"/>
           </a:xfrm>
           <a:prstGeom prst="rect">
             <a:avLst/>
@@ -10093,30 +6334,97 @@
           </a:bodyPr>
           <a:lstStyle/>
           <a:p>
-            <a:pPr>
-              <a:defRPr sz="3200" b="1">
-                <a:solidFill>
-                  <a:srgbClr val="FFFFFF"/>
-                </a:solidFill>
-                <a:latin typeface="Inter"/>
-              </a:defRPr>
-            </a:pPr>
-            <a:r>
-              <a:t>H1 Heading</a:t>
-            </a:r>
-          </a:p>
-        </p:txBody>
-      </p:sp>
-      <p:sp>
-        <p:nvSpPr>
-          <p:cNvPr id="6" name="TextBox 5"/>
+            <a:pPr algn="ctr">
+              <a:defRPr sz="1200" b="0">
+                <a:solidFill>
+                  <a:srgbClr val="EA580C"/>
+                </a:solidFill>
+                <a:latin typeface="Source Sans Pro"/>
+              </a:defRPr>
+            </a:pPr>
+            <a:r>
+              <a:t>Version 2</a:t>
+            </a:r>
+          </a:p>
+        </p:txBody>
+      </p:sp>
+      <p:sp>
+        <p:nvSpPr>
+          <p:cNvPr id="10" name="Rectangle 9"/>
+          <p:cNvSpPr/>
+          <p:nvPr/>
+        </p:nvSpPr>
+        <p:spPr>
+          <a:xfrm>
+            <a:off x="5166360" y="1851660"/>
+            <a:ext cx="1554480" cy="1668780"/>
+          </a:xfrm>
+          <a:prstGeom prst="rect">
+            <a:avLst/>
+          </a:prstGeom>
+          <a:solidFill>
+            <a:srgbClr val="FFFFFF"/>
+          </a:solidFill>
+          <a:ln>
+            <a:noFill/>
+          </a:ln>
+        </p:spPr>
+        <p:style>
+          <a:lnRef idx="1">
+            <a:schemeClr val="accent1"/>
+          </a:lnRef>
+          <a:fillRef idx="3">
+            <a:schemeClr val="accent1"/>
+          </a:fillRef>
+          <a:effectRef idx="2">
+            <a:schemeClr val="accent1"/>
+          </a:effectRef>
+          <a:fontRef idx="minor">
+            <a:schemeClr val="lt1"/>
+          </a:fontRef>
+        </p:style>
+        <p:txBody>
+          <a:bodyPr rtlCol="0" anchor="ctr"/>
+          <a:lstStyle/>
+          <a:p>
+            <a:pPr algn="ctr"/>
+          </a:p>
+        </p:txBody>
+      </p:sp>
+      <p:pic>
+        <p:nvPicPr>
+          <p:cNvPr id="11" name="Picture 10" descr="flipkart_logo_3_20250828_182027_c42fdb5b.png"/>
+          <p:cNvPicPr>
+            <a:picLocks noChangeAspect="1"/>
+          </p:cNvPicPr>
+          <p:nvPr/>
+        </p:nvPicPr>
+        <p:blipFill>
+          <a:blip r:embed="rId4"/>
+          <a:stretch>
+            <a:fillRect/>
+          </a:stretch>
+        </p:blipFill>
+        <p:spPr>
+          <a:xfrm>
+            <a:off x="5257800" y="1943100"/>
+            <a:ext cx="1371600" cy="1485900"/>
+          </a:xfrm>
+          <a:prstGeom prst="rect">
+            <a:avLst/>
+          </a:prstGeom>
+        </p:spPr>
+      </p:pic>
+      <p:sp>
+        <p:nvSpPr>
+          <p:cNvPr id="12" name="TextBox 11"/>
           <p:cNvSpPr txBox="1"/>
           <p:nvPr/>
         </p:nvSpPr>
         <p:spPr>
           <a:xfrm>
-            <a:off x="1143000" y="3429000"/>
-            <a:ext cx="3429000" cy="742950"/>
+            <a:off x="5257800" y="3429000"/>
+            <a:ext cx="1371600" cy="742950"/>
           </a:xfrm>
           <a:prstGeom prst="rect">
             <a:avLst/>
@@ -10129,30 +6437,30 @@
           </a:bodyPr>
           <a:lstStyle/>
           <a:p>
-            <a:pPr>
-              <a:defRPr sz="2400" b="1">
-                <a:solidFill>
-                  <a:srgbClr val="FFFFFF"/>
-                </a:solidFill>
-                <a:latin typeface="Inter"/>
-              </a:defRPr>
-            </a:pPr>
-            <a:r>
-              <a:t>H2 Heading</a:t>
-            </a:r>
-          </a:p>
-        </p:txBody>
-      </p:sp>
-      <p:sp>
-        <p:nvSpPr>
-          <p:cNvPr id="7" name="TextBox 6"/>
+            <a:pPr algn="ctr">
+              <a:defRPr sz="1200" b="0">
+                <a:solidFill>
+                  <a:srgbClr val="EA580C"/>
+                </a:solidFill>
+                <a:latin typeface="Source Sans Pro"/>
+              </a:defRPr>
+            </a:pPr>
+            <a:r>
+              <a:t>Version 3</a:t>
+            </a:r>
+          </a:p>
+        </p:txBody>
+      </p:sp>
+      <p:sp>
+        <p:nvSpPr>
+          <p:cNvPr id="13" name="TextBox 12"/>
           <p:cNvSpPr txBox="1"/>
           <p:nvPr/>
         </p:nvSpPr>
         <p:spPr>
           <a:xfrm>
-            <a:off x="1143000" y="4171950"/>
-            <a:ext cx="3429000" cy="742950"/>
+            <a:off x="1143000" y="4914900"/>
+            <a:ext cx="7543800" cy="742950"/>
           </a:xfrm>
           <a:prstGeom prst="rect">
             <a:avLst/>
@@ -10165,30 +6473,30 @@
           </a:bodyPr>
           <a:lstStyle/>
           <a:p>
-            <a:pPr>
-              <a:defRPr sz="2000" b="0">
-                <a:solidFill>
-                  <a:srgbClr val="FFFFFF"/>
-                </a:solidFill>
-                <a:latin typeface="Inter"/>
-              </a:defRPr>
-            </a:pPr>
-            <a:r>
-              <a:t>H3 Heading</a:t>
-            </a:r>
-          </a:p>
-        </p:txBody>
-      </p:sp>
-      <p:sp>
-        <p:nvSpPr>
-          <p:cNvPr id="8" name="TextBox 7"/>
+            <a:pPr algn="ctr">
+              <a:defRPr sz="1200" b="0">
+                <a:solidFill>
+                  <a:srgbClr val="EA580C"/>
+                </a:solidFill>
+                <a:latin typeface="Source Sans Pro"/>
+              </a:defRPr>
+            </a:pPr>
+            <a:r>
+              <a:t>Minimum size: 0.5 inches • Clearspace: 0.25 inches on all sides</a:t>
+            </a:r>
+          </a:p>
+        </p:txBody>
+      </p:sp>
+      <p:sp>
+        <p:nvSpPr>
+          <p:cNvPr id="14" name="TextBox 13"/>
           <p:cNvSpPr txBox="1"/>
           <p:nvPr/>
         </p:nvSpPr>
         <p:spPr>
           <a:xfrm>
-            <a:off x="5257800" y="1943100"/>
-            <a:ext cx="3429000" cy="742950"/>
+            <a:off x="457200" y="5657850"/>
+            <a:ext cx="4114800" cy="742950"/>
           </a:xfrm>
           <a:prstGeom prst="rect">
             <a:avLst/>
@@ -10201,30 +6509,30 @@
           </a:bodyPr>
           <a:lstStyle/>
           <a:p>
-            <a:pPr>
-              <a:defRPr sz="2000" b="0">
-                <a:solidFill>
-                  <a:srgbClr val="FFFFFF"/>
-                </a:solidFill>
-                <a:latin typeface="Source Sans Pro"/>
-              </a:defRPr>
-            </a:pPr>
-            <a:r>
-              <a:t>Secondary Font: Source Sans Pro</a:t>
-            </a:r>
-          </a:p>
-        </p:txBody>
-      </p:sp>
-      <p:sp>
-        <p:nvSpPr>
-          <p:cNvPr id="9" name="TextBox 8"/>
+            <a:pPr algn="l">
+              <a:defRPr sz="1000" b="0">
+                <a:solidFill>
+                  <a:srgbClr val="EA580C"/>
+                </a:solidFill>
+                <a:latin typeface="Source Sans Pro"/>
+              </a:defRPr>
+            </a:pPr>
+            <a:r>
+              <a:t>Flipkart</a:t>
+            </a:r>
+          </a:p>
+        </p:txBody>
+      </p:sp>
+      <p:sp>
+        <p:nvSpPr>
+          <p:cNvPr id="15" name="TextBox 14"/>
           <p:cNvSpPr txBox="1"/>
           <p:nvPr/>
         </p:nvSpPr>
         <p:spPr>
           <a:xfrm>
-            <a:off x="5257800" y="2686050"/>
-            <a:ext cx="3429000" cy="742950"/>
+            <a:off x="4572000" y="5657850"/>
+            <a:ext cx="4114800" cy="742950"/>
           </a:xfrm>
           <a:prstGeom prst="rect">
             <a:avLst/>
@@ -10237,154 +6545,10 @@
           </a:bodyPr>
           <a:lstStyle/>
           <a:p>
-            <a:pPr>
-              <a:defRPr sz="1600" b="0">
-                <a:solidFill>
-                  <a:srgbClr val="FFFFFF"/>
-                </a:solidFill>
-                <a:latin typeface="Source Sans Pro"/>
-              </a:defRPr>
-            </a:pPr>
-            <a:r>
-              <a:t>Body Text</a:t>
-            </a:r>
-          </a:p>
-        </p:txBody>
-      </p:sp>
-      <p:sp>
-        <p:nvSpPr>
-          <p:cNvPr id="10" name="TextBox 9"/>
-          <p:cNvSpPr txBox="1"/>
-          <p:nvPr/>
-        </p:nvSpPr>
-        <p:spPr>
-          <a:xfrm>
-            <a:off x="5257800" y="3429000"/>
-            <a:ext cx="3429000" cy="742950"/>
-          </a:xfrm>
-          <a:prstGeom prst="rect">
-            <a:avLst/>
-          </a:prstGeom>
-          <a:noFill/>
-        </p:spPr>
-        <p:txBody>
-          <a:bodyPr wrap="none">
-            <a:spAutoFit/>
-          </a:bodyPr>
-          <a:lstStyle/>
-          <a:p>
-            <a:pPr>
-              <a:defRPr sz="1600" b="1">
-                <a:solidFill>
-                  <a:srgbClr val="FFFFFF"/>
-                </a:solidFill>
-                <a:latin typeface="Source Sans Pro"/>
-              </a:defRPr>
-            </a:pPr>
-            <a:r>
-              <a:t>Body Bold</a:t>
-            </a:r>
-          </a:p>
-        </p:txBody>
-      </p:sp>
-      <p:sp>
-        <p:nvSpPr>
-          <p:cNvPr id="11" name="TextBox 10"/>
-          <p:cNvSpPr txBox="1"/>
-          <p:nvPr/>
-        </p:nvSpPr>
-        <p:spPr>
-          <a:xfrm>
-            <a:off x="5257800" y="4171950"/>
-            <a:ext cx="3429000" cy="742950"/>
-          </a:xfrm>
-          <a:prstGeom prst="rect">
-            <a:avLst/>
-          </a:prstGeom>
-          <a:noFill/>
-        </p:spPr>
-        <p:txBody>
-          <a:bodyPr wrap="none">
-            <a:spAutoFit/>
-          </a:bodyPr>
-          <a:lstStyle/>
-          <a:p>
-            <a:pPr>
-              <a:defRPr sz="1200" b="0">
-                <a:solidFill>
-                  <a:srgbClr val="FFFFFF"/>
-                </a:solidFill>
-                <a:latin typeface="Source Sans Pro"/>
-              </a:defRPr>
-            </a:pPr>
-            <a:r>
-              <a:t>Caption Text</a:t>
-            </a:r>
-          </a:p>
-        </p:txBody>
-      </p:sp>
-      <p:sp>
-        <p:nvSpPr>
-          <p:cNvPr id="12" name="TextBox 11"/>
-          <p:cNvSpPr txBox="1"/>
-          <p:nvPr/>
-        </p:nvSpPr>
-        <p:spPr>
-          <a:xfrm>
-            <a:off x="457200" y="5657850"/>
-            <a:ext cx="4114800" cy="742950"/>
-          </a:xfrm>
-          <a:prstGeom prst="rect">
-            <a:avLst/>
-          </a:prstGeom>
-          <a:noFill/>
-        </p:spPr>
-        <p:txBody>
-          <a:bodyPr wrap="none">
-            <a:spAutoFit/>
-          </a:bodyPr>
-          <a:lstStyle/>
-          <a:p>
-            <a:pPr algn="l">
-              <a:defRPr sz="1000" b="0">
-                <a:solidFill>
-                  <a:srgbClr val="FFFFFF"/>
-                </a:solidFill>
-                <a:latin typeface="Source Sans Pro"/>
-              </a:defRPr>
-            </a:pPr>
-            <a:r>
-              <a:t>Flipkart</a:t>
-            </a:r>
-          </a:p>
-        </p:txBody>
-      </p:sp>
-      <p:sp>
-        <p:nvSpPr>
-          <p:cNvPr id="13" name="TextBox 12"/>
-          <p:cNvSpPr txBox="1"/>
-          <p:nvPr/>
-        </p:nvSpPr>
-        <p:spPr>
-          <a:xfrm>
-            <a:off x="4572000" y="5657850"/>
-            <a:ext cx="4114800" cy="742950"/>
-          </a:xfrm>
-          <a:prstGeom prst="rect">
-            <a:avLst/>
-          </a:prstGeom>
-          <a:noFill/>
-        </p:spPr>
-        <p:txBody>
-          <a:bodyPr wrap="none">
-            <a:spAutoFit/>
-          </a:bodyPr>
-          <a:lstStyle/>
-          <a:p>
             <a:pPr algn="r">
               <a:defRPr sz="1000" b="0">
                 <a:solidFill>
-                  <a:srgbClr val="FFFFFF"/>
+                  <a:srgbClr val="EA580C"/>
                 </a:solidFill>
                 <a:latin typeface="Source Sans Pro"/>
               </a:defRPr>
@@ -10481,239 +6645,37 @@
             <a:pPr>
               <a:defRPr sz="3200" b="1">
                 <a:solidFill>
-                  <a:srgbClr val="FFFFFF"/>
+                  <a:srgbClr val="EA580C"/>
                 </a:solidFill>
                 <a:latin typeface="Inter"/>
               </a:defRPr>
             </a:pPr>
             <a:r>
-              <a:t>Visual &amp; Photography Guidelines</a:t>
-            </a:r>
-          </a:p>
-        </p:txBody>
-      </p:sp>
-      <p:sp>
-        <p:nvSpPr>
-          <p:cNvPr id="4" name="TextBox 3"/>
-          <p:cNvSpPr txBox="1"/>
+              <a:t>Color Palette</a:t>
+            </a:r>
+          </a:p>
+        </p:txBody>
+      </p:sp>
+      <p:sp>
+        <p:nvSpPr>
+          <p:cNvPr id="4" name="Rectangle 3"/>
+          <p:cNvSpPr/>
           <p:nvPr/>
         </p:nvSpPr>
         <p:spPr>
           <a:xfrm>
             <a:off x="1143000" y="1943100"/>
-            <a:ext cx="3429000" cy="2971800"/>
-          </a:xfrm>
-          <a:prstGeom prst="rect">
-            <a:avLst/>
-          </a:prstGeom>
-          <a:noFill/>
-        </p:spPr>
-        <p:txBody>
-          <a:bodyPr wrap="square">
-            <a:spAutoFit/>
-          </a:bodyPr>
-          <a:lstStyle/>
-          <a:p>
-            <a:pPr>
-              <a:defRPr sz="1800" b="0">
-                <a:solidFill>
-                  <a:srgbClr val="FFFFFF"/>
-                </a:solidFill>
-                <a:latin typeface="Source Sans Pro"/>
-              </a:defRPr>
-            </a:pPr>
-            <a:r>
-              <a:t>Visual Style Guidelines:</a:t>
-            </a:r>
-          </a:p>
-          <a:p>
-            <a:pPr>
-              <a:defRPr sz="1400" b="0">
-                <a:solidFill>
-                  <a:srgbClr val="FFFFFF"/>
-                </a:solidFill>
-                <a:latin typeface="Source Sans Pro"/>
-              </a:defRPr>
-            </a:pPr>
-            <a:r>
-              <a:t>• Visual style for Flipkart in E-commerce</a:t>
-            </a:r>
-          </a:p>
-          <a:p>
-            <a:pPr>
-              <a:defRPr sz="1400" b="0">
-                <a:solidFill>
-                  <a:srgbClr val="FFFFFF"/>
-                </a:solidFill>
-                <a:latin typeface="Source Sans Pro"/>
-              </a:defRPr>
-            </a:pPr>
-            <a:r>
-              <a:t>• Retail</a:t>
-            </a:r>
-          </a:p>
-          <a:p>
-            <a:pPr>
-              <a:defRPr sz="1400" b="0">
-                <a:solidFill>
-                  <a:srgbClr val="FFFFFF"/>
-                </a:solidFill>
-                <a:latin typeface="Source Sans Pro"/>
-              </a:defRPr>
-            </a:pPr>
-            <a:r>
-              <a:t>• Technology</a:t>
-            </a:r>
-          </a:p>
-          <a:p>
-            <a:pPr>
-              <a:defRPr sz="1400" b="0">
-                <a:solidFill>
-                  <a:srgbClr val="FFFFFF"/>
-                </a:solidFill>
-                <a:latin typeface="Source Sans Pro"/>
-              </a:defRPr>
-            </a:pPr>
-            <a:r>
-              <a:t>• Logistics &amp; Supply Chain: Cartoon aesthetic</a:t>
-            </a:r>
-          </a:p>
-          <a:p>
-            <a:pPr>
-              <a:defRPr sz="1400" b="0">
-                <a:solidFill>
-                  <a:srgbClr val="FFFFFF"/>
-                </a:solidFill>
-                <a:latin typeface="Source Sans Pro"/>
-              </a:defRPr>
-            </a:pPr>
-            <a:r>
-              <a:t>• values: Customer-Centricity</a:t>
-            </a:r>
-          </a:p>
-        </p:txBody>
-      </p:sp>
-      <p:sp>
-        <p:nvSpPr>
-          <p:cNvPr id="5" name="TextBox 4"/>
-          <p:cNvSpPr txBox="1"/>
-          <p:nvPr/>
-        </p:nvSpPr>
-        <p:spPr>
-          <a:xfrm>
-            <a:off x="5257800" y="1943100"/>
-            <a:ext cx="3429000" cy="2971800"/>
-          </a:xfrm>
-          <a:prstGeom prst="rect">
-            <a:avLst/>
-          </a:prstGeom>
-          <a:noFill/>
-        </p:spPr>
-        <p:txBody>
-          <a:bodyPr wrap="square">
-            <a:spAutoFit/>
-          </a:bodyPr>
-          <a:lstStyle/>
-          <a:p>
-            <a:pPr>
-              <a:defRPr sz="1800" b="0">
-                <a:solidFill>
-                  <a:srgbClr val="FFFFFF"/>
-                </a:solidFill>
-                <a:latin typeface="Source Sans Pro"/>
-              </a:defRPr>
-            </a:pPr>
-            <a:r>
-              <a:t>Photography Guidelines:</a:t>
-            </a:r>
-          </a:p>
-          <a:p>
-            <a:pPr>
-              <a:defRPr sz="1400" b="0">
-                <a:solidFill>
-                  <a:srgbClr val="FFFFFF"/>
-                </a:solidFill>
-                <a:latin typeface="Source Sans Pro"/>
-              </a:defRPr>
-            </a:pPr>
-            <a:r>
-              <a:t>• Photography style for Flipkart: Cartoon and E-commerce</a:t>
-            </a:r>
-          </a:p>
-          <a:p>
-            <a:pPr>
-              <a:defRPr sz="1400" b="0">
-                <a:solidFill>
-                  <a:srgbClr val="FFFFFF"/>
-                </a:solidFill>
-                <a:latin typeface="Source Sans Pro"/>
-              </a:defRPr>
-            </a:pPr>
-            <a:r>
-              <a:t>• Retail</a:t>
-            </a:r>
-          </a:p>
-          <a:p>
-            <a:pPr>
-              <a:defRPr sz="1400" b="0">
-                <a:solidFill>
-                  <a:srgbClr val="FFFFFF"/>
-                </a:solidFill>
-                <a:latin typeface="Source Sans Pro"/>
-              </a:defRPr>
-            </a:pPr>
-            <a:r>
-              <a:t>• Technology</a:t>
-            </a:r>
-          </a:p>
-          <a:p>
-            <a:pPr>
-              <a:defRPr sz="1400" b="0">
-                <a:solidFill>
-                  <a:srgbClr val="FFFFFF"/>
-                </a:solidFill>
-                <a:latin typeface="Source Sans Pro"/>
-              </a:defRPr>
-            </a:pPr>
-            <a:r>
-              <a:t>• Logistics &amp; Supply Chain feel. Show diversity</a:t>
-            </a:r>
-          </a:p>
-          <a:p>
-            <a:pPr>
-              <a:defRPr sz="1400" b="0">
-                <a:solidFill>
-                  <a:srgbClr val="FFFFFF"/>
-                </a:solidFill>
-                <a:latin typeface="Source Sans Pro"/>
-              </a:defRPr>
-            </a:pPr>
-            <a:r>
-              <a:t>• authenticity</a:t>
-            </a:r>
-          </a:p>
-        </p:txBody>
-      </p:sp>
-      <p:sp>
-        <p:nvSpPr>
-          <p:cNvPr id="6" name="Rectangle 5"/>
-          <p:cNvSpPr/>
-          <p:nvPr/>
-        </p:nvSpPr>
-        <p:spPr>
-          <a:xfrm>
-            <a:off x="5257800" y="4914900"/>
-            <a:ext cx="685800" cy="742950"/>
+            <a:ext cx="2057400" cy="1485900"/>
           </a:xfrm>
           <a:prstGeom prst="rect">
             <a:avLst/>
           </a:prstGeom>
           <a:solidFill>
-            <a:srgbClr val="404040"/>
+            <a:srgbClr val="EA580C"/>
           </a:solidFill>
           <a:ln w="12700">
             <a:solidFill>
-              <a:srgbClr val="808080"/>
+              <a:srgbClr val="FFFFFF"/>
             </a:solidFill>
           </a:ln>
         </p:spPr>
@@ -10741,14 +6703,14 @@
       </p:sp>
       <p:sp>
         <p:nvSpPr>
-          <p:cNvPr id="7" name="TextBox 6"/>
+          <p:cNvPr id="5" name="TextBox 4"/>
           <p:cNvSpPr txBox="1"/>
           <p:nvPr/>
         </p:nvSpPr>
         <p:spPr>
           <a:xfrm>
-            <a:off x="5257800" y="5162550"/>
-            <a:ext cx="685800" cy="247650"/>
+            <a:off x="1143000" y="3429000"/>
+            <a:ext cx="2057400" cy="1485900"/>
           </a:xfrm>
           <a:prstGeom prst="rect">
             <a:avLst/>
@@ -10756,45 +6718,97 @@
           <a:noFill/>
         </p:spPr>
         <p:txBody>
-          <a:bodyPr wrap="none">
+          <a:bodyPr wrap="square">
             <a:spAutoFit/>
           </a:bodyPr>
           <a:lstStyle/>
           <a:p>
-            <a:pPr algn="ctr">
-              <a:defRPr sz="800" b="0">
-                <a:solidFill>
-                  <a:srgbClr val="FFFFFF"/>
-                </a:solidFill>
-                <a:latin typeface="Source Sans Pro"/>
-              </a:defRPr>
-            </a:pPr>
-            <a:r>
-              <a:t>Example</a:t>
-            </a:r>
-          </a:p>
-        </p:txBody>
-      </p:sp>
-      <p:sp>
-        <p:nvSpPr>
-          <p:cNvPr id="8" name="Rectangle 7"/>
+            <a:pPr>
+              <a:defRPr sz="1000" b="0">
+                <a:solidFill>
+                  <a:srgbClr val="EA580C"/>
+                </a:solidFill>
+                <a:latin typeface="Source Sans Pro"/>
+              </a:defRPr>
+            </a:pPr>
+            <a:r>
+              <a:t>Primary</a:t>
+            </a:r>
+          </a:p>
+          <a:p>
+            <a:pPr>
+              <a:defRPr sz="1000" b="0">
+                <a:solidFill>
+                  <a:srgbClr val="EA580C"/>
+                </a:solidFill>
+                <a:latin typeface="Source Sans Pro"/>
+              </a:defRPr>
+            </a:pPr>
+            <a:r>
+              <a:t>#EA580C</a:t>
+            </a:r>
+          </a:p>
+          <a:p>
+            <a:pPr>
+              <a:defRPr sz="1000" b="0">
+                <a:solidFill>
+                  <a:srgbClr val="EA580C"/>
+                </a:solidFill>
+                <a:latin typeface="Source Sans Pro"/>
+              </a:defRPr>
+            </a:pPr>
+            <a:r>
+              <a:t>RGB(234, 88, 12)</a:t>
+            </a:r>
+          </a:p>
+          <a:p>
+            <a:pPr>
+              <a:defRPr sz="1000" b="0">
+                <a:solidFill>
+                  <a:srgbClr val="EA580C"/>
+                </a:solidFill>
+                <a:latin typeface="Source Sans Pro"/>
+              </a:defRPr>
+            </a:pPr>
+            <a:r>
+              <a:t>CMYK(0, 62, 94, 8)</a:t>
+            </a:r>
+          </a:p>
+          <a:p>
+            <a:pPr>
+              <a:defRPr sz="1000" b="0">
+                <a:solidFill>
+                  <a:srgbClr val="EA580C"/>
+                </a:solidFill>
+                <a:latin typeface="Source Sans Pro"/>
+              </a:defRPr>
+            </a:pPr>
+            <a:r>
+              <a:t>Use Light Text</a:t>
+            </a:r>
+          </a:p>
+        </p:txBody>
+      </p:sp>
+      <p:sp>
+        <p:nvSpPr>
+          <p:cNvPr id="6" name="Rectangle 5"/>
           <p:cNvSpPr/>
           <p:nvPr/>
         </p:nvSpPr>
         <p:spPr>
           <a:xfrm>
-            <a:off x="6629400" y="4914900"/>
-            <a:ext cx="685800" cy="742950"/>
+            <a:off x="3886200" y="1943100"/>
+            <a:ext cx="2057400" cy="1485900"/>
           </a:xfrm>
           <a:prstGeom prst="rect">
             <a:avLst/>
           </a:prstGeom>
           <a:solidFill>
-            <a:srgbClr val="404040"/>
+            <a:srgbClr val="F87171"/>
           </a:solidFill>
           <a:ln w="12700">
             <a:solidFill>
-              <a:srgbClr val="808080"/>
+              <a:srgbClr val="FFFFFF"/>
             </a:solidFill>
           </a:ln>
         </p:spPr>
@@ -10822,14 +6836,14 @@
       </p:sp>
       <p:sp>
         <p:nvSpPr>
-          <p:cNvPr id="9" name="TextBox 8"/>
+          <p:cNvPr id="7" name="TextBox 6"/>
           <p:cNvSpPr txBox="1"/>
           <p:nvPr/>
         </p:nvSpPr>
         <p:spPr>
           <a:xfrm>
-            <a:off x="6629400" y="5162550"/>
-            <a:ext cx="685800" cy="247650"/>
+            <a:off x="3886200" y="3429000"/>
+            <a:ext cx="2057400" cy="1485900"/>
           </a:xfrm>
           <a:prstGeom prst="rect">
             <a:avLst/>
@@ -10837,45 +6851,97 @@
           <a:noFill/>
         </p:spPr>
         <p:txBody>
-          <a:bodyPr wrap="none">
+          <a:bodyPr wrap="square">
             <a:spAutoFit/>
           </a:bodyPr>
           <a:lstStyle/>
           <a:p>
-            <a:pPr algn="ctr">
-              <a:defRPr sz="800" b="0">
-                <a:solidFill>
-                  <a:srgbClr val="FFFFFF"/>
-                </a:solidFill>
-                <a:latin typeface="Source Sans Pro"/>
-              </a:defRPr>
-            </a:pPr>
-            <a:r>
-              <a:t>Example</a:t>
-            </a:r>
-          </a:p>
-        </p:txBody>
-      </p:sp>
-      <p:sp>
-        <p:nvSpPr>
-          <p:cNvPr id="10" name="Rectangle 9"/>
+            <a:pPr>
+              <a:defRPr sz="1000" b="0">
+                <a:solidFill>
+                  <a:srgbClr val="EA580C"/>
+                </a:solidFill>
+                <a:latin typeface="Source Sans Pro"/>
+              </a:defRPr>
+            </a:pPr>
+            <a:r>
+              <a:t>Secondary</a:t>
+            </a:r>
+          </a:p>
+          <a:p>
+            <a:pPr>
+              <a:defRPr sz="1000" b="0">
+                <a:solidFill>
+                  <a:srgbClr val="EA580C"/>
+                </a:solidFill>
+                <a:latin typeface="Source Sans Pro"/>
+              </a:defRPr>
+            </a:pPr>
+            <a:r>
+              <a:t>#F87171</a:t>
+            </a:r>
+          </a:p>
+          <a:p>
+            <a:pPr>
+              <a:defRPr sz="1000" b="0">
+                <a:solidFill>
+                  <a:srgbClr val="EA580C"/>
+                </a:solidFill>
+                <a:latin typeface="Source Sans Pro"/>
+              </a:defRPr>
+            </a:pPr>
+            <a:r>
+              <a:t>RGB(248, 113, 113)</a:t>
+            </a:r>
+          </a:p>
+          <a:p>
+            <a:pPr>
+              <a:defRPr sz="1000" b="0">
+                <a:solidFill>
+                  <a:srgbClr val="EA580C"/>
+                </a:solidFill>
+                <a:latin typeface="Source Sans Pro"/>
+              </a:defRPr>
+            </a:pPr>
+            <a:r>
+              <a:t>CMYK(0, 54, 54, 2)</a:t>
+            </a:r>
+          </a:p>
+          <a:p>
+            <a:pPr>
+              <a:defRPr sz="1000" b="0">
+                <a:solidFill>
+                  <a:srgbClr val="EA580C"/>
+                </a:solidFill>
+                <a:latin typeface="Source Sans Pro"/>
+              </a:defRPr>
+            </a:pPr>
+            <a:r>
+              <a:t>Use Dark Text</a:t>
+            </a:r>
+          </a:p>
+        </p:txBody>
+      </p:sp>
+      <p:sp>
+        <p:nvSpPr>
+          <p:cNvPr id="8" name="Rectangle 7"/>
           <p:cNvSpPr/>
           <p:nvPr/>
         </p:nvSpPr>
         <p:spPr>
           <a:xfrm>
-            <a:off x="8001000" y="4914900"/>
-            <a:ext cx="685800" cy="742950"/>
+            <a:off x="6629400" y="1943100"/>
+            <a:ext cx="2057400" cy="1485900"/>
           </a:xfrm>
           <a:prstGeom prst="rect">
             <a:avLst/>
           </a:prstGeom>
           <a:solidFill>
-            <a:srgbClr val="404040"/>
+            <a:srgbClr val="1F2937"/>
           </a:solidFill>
           <a:ln w="12700">
             <a:solidFill>
-              <a:srgbClr val="808080"/>
+              <a:srgbClr val="FFFFFF"/>
             </a:solidFill>
           </a:ln>
         </p:spPr>
@@ -10903,14 +6969,368 @@
       </p:sp>
       <p:sp>
         <p:nvSpPr>
+          <p:cNvPr id="9" name="TextBox 8"/>
+          <p:cNvSpPr txBox="1"/>
+          <p:nvPr/>
+        </p:nvSpPr>
+        <p:spPr>
+          <a:xfrm>
+            <a:off x="6629400" y="3429000"/>
+            <a:ext cx="2057400" cy="1485900"/>
+          </a:xfrm>
+          <a:prstGeom prst="rect">
+            <a:avLst/>
+          </a:prstGeom>
+          <a:noFill/>
+        </p:spPr>
+        <p:txBody>
+          <a:bodyPr wrap="square">
+            <a:spAutoFit/>
+          </a:bodyPr>
+          <a:lstStyle/>
+          <a:p>
+            <a:pPr>
+              <a:defRPr sz="1000" b="0">
+                <a:solidFill>
+                  <a:srgbClr val="EA580C"/>
+                </a:solidFill>
+                <a:latin typeface="Source Sans Pro"/>
+              </a:defRPr>
+            </a:pPr>
+            <a:r>
+              <a:t>Accent</a:t>
+            </a:r>
+          </a:p>
+          <a:p>
+            <a:pPr>
+              <a:defRPr sz="1000" b="0">
+                <a:solidFill>
+                  <a:srgbClr val="EA580C"/>
+                </a:solidFill>
+                <a:latin typeface="Source Sans Pro"/>
+              </a:defRPr>
+            </a:pPr>
+            <a:r>
+              <a:t>#1F2937</a:t>
+            </a:r>
+          </a:p>
+          <a:p>
+            <a:pPr>
+              <a:defRPr sz="1000" b="0">
+                <a:solidFill>
+                  <a:srgbClr val="EA580C"/>
+                </a:solidFill>
+                <a:latin typeface="Source Sans Pro"/>
+              </a:defRPr>
+            </a:pPr>
+            <a:r>
+              <a:t>RGB(31, 41, 55)</a:t>
+            </a:r>
+          </a:p>
+          <a:p>
+            <a:pPr>
+              <a:defRPr sz="1000" b="0">
+                <a:solidFill>
+                  <a:srgbClr val="EA580C"/>
+                </a:solidFill>
+                <a:latin typeface="Source Sans Pro"/>
+              </a:defRPr>
+            </a:pPr>
+            <a:r>
+              <a:t>CMYK(43, 25, 0, 78)</a:t>
+            </a:r>
+          </a:p>
+          <a:p>
+            <a:pPr>
+              <a:defRPr sz="1000" b="0">
+                <a:solidFill>
+                  <a:srgbClr val="EA580C"/>
+                </a:solidFill>
+                <a:latin typeface="Source Sans Pro"/>
+              </a:defRPr>
+            </a:pPr>
+            <a:r>
+              <a:t>Use Light Text</a:t>
+            </a:r>
+          </a:p>
+        </p:txBody>
+      </p:sp>
+      <p:sp>
+        <p:nvSpPr>
+          <p:cNvPr id="10" name="Rectangle 9"/>
+          <p:cNvSpPr/>
+          <p:nvPr/>
+        </p:nvSpPr>
+        <p:spPr>
+          <a:xfrm>
+            <a:off x="1143000" y="5657850"/>
+            <a:ext cx="2057400" cy="1485900"/>
+          </a:xfrm>
+          <a:prstGeom prst="rect">
+            <a:avLst/>
+          </a:prstGeom>
+          <a:solidFill>
+            <a:srgbClr val="FB923C"/>
+          </a:solidFill>
+          <a:ln w="12700">
+            <a:solidFill>
+              <a:srgbClr val="FFFFFF"/>
+            </a:solidFill>
+          </a:ln>
+        </p:spPr>
+        <p:style>
+          <a:lnRef idx="1">
+            <a:schemeClr val="accent1"/>
+          </a:lnRef>
+          <a:fillRef idx="3">
+            <a:schemeClr val="accent1"/>
+          </a:fillRef>
+          <a:effectRef idx="2">
+            <a:schemeClr val="accent1"/>
+          </a:effectRef>
+          <a:fontRef idx="minor">
+            <a:schemeClr val="lt1"/>
+          </a:fontRef>
+        </p:style>
+        <p:txBody>
+          <a:bodyPr rtlCol="0" anchor="ctr"/>
+          <a:lstStyle/>
+          <a:p>
+            <a:pPr algn="ctr"/>
+          </a:p>
+        </p:txBody>
+      </p:sp>
+      <p:sp>
+        <p:nvSpPr>
           <p:cNvPr id="11" name="TextBox 10"/>
           <p:cNvSpPr txBox="1"/>
           <p:nvPr/>
         </p:nvSpPr>
         <p:spPr>
           <a:xfrm>
-            <a:off x="8001000" y="5162550"/>
-            <a:ext cx="685800" cy="247650"/>
+            <a:off x="1143000" y="7143750"/>
+            <a:ext cx="2057400" cy="1485900"/>
+          </a:xfrm>
+          <a:prstGeom prst="rect">
+            <a:avLst/>
+          </a:prstGeom>
+          <a:noFill/>
+        </p:spPr>
+        <p:txBody>
+          <a:bodyPr wrap="square">
+            <a:spAutoFit/>
+          </a:bodyPr>
+          <a:lstStyle/>
+          <a:p>
+            <a:pPr>
+              <a:defRPr sz="1000" b="0">
+                <a:solidFill>
+                  <a:srgbClr val="EA580C"/>
+                </a:solidFill>
+                <a:latin typeface="Source Sans Pro"/>
+              </a:defRPr>
+            </a:pPr>
+            <a:r>
+              <a:t>Supporting</a:t>
+            </a:r>
+          </a:p>
+          <a:p>
+            <a:pPr>
+              <a:defRPr sz="1000" b="0">
+                <a:solidFill>
+                  <a:srgbClr val="EA580C"/>
+                </a:solidFill>
+                <a:latin typeface="Source Sans Pro"/>
+              </a:defRPr>
+            </a:pPr>
+            <a:r>
+              <a:t>#FB923C</a:t>
+            </a:r>
+          </a:p>
+          <a:p>
+            <a:pPr>
+              <a:defRPr sz="1000" b="0">
+                <a:solidFill>
+                  <a:srgbClr val="EA580C"/>
+                </a:solidFill>
+                <a:latin typeface="Source Sans Pro"/>
+              </a:defRPr>
+            </a:pPr>
+            <a:r>
+              <a:t>RGB(251, 146, 60)</a:t>
+            </a:r>
+          </a:p>
+          <a:p>
+            <a:pPr>
+              <a:defRPr sz="1000" b="0">
+                <a:solidFill>
+                  <a:srgbClr val="EA580C"/>
+                </a:solidFill>
+                <a:latin typeface="Source Sans Pro"/>
+              </a:defRPr>
+            </a:pPr>
+            <a:r>
+              <a:t>CMYK(0, 41, 76, 1)</a:t>
+            </a:r>
+          </a:p>
+          <a:p>
+            <a:pPr>
+              <a:defRPr sz="1000" b="0">
+                <a:solidFill>
+                  <a:srgbClr val="EA580C"/>
+                </a:solidFill>
+                <a:latin typeface="Source Sans Pro"/>
+              </a:defRPr>
+            </a:pPr>
+            <a:r>
+              <a:t>Use Dark Text</a:t>
+            </a:r>
+          </a:p>
+        </p:txBody>
+      </p:sp>
+      <p:sp>
+        <p:nvSpPr>
+          <p:cNvPr id="12" name="Rectangle 11"/>
+          <p:cNvSpPr/>
+          <p:nvPr/>
+        </p:nvSpPr>
+        <p:spPr>
+          <a:xfrm>
+            <a:off x="3886200" y="5657850"/>
+            <a:ext cx="2057400" cy="1485900"/>
+          </a:xfrm>
+          <a:prstGeom prst="rect">
+            <a:avLst/>
+          </a:prstGeom>
+          <a:solidFill>
+            <a:srgbClr val="EA580C"/>
+          </a:solidFill>
+          <a:ln w="12700">
+            <a:solidFill>
+              <a:srgbClr val="FFFFFF"/>
+            </a:solidFill>
+          </a:ln>
+        </p:spPr>
+        <p:style>
+          <a:lnRef idx="1">
+            <a:schemeClr val="accent1"/>
+          </a:lnRef>
+          <a:fillRef idx="3">
+            <a:schemeClr val="accent1"/>
+          </a:fillRef>
+          <a:effectRef idx="2">
+            <a:schemeClr val="accent1"/>
+          </a:effectRef>
+          <a:fontRef idx="minor">
+            <a:schemeClr val="lt1"/>
+          </a:fontRef>
+        </p:style>
+        <p:txBody>
+          <a:bodyPr rtlCol="0" anchor="ctr"/>
+          <a:lstStyle/>
+          <a:p>
+            <a:pPr algn="ctr"/>
+          </a:p>
+        </p:txBody>
+      </p:sp>
+      <p:sp>
+        <p:nvSpPr>
+          <p:cNvPr id="13" name="TextBox 12"/>
+          <p:cNvSpPr txBox="1"/>
+          <p:nvPr/>
+        </p:nvSpPr>
+        <p:spPr>
+          <a:xfrm>
+            <a:off x="3886200" y="7143750"/>
+            <a:ext cx="2057400" cy="1485900"/>
+          </a:xfrm>
+          <a:prstGeom prst="rect">
+            <a:avLst/>
+          </a:prstGeom>
+          <a:noFill/>
+        </p:spPr>
+        <p:txBody>
+          <a:bodyPr wrap="square">
+            <a:spAutoFit/>
+          </a:bodyPr>
+          <a:lstStyle/>
+          <a:p>
+            <a:pPr>
+              <a:defRPr sz="1000" b="0">
+                <a:solidFill>
+                  <a:srgbClr val="EA580C"/>
+                </a:solidFill>
+                <a:latin typeface="Source Sans Pro"/>
+              </a:defRPr>
+            </a:pPr>
+            <a:r>
+              <a:t>Hex_Codes</a:t>
+            </a:r>
+          </a:p>
+          <a:p>
+            <a:pPr>
+              <a:defRPr sz="1000" b="0">
+                <a:solidFill>
+                  <a:srgbClr val="EA580C"/>
+                </a:solidFill>
+                <a:latin typeface="Source Sans Pro"/>
+              </a:defRPr>
+            </a:pPr>
+            <a:r>
+              <a:t>#EA580C</a:t>
+            </a:r>
+          </a:p>
+          <a:p>
+            <a:pPr>
+              <a:defRPr sz="1000" b="0">
+                <a:solidFill>
+                  <a:srgbClr val="EA580C"/>
+                </a:solidFill>
+                <a:latin typeface="Source Sans Pro"/>
+              </a:defRPr>
+            </a:pPr>
+            <a:r>
+              <a:t>RGB(234, 88, 12)</a:t>
+            </a:r>
+          </a:p>
+          <a:p>
+            <a:pPr>
+              <a:defRPr sz="1000" b="0">
+                <a:solidFill>
+                  <a:srgbClr val="EA580C"/>
+                </a:solidFill>
+                <a:latin typeface="Source Sans Pro"/>
+              </a:defRPr>
+            </a:pPr>
+            <a:r>
+              <a:t>CMYK(0, 62, 94, 8)</a:t>
+            </a:r>
+          </a:p>
+          <a:p>
+            <a:pPr>
+              <a:defRPr sz="1000" b="0">
+                <a:solidFill>
+                  <a:srgbClr val="EA580C"/>
+                </a:solidFill>
+                <a:latin typeface="Source Sans Pro"/>
+              </a:defRPr>
+            </a:pPr>
+            <a:r>
+              <a:t>Use Light Text</a:t>
+            </a:r>
+          </a:p>
+        </p:txBody>
+      </p:sp>
+      <p:sp>
+        <p:nvSpPr>
+          <p:cNvPr id="14" name="TextBox 13"/>
+          <p:cNvSpPr txBox="1"/>
+          <p:nvPr/>
+        </p:nvSpPr>
+        <p:spPr>
+          <a:xfrm>
+            <a:off x="457200" y="5657850"/>
+            <a:ext cx="4114800" cy="742950"/>
           </a:xfrm>
           <a:prstGeom prst="rect">
             <a:avLst/>
@@ -10923,29 +7343,29 @@
           </a:bodyPr>
           <a:lstStyle/>
           <a:p>
-            <a:pPr algn="ctr">
-              <a:defRPr sz="800" b="0">
-                <a:solidFill>
-                  <a:srgbClr val="FFFFFF"/>
-                </a:solidFill>
-                <a:latin typeface="Source Sans Pro"/>
-              </a:defRPr>
-            </a:pPr>
-            <a:r>
-              <a:t>Example</a:t>
-            </a:r>
-          </a:p>
-        </p:txBody>
-      </p:sp>
-      <p:sp>
-        <p:nvSpPr>
-          <p:cNvPr id="12" name="TextBox 11"/>
+            <a:pPr algn="l">
+              <a:defRPr sz="1000" b="0">
+                <a:solidFill>
+                  <a:srgbClr val="EA580C"/>
+                </a:solidFill>
+                <a:latin typeface="Source Sans Pro"/>
+              </a:defRPr>
+            </a:pPr>
+            <a:r>
+              <a:t>Flipkart</a:t>
+            </a:r>
+          </a:p>
+        </p:txBody>
+      </p:sp>
+      <p:sp>
+        <p:nvSpPr>
+          <p:cNvPr id="15" name="TextBox 14"/>
           <p:cNvSpPr txBox="1"/>
           <p:nvPr/>
         </p:nvSpPr>
         <p:spPr>
           <a:xfrm>
-            <a:off x="457200" y="5657850"/>
+            <a:off x="4572000" y="5657850"/>
             <a:ext cx="4114800" cy="742950"/>
           </a:xfrm>
           <a:prstGeom prst="rect">
@@ -10959,46 +7379,10 @@
           </a:bodyPr>
           <a:lstStyle/>
           <a:p>
-            <a:pPr algn="l">
-              <a:defRPr sz="1000" b="0">
-                <a:solidFill>
-                  <a:srgbClr val="FFFFFF"/>
-                </a:solidFill>
-                <a:latin typeface="Source Sans Pro"/>
-              </a:defRPr>
-            </a:pPr>
-            <a:r>
-              <a:t>Flipkart</a:t>
-            </a:r>
-          </a:p>
-        </p:txBody>
-      </p:sp>
-      <p:sp>
-        <p:nvSpPr>
-          <p:cNvPr id="13" name="TextBox 12"/>
-          <p:cNvSpPr txBox="1"/>
-          <p:nvPr/>
-        </p:nvSpPr>
-        <p:spPr>
-          <a:xfrm>
-            <a:off x="4572000" y="5657850"/>
-            <a:ext cx="4114800" cy="742950"/>
-          </a:xfrm>
-          <a:prstGeom prst="rect">
-            <a:avLst/>
-          </a:prstGeom>
-          <a:noFill/>
-        </p:spPr>
-        <p:txBody>
-          <a:bodyPr wrap="none">
-            <a:spAutoFit/>
-          </a:bodyPr>
-          <a:lstStyle/>
-          <a:p>
             <a:pPr algn="r">
               <a:defRPr sz="1000" b="0">
                 <a:solidFill>
-                  <a:srgbClr val="FFFFFF"/>
+                  <a:srgbClr val="EA580C"/>
                 </a:solidFill>
                 <a:latin typeface="Source Sans Pro"/>
               </a:defRPr>
@@ -11095,13 +7479,13 @@
             <a:pPr>
               <a:defRPr sz="3200" b="1">
                 <a:solidFill>
-                  <a:srgbClr val="FFFFFF"/>
+                  <a:srgbClr val="EA580C"/>
                 </a:solidFill>
                 <a:latin typeface="Inter"/>
               </a:defRPr>
             </a:pPr>
             <a:r>
-              <a:t>Brand Story &amp; Mission (1/4)</a:t>
+              <a:t>Typography</a:t>
             </a:r>
           </a:p>
         </p:txBody>
@@ -11115,43 +7499,7 @@
         <p:spPr>
           <a:xfrm>
             <a:off x="1143000" y="1943100"/>
-            <a:ext cx="6858000" cy="2971800"/>
-          </a:xfrm>
-          <a:prstGeom prst="rect">
-            <a:avLst/>
-          </a:prstGeom>
-          <a:noFill/>
-        </p:spPr>
-        <p:txBody>
-          <a:bodyPr wrap="square">
-            <a:spAutoFit/>
-          </a:bodyPr>
-          <a:lstStyle/>
-          <a:p>
-            <a:pPr>
-              <a:defRPr sz="1600" b="0">
-                <a:solidFill>
-                  <a:srgbClr val="FFFFFF"/>
-                </a:solidFill>
-                <a:latin typeface="Source Sans Pro"/>
-              </a:defRPr>
-            </a:pPr>
-            <a:r>
-              <a:t>In the bustling streets of India, where the vibrant colors and sounds of daily life intertwine, there is a beacon of innovation and convenience that shines brighter than the rest - Flipkart. At Flipkart, we believe in the power of empowerment through technology. Our journey began with a simple idea - to revolutionize the way people shop, especially those who value affordability and convenience above all else. We saw an opportunity to cater to the needs of price-conscious shoppers, middle-class families, young professionals, students, and digital-savvy consumers who were looking for a reliable and trustworthy online shopping experience. Driven by our core values of customer-centricity, innovation, and inclusivity, we embarked</a:t>
-            </a:r>
-          </a:p>
-        </p:txBody>
-      </p:sp>
-      <p:sp>
-        <p:nvSpPr>
-          <p:cNvPr id="5" name="TextBox 4"/>
-          <p:cNvSpPr txBox="1"/>
-          <p:nvPr/>
-        </p:nvSpPr>
-        <p:spPr>
-          <a:xfrm>
-            <a:off x="457200" y="5657850"/>
-            <a:ext cx="4114800" cy="742950"/>
+            <a:ext cx="3429000" cy="742950"/>
           </a:xfrm>
           <a:prstGeom prst="rect">
             <a:avLst/>
@@ -11164,30 +7512,30 @@
           </a:bodyPr>
           <a:lstStyle/>
           <a:p>
-            <a:pPr algn="l">
-              <a:defRPr sz="1000" b="0">
-                <a:solidFill>
-                  <a:srgbClr val="FFFFFF"/>
-                </a:solidFill>
-                <a:latin typeface="Source Sans Pro"/>
-              </a:defRPr>
-            </a:pPr>
-            <a:r>
-              <a:t>Flipkart</a:t>
-            </a:r>
-          </a:p>
-        </p:txBody>
-      </p:sp>
-      <p:sp>
-        <p:nvSpPr>
-          <p:cNvPr id="6" name="TextBox 5"/>
+            <a:pPr>
+              <a:defRPr sz="2000" b="0">
+                <a:solidFill>
+                  <a:srgbClr val="EA580C"/>
+                </a:solidFill>
+                <a:latin typeface="Source Sans Pro"/>
+              </a:defRPr>
+            </a:pPr>
+            <a:r>
+              <a:t>Primary Font: Inter</a:t>
+            </a:r>
+          </a:p>
+        </p:txBody>
+      </p:sp>
+      <p:sp>
+        <p:nvSpPr>
+          <p:cNvPr id="5" name="TextBox 4"/>
           <p:cNvSpPr txBox="1"/>
           <p:nvPr/>
         </p:nvSpPr>
         <p:spPr>
           <a:xfrm>
-            <a:off x="4572000" y="5657850"/>
-            <a:ext cx="4114800" cy="742950"/>
+            <a:off x="1143000" y="2686050"/>
+            <a:ext cx="3429000" cy="742950"/>
           </a:xfrm>
           <a:prstGeom prst="rect">
             <a:avLst/>
@@ -11200,10 +7548,298 @@
           </a:bodyPr>
           <a:lstStyle/>
           <a:p>
+            <a:pPr>
+              <a:defRPr sz="3200" b="1">
+                <a:solidFill>
+                  <a:srgbClr val="EA580C"/>
+                </a:solidFill>
+                <a:latin typeface="Inter"/>
+              </a:defRPr>
+            </a:pPr>
+            <a:r>
+              <a:t>H1 Heading</a:t>
+            </a:r>
+          </a:p>
+        </p:txBody>
+      </p:sp>
+      <p:sp>
+        <p:nvSpPr>
+          <p:cNvPr id="6" name="TextBox 5"/>
+          <p:cNvSpPr txBox="1"/>
+          <p:nvPr/>
+        </p:nvSpPr>
+        <p:spPr>
+          <a:xfrm>
+            <a:off x="1143000" y="3429000"/>
+            <a:ext cx="3429000" cy="742950"/>
+          </a:xfrm>
+          <a:prstGeom prst="rect">
+            <a:avLst/>
+          </a:prstGeom>
+          <a:noFill/>
+        </p:spPr>
+        <p:txBody>
+          <a:bodyPr wrap="none">
+            <a:spAutoFit/>
+          </a:bodyPr>
+          <a:lstStyle/>
+          <a:p>
+            <a:pPr>
+              <a:defRPr sz="2400" b="1">
+                <a:solidFill>
+                  <a:srgbClr val="EA580C"/>
+                </a:solidFill>
+                <a:latin typeface="Inter"/>
+              </a:defRPr>
+            </a:pPr>
+            <a:r>
+              <a:t>H2 Heading</a:t>
+            </a:r>
+          </a:p>
+        </p:txBody>
+      </p:sp>
+      <p:sp>
+        <p:nvSpPr>
+          <p:cNvPr id="7" name="TextBox 6"/>
+          <p:cNvSpPr txBox="1"/>
+          <p:nvPr/>
+        </p:nvSpPr>
+        <p:spPr>
+          <a:xfrm>
+            <a:off x="1143000" y="4171950"/>
+            <a:ext cx="3429000" cy="742950"/>
+          </a:xfrm>
+          <a:prstGeom prst="rect">
+            <a:avLst/>
+          </a:prstGeom>
+          <a:noFill/>
+        </p:spPr>
+        <p:txBody>
+          <a:bodyPr wrap="none">
+            <a:spAutoFit/>
+          </a:bodyPr>
+          <a:lstStyle/>
+          <a:p>
+            <a:pPr>
+              <a:defRPr sz="2000" b="0">
+                <a:solidFill>
+                  <a:srgbClr val="EA580C"/>
+                </a:solidFill>
+                <a:latin typeface="Inter"/>
+              </a:defRPr>
+            </a:pPr>
+            <a:r>
+              <a:t>H3 Heading</a:t>
+            </a:r>
+          </a:p>
+        </p:txBody>
+      </p:sp>
+      <p:sp>
+        <p:nvSpPr>
+          <p:cNvPr id="8" name="TextBox 7"/>
+          <p:cNvSpPr txBox="1"/>
+          <p:nvPr/>
+        </p:nvSpPr>
+        <p:spPr>
+          <a:xfrm>
+            <a:off x="5257800" y="1943100"/>
+            <a:ext cx="3429000" cy="742950"/>
+          </a:xfrm>
+          <a:prstGeom prst="rect">
+            <a:avLst/>
+          </a:prstGeom>
+          <a:noFill/>
+        </p:spPr>
+        <p:txBody>
+          <a:bodyPr wrap="none">
+            <a:spAutoFit/>
+          </a:bodyPr>
+          <a:lstStyle/>
+          <a:p>
+            <a:pPr>
+              <a:defRPr sz="2000" b="0">
+                <a:solidFill>
+                  <a:srgbClr val="EA580C"/>
+                </a:solidFill>
+                <a:latin typeface="Source Sans Pro"/>
+              </a:defRPr>
+            </a:pPr>
+            <a:r>
+              <a:t>Secondary Font: Source Sans Pro</a:t>
+            </a:r>
+          </a:p>
+        </p:txBody>
+      </p:sp>
+      <p:sp>
+        <p:nvSpPr>
+          <p:cNvPr id="9" name="TextBox 8"/>
+          <p:cNvSpPr txBox="1"/>
+          <p:nvPr/>
+        </p:nvSpPr>
+        <p:spPr>
+          <a:xfrm>
+            <a:off x="5257800" y="2686050"/>
+            <a:ext cx="3429000" cy="742950"/>
+          </a:xfrm>
+          <a:prstGeom prst="rect">
+            <a:avLst/>
+          </a:prstGeom>
+          <a:noFill/>
+        </p:spPr>
+        <p:txBody>
+          <a:bodyPr wrap="none">
+            <a:spAutoFit/>
+          </a:bodyPr>
+          <a:lstStyle/>
+          <a:p>
+            <a:pPr>
+              <a:defRPr sz="1600" b="0">
+                <a:solidFill>
+                  <a:srgbClr val="EA580C"/>
+                </a:solidFill>
+                <a:latin typeface="Source Sans Pro"/>
+              </a:defRPr>
+            </a:pPr>
+            <a:r>
+              <a:t>Body Text</a:t>
+            </a:r>
+          </a:p>
+        </p:txBody>
+      </p:sp>
+      <p:sp>
+        <p:nvSpPr>
+          <p:cNvPr id="10" name="TextBox 9"/>
+          <p:cNvSpPr txBox="1"/>
+          <p:nvPr/>
+        </p:nvSpPr>
+        <p:spPr>
+          <a:xfrm>
+            <a:off x="5257800" y="3429000"/>
+            <a:ext cx="3429000" cy="742950"/>
+          </a:xfrm>
+          <a:prstGeom prst="rect">
+            <a:avLst/>
+          </a:prstGeom>
+          <a:noFill/>
+        </p:spPr>
+        <p:txBody>
+          <a:bodyPr wrap="none">
+            <a:spAutoFit/>
+          </a:bodyPr>
+          <a:lstStyle/>
+          <a:p>
+            <a:pPr>
+              <a:defRPr sz="1600" b="1">
+                <a:solidFill>
+                  <a:srgbClr val="EA580C"/>
+                </a:solidFill>
+                <a:latin typeface="Source Sans Pro"/>
+              </a:defRPr>
+            </a:pPr>
+            <a:r>
+              <a:t>Body Bold</a:t>
+            </a:r>
+          </a:p>
+        </p:txBody>
+      </p:sp>
+      <p:sp>
+        <p:nvSpPr>
+          <p:cNvPr id="11" name="TextBox 10"/>
+          <p:cNvSpPr txBox="1"/>
+          <p:nvPr/>
+        </p:nvSpPr>
+        <p:spPr>
+          <a:xfrm>
+            <a:off x="5257800" y="4171950"/>
+            <a:ext cx="3429000" cy="742950"/>
+          </a:xfrm>
+          <a:prstGeom prst="rect">
+            <a:avLst/>
+          </a:prstGeom>
+          <a:noFill/>
+        </p:spPr>
+        <p:txBody>
+          <a:bodyPr wrap="none">
+            <a:spAutoFit/>
+          </a:bodyPr>
+          <a:lstStyle/>
+          <a:p>
+            <a:pPr>
+              <a:defRPr sz="1200" b="0">
+                <a:solidFill>
+                  <a:srgbClr val="EA580C"/>
+                </a:solidFill>
+                <a:latin typeface="Source Sans Pro"/>
+              </a:defRPr>
+            </a:pPr>
+            <a:r>
+              <a:t>Caption Text</a:t>
+            </a:r>
+          </a:p>
+        </p:txBody>
+      </p:sp>
+      <p:sp>
+        <p:nvSpPr>
+          <p:cNvPr id="12" name="TextBox 11"/>
+          <p:cNvSpPr txBox="1"/>
+          <p:nvPr/>
+        </p:nvSpPr>
+        <p:spPr>
+          <a:xfrm>
+            <a:off x="457200" y="5657850"/>
+            <a:ext cx="4114800" cy="742950"/>
+          </a:xfrm>
+          <a:prstGeom prst="rect">
+            <a:avLst/>
+          </a:prstGeom>
+          <a:noFill/>
+        </p:spPr>
+        <p:txBody>
+          <a:bodyPr wrap="none">
+            <a:spAutoFit/>
+          </a:bodyPr>
+          <a:lstStyle/>
+          <a:p>
+            <a:pPr algn="l">
+              <a:defRPr sz="1000" b="0">
+                <a:solidFill>
+                  <a:srgbClr val="EA580C"/>
+                </a:solidFill>
+                <a:latin typeface="Source Sans Pro"/>
+              </a:defRPr>
+            </a:pPr>
+            <a:r>
+              <a:t>Flipkart</a:t>
+            </a:r>
+          </a:p>
+        </p:txBody>
+      </p:sp>
+      <p:sp>
+        <p:nvSpPr>
+          <p:cNvPr id="13" name="TextBox 12"/>
+          <p:cNvSpPr txBox="1"/>
+          <p:nvPr/>
+        </p:nvSpPr>
+        <p:spPr>
+          <a:xfrm>
+            <a:off x="4572000" y="5657850"/>
+            <a:ext cx="4114800" cy="742950"/>
+          </a:xfrm>
+          <a:prstGeom prst="rect">
+            <a:avLst/>
+          </a:prstGeom>
+          <a:noFill/>
+        </p:spPr>
+        <p:txBody>
+          <a:bodyPr wrap="none">
+            <a:spAutoFit/>
+          </a:bodyPr>
+          <a:lstStyle/>
+          <a:p>
             <a:pPr algn="r">
               <a:defRPr sz="1000" b="0">
                 <a:solidFill>
-                  <a:srgbClr val="FFFFFF"/>
+                  <a:srgbClr val="EA580C"/>
                 </a:solidFill>
                 <a:latin typeface="Source Sans Pro"/>
               </a:defRPr>

--- a/output/flipkart/flipkart_enhanced_brand_book.pptx
+++ b/output/flipkart/flipkart_enhanced_brand_book.pptx
@@ -3107,7 +3107,7 @@
       <p:grpSpPr/>
       <p:pic>
         <p:nvPicPr>
-          <p:cNvPr id="2" name="Picture 1" descr="flipkart_logo_1_20250828_181950_a6e442d2.png"/>
+          <p:cNvPr id="2" name="Picture 1" descr="flipkart_logo_1_20250828_183749_a1922570.png"/>
           <p:cNvPicPr>
             <a:picLocks noChangeAspect="1"/>
           </p:cNvPicPr>
@@ -3181,7 +3181,7 @@
           </a:prstGeom>
           <a:ln>
             <a:solidFill>
-              <a:srgbClr val="EA580C"/>
+              <a:srgbClr val="1F2937"/>
             </a:solidFill>
           </a:ln>
         </p:spPr>
@@ -3225,7 +3225,7 @@
             <a:pPr algn="ctr">
               <a:defRPr sz="1800" b="0">
                 <a:solidFill>
-                  <a:srgbClr val="EA580C"/>
+                  <a:srgbClr val="1F2937"/>
                 </a:solidFill>
                 <a:latin typeface="Source Sans Pro"/>
               </a:defRPr>
@@ -3322,7 +3322,7 @@
             <a:pPr>
               <a:defRPr sz="3200" b="1">
                 <a:solidFill>
-                  <a:srgbClr val="EA580C"/>
+                  <a:srgbClr val="FFFFFF"/>
                 </a:solidFill>
                 <a:latin typeface="Inter"/>
               </a:defRPr>
@@ -3358,7 +3358,7 @@
             <a:pPr>
               <a:defRPr sz="1800" b="0">
                 <a:solidFill>
-                  <a:srgbClr val="EA580C"/>
+                  <a:srgbClr val="FFFFFF"/>
                 </a:solidFill>
                 <a:latin typeface="Source Sans Pro"/>
               </a:defRPr>
@@ -3371,7 +3371,7 @@
             <a:pPr>
               <a:defRPr sz="1400" b="0">
                 <a:solidFill>
-                  <a:srgbClr val="EA580C"/>
+                  <a:srgbClr val="FFFFFF"/>
                 </a:solidFill>
                 <a:latin typeface="Source Sans Pro"/>
               </a:defRPr>
@@ -3384,7 +3384,7 @@
             <a:pPr>
               <a:defRPr sz="1400" b="0">
                 <a:solidFill>
-                  <a:srgbClr val="EA580C"/>
+                  <a:srgbClr val="FFFFFF"/>
                 </a:solidFill>
                 <a:latin typeface="Source Sans Pro"/>
               </a:defRPr>
@@ -3397,7 +3397,7 @@
             <a:pPr>
               <a:defRPr sz="1400" b="0">
                 <a:solidFill>
-                  <a:srgbClr val="EA580C"/>
+                  <a:srgbClr val="FFFFFF"/>
                 </a:solidFill>
                 <a:latin typeface="Source Sans Pro"/>
               </a:defRPr>
@@ -3410,20 +3410,20 @@
             <a:pPr>
               <a:defRPr sz="1400" b="0">
                 <a:solidFill>
-                  <a:srgbClr val="EA580C"/>
-                </a:solidFill>
-                <a:latin typeface="Source Sans Pro"/>
-              </a:defRPr>
-            </a:pPr>
-            <a:r>
-              <a:t>• Logistics &amp; Supply Chain: Mordern aesthetic</a:t>
+                  <a:srgbClr val="FFFFFF"/>
+                </a:solidFill>
+                <a:latin typeface="Source Sans Pro"/>
+              </a:defRPr>
+            </a:pPr>
+            <a:r>
+              <a:t>• Logistics &amp; Supply Chain: Minimalistic aesthetic</a:t>
             </a:r>
           </a:p>
           <a:p>
             <a:pPr>
               <a:defRPr sz="1400" b="0">
                 <a:solidFill>
-                  <a:srgbClr val="EA580C"/>
+                  <a:srgbClr val="FFFFFF"/>
                 </a:solidFill>
                 <a:latin typeface="Source Sans Pro"/>
               </a:defRPr>
@@ -3459,7 +3459,7 @@
             <a:pPr>
               <a:defRPr sz="1800" b="0">
                 <a:solidFill>
-                  <a:srgbClr val="EA580C"/>
+                  <a:srgbClr val="FFFFFF"/>
                 </a:solidFill>
                 <a:latin typeface="Source Sans Pro"/>
               </a:defRPr>
@@ -3472,20 +3472,20 @@
             <a:pPr>
               <a:defRPr sz="1400" b="0">
                 <a:solidFill>
-                  <a:srgbClr val="EA580C"/>
-                </a:solidFill>
-                <a:latin typeface="Source Sans Pro"/>
-              </a:defRPr>
-            </a:pPr>
-            <a:r>
-              <a:t>• Photography style for Flipkart: Mordern and E-commerce</a:t>
+                  <a:srgbClr val="FFFFFF"/>
+                </a:solidFill>
+                <a:latin typeface="Source Sans Pro"/>
+              </a:defRPr>
+            </a:pPr>
+            <a:r>
+              <a:t>• Photography style for Flipkart: Minimalistic and E-commerce</a:t>
             </a:r>
           </a:p>
           <a:p>
             <a:pPr>
               <a:defRPr sz="1400" b="0">
                 <a:solidFill>
-                  <a:srgbClr val="EA580C"/>
+                  <a:srgbClr val="FFFFFF"/>
                 </a:solidFill>
                 <a:latin typeface="Source Sans Pro"/>
               </a:defRPr>
@@ -3498,7 +3498,7 @@
             <a:pPr>
               <a:defRPr sz="1400" b="0">
                 <a:solidFill>
-                  <a:srgbClr val="EA580C"/>
+                  <a:srgbClr val="FFFFFF"/>
                 </a:solidFill>
                 <a:latin typeface="Source Sans Pro"/>
               </a:defRPr>
@@ -3511,7 +3511,7 @@
             <a:pPr>
               <a:defRPr sz="1400" b="0">
                 <a:solidFill>
-                  <a:srgbClr val="EA580C"/>
+                  <a:srgbClr val="FFFFFF"/>
                 </a:solidFill>
                 <a:latin typeface="Source Sans Pro"/>
               </a:defRPr>
@@ -3524,7 +3524,7 @@
             <a:pPr>
               <a:defRPr sz="1400" b="0">
                 <a:solidFill>
-                  <a:srgbClr val="EA580C"/>
+                  <a:srgbClr val="FFFFFF"/>
                 </a:solidFill>
                 <a:latin typeface="Source Sans Pro"/>
               </a:defRPr>
@@ -3605,7 +3605,7 @@
             <a:pPr algn="ctr">
               <a:defRPr sz="800" b="0">
                 <a:solidFill>
-                  <a:srgbClr val="EA580C"/>
+                  <a:srgbClr val="FFFFFF"/>
                 </a:solidFill>
                 <a:latin typeface="Source Sans Pro"/>
               </a:defRPr>
@@ -3686,7 +3686,7 @@
             <a:pPr algn="ctr">
               <a:defRPr sz="800" b="0">
                 <a:solidFill>
-                  <a:srgbClr val="EA580C"/>
+                  <a:srgbClr val="FFFFFF"/>
                 </a:solidFill>
                 <a:latin typeface="Source Sans Pro"/>
               </a:defRPr>
@@ -3767,7 +3767,7 @@
             <a:pPr algn="ctr">
               <a:defRPr sz="800" b="0">
                 <a:solidFill>
-                  <a:srgbClr val="EA580C"/>
+                  <a:srgbClr val="FFFFFF"/>
                 </a:solidFill>
                 <a:latin typeface="Source Sans Pro"/>
               </a:defRPr>
@@ -3803,7 +3803,7 @@
             <a:pPr algn="l">
               <a:defRPr sz="1000" b="0">
                 <a:solidFill>
-                  <a:srgbClr val="EA580C"/>
+                  <a:srgbClr val="FFFFFF"/>
                 </a:solidFill>
                 <a:latin typeface="Source Sans Pro"/>
               </a:defRPr>
@@ -3839,7 +3839,7 @@
             <a:pPr algn="r">
               <a:defRPr sz="1000" b="0">
                 <a:solidFill>
-                  <a:srgbClr val="EA580C"/>
+                  <a:srgbClr val="FFFFFF"/>
                 </a:solidFill>
                 <a:latin typeface="Source Sans Pro"/>
               </a:defRPr>
@@ -3901,7 +3901,7 @@
             <a:pPr>
               <a:defRPr sz="2800" b="1">
                 <a:solidFill>
-                  <a:srgbClr val="EA580C"/>
+                  <a:srgbClr val="1F2937"/>
                 </a:solidFill>
                 <a:latin typeface="Inter"/>
               </a:defRPr>
@@ -3928,7 +3928,7 @@
           </a:prstGeom>
           <a:ln w="25400">
             <a:solidFill>
-              <a:srgbClr val="EA580C"/>
+              <a:srgbClr val="1F2937"/>
             </a:solidFill>
           </a:ln>
         </p:spPr>
@@ -3999,7 +3999,7 @@
           </a:prstGeom>
           <a:ln w="19050">
             <a:solidFill>
-              <a:srgbClr val="EA580C"/>
+              <a:srgbClr val="1F2937"/>
             </a:solidFill>
           </a:ln>
         </p:spPr>
@@ -4043,7 +4043,7 @@
             <a:pPr>
               <a:defRPr sz="1200" b="1">
                 <a:solidFill>
-                  <a:srgbClr val="EA580C"/>
+                  <a:srgbClr val="1F2937"/>
                 </a:solidFill>
                 <a:latin typeface="Source Sans Pro"/>
               </a:defRPr>
@@ -4106,7 +4106,7 @@
           </a:prstGeom>
           <a:ln w="19050">
             <a:solidFill>
-              <a:srgbClr val="EA580C"/>
+              <a:srgbClr val="1F2937"/>
             </a:solidFill>
           </a:ln>
         </p:spPr>
@@ -4150,7 +4150,7 @@
             <a:pPr>
               <a:defRPr sz="1200" b="1">
                 <a:solidFill>
-                  <a:srgbClr val="EA580C"/>
+                  <a:srgbClr val="1F2937"/>
                 </a:solidFill>
                 <a:latin typeface="Source Sans Pro"/>
               </a:defRPr>
@@ -4213,7 +4213,7 @@
           </a:prstGeom>
           <a:ln w="19050">
             <a:solidFill>
-              <a:srgbClr val="EA580C"/>
+              <a:srgbClr val="1F2937"/>
             </a:solidFill>
           </a:ln>
         </p:spPr>
@@ -4257,7 +4257,7 @@
             <a:pPr>
               <a:defRPr sz="1200" b="1">
                 <a:solidFill>
-                  <a:srgbClr val="EA580C"/>
+                  <a:srgbClr val="1F2937"/>
                 </a:solidFill>
                 <a:latin typeface="Source Sans Pro"/>
               </a:defRPr>
@@ -4320,7 +4320,7 @@
           </a:prstGeom>
           <a:ln w="19050">
             <a:solidFill>
-              <a:srgbClr val="EA580C"/>
+              <a:srgbClr val="1F2937"/>
             </a:solidFill>
           </a:ln>
         </p:spPr>
@@ -4364,7 +4364,7 @@
             <a:pPr>
               <a:defRPr sz="1200" b="1">
                 <a:solidFill>
-                  <a:srgbClr val="EA580C"/>
+                  <a:srgbClr val="1F2937"/>
                 </a:solidFill>
                 <a:latin typeface="Source Sans Pro"/>
               </a:defRPr>
@@ -4535,7 +4535,7 @@
           </a:prstGeom>
           <a:ln w="19050">
             <a:solidFill>
-              <a:srgbClr val="EA580C"/>
+              <a:srgbClr val="1F2937"/>
             </a:solidFill>
           </a:ln>
         </p:spPr>
@@ -4579,7 +4579,7 @@
             <a:pPr>
               <a:defRPr sz="1200" b="1">
                 <a:solidFill>
-                  <a:srgbClr val="EA580C"/>
+                  <a:srgbClr val="1F2937"/>
                 </a:solidFill>
                 <a:latin typeface="Source Sans Pro"/>
               </a:defRPr>
@@ -4750,7 +4750,7 @@
           </a:prstGeom>
           <a:ln w="19050">
             <a:solidFill>
-              <a:srgbClr val="EA580C"/>
+              <a:srgbClr val="1F2937"/>
             </a:solidFill>
           </a:ln>
         </p:spPr>
@@ -4794,7 +4794,7 @@
             <a:pPr>
               <a:defRPr sz="1200" b="1">
                 <a:solidFill>
-                  <a:srgbClr val="EA580C"/>
+                  <a:srgbClr val="1F2937"/>
                 </a:solidFill>
                 <a:latin typeface="Source Sans Pro"/>
               </a:defRPr>
@@ -4965,7 +4965,7 @@
           </a:prstGeom>
           <a:ln w="19050">
             <a:solidFill>
-              <a:srgbClr val="EA580C"/>
+              <a:srgbClr val="1F2937"/>
             </a:solidFill>
           </a:ln>
         </p:spPr>
@@ -5009,7 +5009,7 @@
             <a:pPr>
               <a:defRPr sz="1200" b="1">
                 <a:solidFill>
-                  <a:srgbClr val="EA580C"/>
+                  <a:srgbClr val="1F2937"/>
                 </a:solidFill>
                 <a:latin typeface="Source Sans Pro"/>
               </a:defRPr>
@@ -5273,7 +5273,7 @@
           </a:prstGeom>
           <a:ln w="25400">
             <a:solidFill>
-              <a:srgbClr val="EA580C"/>
+              <a:srgbClr val="1F2937"/>
             </a:solidFill>
           </a:ln>
         </p:spPr>
@@ -5317,7 +5317,7 @@
             <a:pPr algn="l">
               <a:defRPr sz="2800" b="1">
                 <a:solidFill>
-                  <a:srgbClr val="EA580C"/>
+                  <a:srgbClr val="1F2937"/>
                 </a:solidFill>
                 <a:latin typeface="Inter"/>
               </a:defRPr>
@@ -5362,8 +5362,140 @@
         </p:nvSpPr>
         <p:spPr>
           <a:xfrm>
-            <a:off x="1143000" y="457200"/>
-            <a:ext cx="6858000" cy="742950"/>
+            <a:off x="800100" y="1051560"/>
+            <a:ext cx="6858000" cy="2971800"/>
+          </a:xfrm>
+          <a:prstGeom prst="rect">
+            <a:avLst/>
+          </a:prstGeom>
+          <a:noFill/>
+        </p:spPr>
+        <p:txBody>
+          <a:bodyPr wrap="square" lIns="0" rIns="0" tIns="0" bIns="0">
+            <a:spAutoFit/>
+          </a:bodyPr>
+          <a:lstStyle/>
+          <a:p>
+            <a:pPr algn="l">
+              <a:spcAft>
+                <a:spcPts val="800"/>
+              </a:spcAft>
+              <a:defRPr sz="2000" b="0">
+                <a:solidFill>
+                  <a:srgbClr val="FFFFFF"/>
+                </a:solidFill>
+                <a:latin typeface="Source Sans Pro"/>
+              </a:defRPr>
+            </a:pPr>
+            <a:r>
+              <a:t>Vision: To be the leading force in technological innovation that empowers businesses and individuals to achieve their full potential.</a:t>
+            </a:r>
+          </a:p>
+          <a:p>
+            <a:pPr algn="l">
+              <a:spcAft>
+                <a:spcPts val="800"/>
+              </a:spcAft>
+              <a:defRPr sz="2000" b="0">
+                <a:solidFill>
+                  <a:srgbClr val="FFFFFF"/>
+                </a:solidFill>
+                <a:latin typeface="Source Sans Pro"/>
+              </a:defRPr>
+            </a:pPr>
+          </a:p>
+          <a:p>
+            <a:pPr algn="l">
+              <a:spcAft>
+                <a:spcPts val="800"/>
+              </a:spcAft>
+              <a:defRPr sz="2000" b="0">
+                <a:solidFill>
+                  <a:srgbClr val="FFFFFF"/>
+                </a:solidFill>
+                <a:latin typeface="Source Sans Pro"/>
+              </a:defRPr>
+            </a:pPr>
+            <a:r>
+              <a:t>Mission: We create cutting-edge technology solutions that simplify complex challenges and drive meaningful progress for our clients.</a:t>
+            </a:r>
+          </a:p>
+          <a:p>
+            <a:pPr algn="l">
+              <a:spcAft>
+                <a:spcPts val="800"/>
+              </a:spcAft>
+              <a:defRPr sz="2000" b="0">
+                <a:solidFill>
+                  <a:srgbClr val="FFFFFF"/>
+                </a:solidFill>
+                <a:latin typeface="Source Sans Pro"/>
+              </a:defRPr>
+            </a:pPr>
+          </a:p>
+          <a:p>
+            <a:pPr algn="l">
+              <a:spcAft>
+                <a:spcPts val="800"/>
+              </a:spcAft>
+              <a:defRPr sz="2000" b="0">
+                <a:solidFill>
+                  <a:srgbClr val="FFFFFF"/>
+                </a:solidFill>
+                <a:latin typeface="Source Sans Pro"/>
+              </a:defRPr>
+            </a:pPr>
+            <a:r>
+              <a:t>Core Values: Our foundation rests on customer-centricity, innovation, affordability, trust, reliability, convenience, inclusivity, agility, empowerment, and growth, which together guide our commitment to excellence and drive our mission to create meaningful impact for our clients.</a:t>
+            </a:r>
+          </a:p>
+        </p:txBody>
+      </p:sp>
+      <p:cxnSp>
+        <p:nvCxnSpPr>
+          <p:cNvPr id="3" name="Connector 2"/>
+          <p:cNvCxnSpPr/>
+          <p:nvPr/>
+        </p:nvCxnSpPr>
+        <p:spPr>
+          <a:xfrm>
+            <a:off x="457200" y="4914900.0"/>
+            <a:ext cx="8229600" cy="0.0"/>
+          </a:xfrm>
+          <a:prstGeom prst="line">
+            <a:avLst/>
+          </a:prstGeom>
+          <a:ln w="25400">
+            <a:solidFill>
+              <a:srgbClr val="1F2937"/>
+            </a:solidFill>
+          </a:ln>
+        </p:spPr>
+        <p:style>
+          <a:lnRef idx="2">
+            <a:schemeClr val="accent1"/>
+          </a:lnRef>
+          <a:fillRef idx="0">
+            <a:schemeClr val="accent1"/>
+          </a:fillRef>
+          <a:effectRef idx="1">
+            <a:schemeClr val="accent1"/>
+          </a:effectRef>
+          <a:fontRef idx="minor">
+            <a:schemeClr val="tx1"/>
+          </a:fontRef>
+        </p:style>
+      </p:cxnSp>
+      <p:sp>
+        <p:nvSpPr>
+          <p:cNvPr id="4" name="TextBox 3"/>
+          <p:cNvSpPr txBox="1"/>
+          <p:nvPr/>
+        </p:nvSpPr>
+        <p:spPr>
+          <a:xfrm>
+            <a:off x="800100" y="5189220"/>
+            <a:ext cx="3657600" cy="731520"/>
           </a:xfrm>
           <a:prstGeom prst="rect">
             <a:avLst/>
@@ -5376,262 +5508,17 @@
           </a:bodyPr>
           <a:lstStyle/>
           <a:p>
-            <a:pPr algn="ctr">
-              <a:defRPr sz="3200" b="1">
-                <a:solidFill>
-                  <a:srgbClr val="EA580C"/>
+            <a:pPr algn="l">
+              <a:defRPr sz="2800" b="1">
+                <a:solidFill>
+                  <a:srgbClr val="1F2937"/>
                 </a:solidFill>
                 <a:latin typeface="Inter"/>
               </a:defRPr>
             </a:pPr>
             <a:r>
-              <a:t>Brand Purpose</a:t>
-            </a:r>
-          </a:p>
-        </p:txBody>
-      </p:sp>
-      <p:sp>
-        <p:nvSpPr>
-          <p:cNvPr id="3" name="TextBox 2"/>
-          <p:cNvSpPr txBox="1"/>
-          <p:nvPr/>
-        </p:nvSpPr>
-        <p:spPr>
-          <a:xfrm>
-            <a:off x="1828800" y="1943100"/>
-            <a:ext cx="5486400" cy="3714750"/>
-          </a:xfrm>
-          <a:prstGeom prst="rect">
-            <a:avLst/>
-          </a:prstGeom>
-          <a:noFill/>
-        </p:spPr>
-        <p:txBody>
-          <a:bodyPr wrap="square">
-            <a:spAutoFit/>
-          </a:bodyPr>
-          <a:lstStyle/>
-          <a:p>
-            <a:pPr algn="ctr">
-              <a:defRPr sz="2400" b="0">
-                <a:solidFill>
-                  <a:srgbClr val="EA580C"/>
-                </a:solidFill>
-                <a:latin typeface="Source Sans Pro"/>
-              </a:defRPr>
-            </a:pPr>
-            <a:r>
-              <a:t>Our Purpose</a:t>
-            </a:r>
-          </a:p>
-          <a:p>
-            <a:pPr>
-              <a:defRPr sz="1600" b="0">
-                <a:solidFill>
-                  <a:srgbClr val="FFFFFF"/>
-                </a:solidFill>
-                <a:latin typeface="Source Sans Pro"/>
-              </a:defRPr>
-            </a:pPr>
-          </a:p>
-          <a:p>
-            <a:pPr>
-              <a:defRPr sz="1600" b="0">
-                <a:solidFill>
-                  <a:srgbClr val="FFFFFF"/>
-                </a:solidFill>
-                <a:latin typeface="Source Sans Pro"/>
-              </a:defRPr>
-            </a:pPr>
-            <a:r>
-              <a:t>Vision: To be the leading force in technological innovation that empowers businesses and individuals to achieve their full potential.</a:t>
-            </a:r>
-          </a:p>
-          <a:p>
-            <a:pPr>
-              <a:defRPr sz="1600" b="0">
-                <a:solidFill>
-                  <a:srgbClr val="FFFFFF"/>
-                </a:solidFill>
-                <a:latin typeface="Source Sans Pro"/>
-              </a:defRPr>
-            </a:pPr>
-          </a:p>
-          <a:p>
-            <a:pPr>
-              <a:defRPr sz="1600" b="0">
-                <a:solidFill>
-                  <a:srgbClr val="FFFFFF"/>
-                </a:solidFill>
-                <a:latin typeface="Source Sans Pro"/>
-              </a:defRPr>
-            </a:pPr>
-            <a:r>
-              <a:t>Mission: We create cutting-edge technology solutions that simplify complex challenges and drive meaningful progress for our clients.</a:t>
-            </a:r>
-          </a:p>
-          <a:p>
-            <a:pPr>
-              <a:defRPr sz="1600" b="0">
-                <a:solidFill>
-                  <a:srgbClr val="FFFFFF"/>
-                </a:solidFill>
-                <a:latin typeface="Source Sans Pro"/>
-              </a:defRPr>
-            </a:pPr>
-          </a:p>
-          <a:p>
-            <a:pPr>
-              <a:defRPr sz="1600" b="0">
-                <a:solidFill>
-                  <a:srgbClr val="FFFFFF"/>
-                </a:solidFill>
-                <a:latin typeface="Source Sans Pro"/>
-              </a:defRPr>
-            </a:pPr>
-            <a:r>
-              <a:t>Core Values:</a:t>
-            </a:r>
-          </a:p>
-          <a:p>
-            <a:pPr>
-              <a:defRPr sz="1600" b="0">
-                <a:solidFill>
-                  <a:srgbClr val="FFFFFF"/>
-                </a:solidFill>
-                <a:latin typeface="Source Sans Pro"/>
-              </a:defRPr>
-            </a:pPr>
-            <a:r>
-              <a:t>• Customer-Centricity: Driving progress through creative thinking and breakthrough solutions</a:t>
-            </a:r>
-          </a:p>
-          <a:p>
-            <a:pPr>
-              <a:defRPr sz="1600" b="0">
-                <a:solidFill>
-                  <a:srgbClr val="FFFFFF"/>
-                </a:solidFill>
-                <a:latin typeface="Source Sans Pro"/>
-              </a:defRPr>
-            </a:pPr>
-            <a:r>
-              <a:t>• Innovation: Building trust through transparent and reliable service delivery</a:t>
-            </a:r>
-          </a:p>
-          <a:p>
-            <a:pPr>
-              <a:defRPr sz="1600" b="0">
-                <a:solidFill>
-                  <a:srgbClr val="FFFFFF"/>
-                </a:solidFill>
-                <a:latin typeface="Source Sans Pro"/>
-              </a:defRPr>
-            </a:pPr>
-            <a:r>
-              <a:t>• Affordability: Putting people at the center of everything we do</a:t>
-            </a:r>
-          </a:p>
-          <a:p>
-            <a:pPr>
-              <a:defRPr sz="1600" b="0">
-                <a:solidFill>
-                  <a:srgbClr val="FFFFFF"/>
-                </a:solidFill>
-                <a:latin typeface="Source Sans Pro"/>
-              </a:defRPr>
-            </a:pPr>
-            <a:r>
-              <a:t>• Trust: Commitment to excellence in all our endeavors</a:t>
-            </a:r>
-          </a:p>
-          <a:p>
-            <a:pPr>
-              <a:defRPr sz="1600" b="0">
-                <a:solidFill>
-                  <a:srgbClr val="FFFFFF"/>
-                </a:solidFill>
-                <a:latin typeface="Source Sans Pro"/>
-              </a:defRPr>
-            </a:pPr>
-            <a:r>
-              <a:t>• Reliability: Commitment to excellence in all our endeavors</a:t>
-            </a:r>
-          </a:p>
-          <a:p>
-            <a:pPr>
-              <a:defRPr sz="1600" b="0">
-                <a:solidFill>
-                  <a:srgbClr val="FFFFFF"/>
-                </a:solidFill>
-                <a:latin typeface="Source Sans Pro"/>
-              </a:defRPr>
-            </a:pPr>
-            <a:r>
-              <a:t>• Convenience: Commitment to excellence in all our endeavors</a:t>
-            </a:r>
-          </a:p>
-          <a:p>
-            <a:pPr>
-              <a:defRPr sz="1600" b="0">
-                <a:solidFill>
-                  <a:srgbClr val="FFFFFF"/>
-                </a:solidFill>
-                <a:latin typeface="Source Sans Pro"/>
-              </a:defRPr>
-            </a:pPr>
-            <a:r>
-              <a:t>• Inclusivity: Commitment to excellence in all our endeavors</a:t>
-            </a:r>
-          </a:p>
-          <a:p>
-            <a:pPr>
-              <a:defRPr sz="1600" b="0">
-                <a:solidFill>
-                  <a:srgbClr val="FFFFFF"/>
-                </a:solidFill>
-                <a:latin typeface="Source Sans Pro"/>
-              </a:defRPr>
-            </a:pPr>
-            <a:r>
-              <a:t>• Agility: Commitment to excellence in all our endeavors</a:t>
-            </a:r>
-          </a:p>
-          <a:p>
-            <a:pPr>
-              <a:defRPr sz="1600" b="0">
-                <a:solidFill>
-                  <a:srgbClr val="FFFFFF"/>
-                </a:solidFill>
-                <a:latin typeface="Source Sans Pro"/>
-              </a:defRPr>
-            </a:pPr>
-            <a:r>
-              <a:t>• Empowerment: Commitment to excellence in all our endeavors</a:t>
-            </a:r>
-          </a:p>
-          <a:p>
-            <a:pPr>
-              <a:defRPr sz="1600" b="0">
-                <a:solidFill>
-                  <a:srgbClr val="FFFFFF"/>
-                </a:solidFill>
-                <a:latin typeface="Source Sans Pro"/>
-              </a:defRPr>
-            </a:pPr>
-            <a:r>
-              <a:t>• Growth: Commitment to excellence in all our endeavors</a:t>
-            </a:r>
-          </a:p>
-          <a:p>
-            <a:pPr>
-              <a:defRPr sz="1600" b="0">
-                <a:solidFill>
-                  <a:srgbClr val="FFFFFF"/>
-                </a:solidFill>
-                <a:latin typeface="Source Sans Pro"/>
-              </a:defRPr>
-            </a:pPr>
+              <a:t>BRAND PURPOSE</a:t>
+            </a:r>
           </a:p>
         </p:txBody>
       </p:sp>
@@ -5721,7 +5608,7 @@
             <a:pPr>
               <a:defRPr sz="3200" b="1">
                 <a:solidFill>
-                  <a:srgbClr val="EA580C"/>
+                  <a:srgbClr val="FFFFFF"/>
                 </a:solidFill>
                 <a:latin typeface="Inter"/>
               </a:defRPr>
@@ -5757,13 +5644,13 @@
             <a:pPr>
               <a:defRPr sz="1600" b="0">
                 <a:solidFill>
-                  <a:srgbClr val="EA580C"/>
-                </a:solidFill>
-                <a:latin typeface="Source Sans Pro"/>
-              </a:defRPr>
-            </a:pPr>
-            <a:r>
-              <a:t>In the bustling streets of India, where tradition meets modernity, there is a beacon of innovation that shines brightly – Flipkart. Born out of a vision to revolutionize the way Price-conscious shoppers, Middle-class families, Young professionals, Students, Digital-savvy consumers, Tier 2 &amp; Tier 3 city customers, Small businesses, and Value-seeking online buyers shop, Flipkart has become synonymous with cutting-edge E-commerce, Retail, Technology, Logistics &amp; Supply Chain solutions. At the heart of Flipkart's success lies a deep-rooted commitment to its core values – Customer-Centricity, Innovation, Affordability, Trust, Reliability, Convenience, Inclusivity, Agility, Empowerment, and Growth. From its humble beginnings, Flipkart has always placed the customer at the center of everything it does.</a:t>
+                  <a:srgbClr val="FFFFFF"/>
+                </a:solidFill>
+                <a:latin typeface="Source Sans Pro"/>
+              </a:defRPr>
+            </a:pPr>
+            <a:r>
+              <a:t>In the bustling streets of India, where the vibrant colors and sounds of daily life intertwine, there is a beacon of innovation and convenience that shines bright - Flipkart. Born from a vision to revolutionize the way people shop, Flipkart has become a household name, a trusted companion in the journey of millions of price-conscious shoppers, middle-class families, young professionals, students, and digital-savvy consumers across the nation. At the heart of Flipkart's success lies a deep commitment to customer-centricity and a relentless drive for innovation. We understand the needs and aspirations of our diverse customer base, from the bustling metropolises to the quaint towns of Tier 2 and Tier 3</a:t>
             </a:r>
           </a:p>
         </p:txBody>
@@ -5793,7 +5680,7 @@
             <a:pPr algn="l">
               <a:defRPr sz="1000" b="0">
                 <a:solidFill>
-                  <a:srgbClr val="EA580C"/>
+                  <a:srgbClr val="FFFFFF"/>
                 </a:solidFill>
                 <a:latin typeface="Source Sans Pro"/>
               </a:defRPr>
@@ -5829,7 +5716,7 @@
             <a:pPr algn="r">
               <a:defRPr sz="1000" b="0">
                 <a:solidFill>
-                  <a:srgbClr val="EA580C"/>
+                  <a:srgbClr val="FFFFFF"/>
                 </a:solidFill>
                 <a:latin typeface="Source Sans Pro"/>
               </a:defRPr>
@@ -5926,7 +5813,7 @@
             <a:pPr>
               <a:defRPr sz="3200" b="1">
                 <a:solidFill>
-                  <a:srgbClr val="EA580C"/>
+                  <a:srgbClr val="FFFFFF"/>
                 </a:solidFill>
                 <a:latin typeface="Inter"/>
               </a:defRPr>
@@ -5962,13 +5849,13 @@
             <a:pPr>
               <a:defRPr sz="1600" b="0">
                 <a:solidFill>
-                  <a:srgbClr val="EA580C"/>
-                </a:solidFill>
-                <a:latin typeface="Source Sans Pro"/>
-              </a:defRPr>
-            </a:pPr>
-            <a:r>
-              <a:t>Understanding the diverse needs and aspirations of its customers, Flipkart has continuously strived to innovate and create solutions that not only meet but exceed their expectations. Imagine a young professional in a bustling city, juggling work, family, and personal commitments. With just a few clicks on the Flipkart app, they can browse through a wide range of products, from the latest gadgets to trendy fashion, all at affordable prices. For a middle-class family living in a Tier 2 city, Flipkart is their go-to destination for quality products that fit their...</a:t>
+                  <a:srgbClr val="FFFFFF"/>
+                </a:solidFill>
+                <a:latin typeface="Source Sans Pro"/>
+              </a:defRPr>
+            </a:pPr>
+            <a:r>
+              <a:t>cities. We strive to empower every individual, every family, and every business, no matter how big or small, with our cutting-edge E-commerce, Retail, Technology, Logistics &amp; Supply Chain solutions. Our story is one of growth and empowerment, of inclusivity and affordability. We believe in the power of technology to bridge gaps and create opportunities for all. From providing a seamless shopping experience to offering a vast array of products at unbeatable prices, Flipkart is more than just a platform - it is a gateway to a world of possibilities. As...</a:t>
             </a:r>
           </a:p>
         </p:txBody>
@@ -5998,7 +5885,7 @@
             <a:pPr algn="l">
               <a:defRPr sz="1000" b="0">
                 <a:solidFill>
-                  <a:srgbClr val="EA580C"/>
+                  <a:srgbClr val="FFFFFF"/>
                 </a:solidFill>
                 <a:latin typeface="Source Sans Pro"/>
               </a:defRPr>
@@ -6034,7 +5921,7 @@
             <a:pPr algn="r">
               <a:defRPr sz="1000" b="0">
                 <a:solidFill>
-                  <a:srgbClr val="EA580C"/>
+                  <a:srgbClr val="FFFFFF"/>
                 </a:solidFill>
                 <a:latin typeface="Source Sans Pro"/>
               </a:defRPr>
@@ -6131,7 +6018,7 @@
             <a:pPr>
               <a:defRPr sz="3200" b="1">
                 <a:solidFill>
-                  <a:srgbClr val="EA580C"/>
+                  <a:srgbClr val="FFFFFF"/>
                 </a:solidFill>
                 <a:latin typeface="Inter"/>
               </a:defRPr>
@@ -6187,7 +6074,7 @@
       </p:sp>
       <p:pic>
         <p:nvPicPr>
-          <p:cNvPr id="5" name="Picture 4" descr="flipkart_logo_1_20250828_181950_a6e442d2.png"/>
+          <p:cNvPr id="5" name="Picture 4" descr="flipkart_logo_1_20250828_183749_a1922570.png"/>
           <p:cNvPicPr>
             <a:picLocks noChangeAspect="1"/>
           </p:cNvPicPr>
@@ -6234,7 +6121,7 @@
             <a:pPr algn="ctr">
               <a:defRPr sz="1200" b="0">
                 <a:solidFill>
-                  <a:srgbClr val="EA580C"/>
+                  <a:srgbClr val="FFFFFF"/>
                 </a:solidFill>
                 <a:latin typeface="Source Sans Pro"/>
               </a:defRPr>
@@ -6290,7 +6177,7 @@
       </p:sp>
       <p:pic>
         <p:nvPicPr>
-          <p:cNvPr id="8" name="Picture 7" descr="flipkart_logo_2_20250828_182008_4840f44b.png"/>
+          <p:cNvPr id="8" name="Picture 7" descr="flipkart_logo_2_20250828_183807_806cca0d.png"/>
           <p:cNvPicPr>
             <a:picLocks noChangeAspect="1"/>
           </p:cNvPicPr>
@@ -6337,7 +6224,7 @@
             <a:pPr algn="ctr">
               <a:defRPr sz="1200" b="0">
                 <a:solidFill>
-                  <a:srgbClr val="EA580C"/>
+                  <a:srgbClr val="FFFFFF"/>
                 </a:solidFill>
                 <a:latin typeface="Source Sans Pro"/>
               </a:defRPr>
@@ -6393,7 +6280,7 @@
       </p:sp>
       <p:pic>
         <p:nvPicPr>
-          <p:cNvPr id="11" name="Picture 10" descr="flipkart_logo_3_20250828_182027_c42fdb5b.png"/>
+          <p:cNvPr id="11" name="Picture 10" descr="flipkart_logo_3_20250828_183827_1b6975ad.png"/>
           <p:cNvPicPr>
             <a:picLocks noChangeAspect="1"/>
           </p:cNvPicPr>
@@ -6440,7 +6327,7 @@
             <a:pPr algn="ctr">
               <a:defRPr sz="1200" b="0">
                 <a:solidFill>
-                  <a:srgbClr val="EA580C"/>
+                  <a:srgbClr val="FFFFFF"/>
                 </a:solidFill>
                 <a:latin typeface="Source Sans Pro"/>
               </a:defRPr>
@@ -6476,7 +6363,7 @@
             <a:pPr algn="ctr">
               <a:defRPr sz="1200" b="0">
                 <a:solidFill>
-                  <a:srgbClr val="EA580C"/>
+                  <a:srgbClr val="FFFFFF"/>
                 </a:solidFill>
                 <a:latin typeface="Source Sans Pro"/>
               </a:defRPr>
@@ -6512,7 +6399,7 @@
             <a:pPr algn="l">
               <a:defRPr sz="1000" b="0">
                 <a:solidFill>
-                  <a:srgbClr val="EA580C"/>
+                  <a:srgbClr val="FFFFFF"/>
                 </a:solidFill>
                 <a:latin typeface="Source Sans Pro"/>
               </a:defRPr>
@@ -6548,7 +6435,7 @@
             <a:pPr algn="r">
               <a:defRPr sz="1000" b="0">
                 <a:solidFill>
-                  <a:srgbClr val="EA580C"/>
+                  <a:srgbClr val="FFFFFF"/>
                 </a:solidFill>
                 <a:latin typeface="Source Sans Pro"/>
               </a:defRPr>
@@ -6645,7 +6532,7 @@
             <a:pPr>
               <a:defRPr sz="3200" b="1">
                 <a:solidFill>
-                  <a:srgbClr val="EA580C"/>
+                  <a:srgbClr val="FFFFFF"/>
                 </a:solidFill>
                 <a:latin typeface="Inter"/>
               </a:defRPr>
@@ -6671,7 +6558,7 @@
             <a:avLst/>
           </a:prstGeom>
           <a:solidFill>
-            <a:srgbClr val="EA580C"/>
+            <a:srgbClr val="1F2937"/>
           </a:solidFill>
           <a:ln w="12700">
             <a:solidFill>
@@ -6726,7 +6613,7 @@
             <a:pPr>
               <a:defRPr sz="1000" b="0">
                 <a:solidFill>
-                  <a:srgbClr val="EA580C"/>
+                  <a:srgbClr val="FFFFFF"/>
                 </a:solidFill>
                 <a:latin typeface="Source Sans Pro"/>
               </a:defRPr>
@@ -6739,46 +6626,46 @@
             <a:pPr>
               <a:defRPr sz="1000" b="0">
                 <a:solidFill>
-                  <a:srgbClr val="EA580C"/>
-                </a:solidFill>
-                <a:latin typeface="Source Sans Pro"/>
-              </a:defRPr>
-            </a:pPr>
-            <a:r>
-              <a:t>#EA580C</a:t>
+                  <a:srgbClr val="FFFFFF"/>
+                </a:solidFill>
+                <a:latin typeface="Source Sans Pro"/>
+              </a:defRPr>
+            </a:pPr>
+            <a:r>
+              <a:t>#1F2937</a:t>
             </a:r>
           </a:p>
           <a:p>
             <a:pPr>
               <a:defRPr sz="1000" b="0">
                 <a:solidFill>
-                  <a:srgbClr val="EA580C"/>
-                </a:solidFill>
-                <a:latin typeface="Source Sans Pro"/>
-              </a:defRPr>
-            </a:pPr>
-            <a:r>
-              <a:t>RGB(234, 88, 12)</a:t>
+                  <a:srgbClr val="FFFFFF"/>
+                </a:solidFill>
+                <a:latin typeface="Source Sans Pro"/>
+              </a:defRPr>
+            </a:pPr>
+            <a:r>
+              <a:t>RGB(31, 41, 55)</a:t>
             </a:r>
           </a:p>
           <a:p>
             <a:pPr>
               <a:defRPr sz="1000" b="0">
                 <a:solidFill>
-                  <a:srgbClr val="EA580C"/>
-                </a:solidFill>
-                <a:latin typeface="Source Sans Pro"/>
-              </a:defRPr>
-            </a:pPr>
-            <a:r>
-              <a:t>CMYK(0, 62, 94, 8)</a:t>
+                  <a:srgbClr val="FFFFFF"/>
+                </a:solidFill>
+                <a:latin typeface="Source Sans Pro"/>
+              </a:defRPr>
+            </a:pPr>
+            <a:r>
+              <a:t>CMYK(43, 25, 0, 78)</a:t>
             </a:r>
           </a:p>
           <a:p>
             <a:pPr>
               <a:defRPr sz="1000" b="0">
                 <a:solidFill>
-                  <a:srgbClr val="EA580C"/>
+                  <a:srgbClr val="FFFFFF"/>
                 </a:solidFill>
                 <a:latin typeface="Source Sans Pro"/>
               </a:defRPr>
@@ -6798,6 +6685,139 @@
         <p:spPr>
           <a:xfrm>
             <a:off x="3886200" y="1943100"/>
+            <a:ext cx="2057400" cy="1485900"/>
+          </a:xfrm>
+          <a:prstGeom prst="rect">
+            <a:avLst/>
+          </a:prstGeom>
+          <a:solidFill>
+            <a:srgbClr val="C2410C"/>
+          </a:solidFill>
+          <a:ln w="12700">
+            <a:solidFill>
+              <a:srgbClr val="FFFFFF"/>
+            </a:solidFill>
+          </a:ln>
+        </p:spPr>
+        <p:style>
+          <a:lnRef idx="1">
+            <a:schemeClr val="accent1"/>
+          </a:lnRef>
+          <a:fillRef idx="3">
+            <a:schemeClr val="accent1"/>
+          </a:fillRef>
+          <a:effectRef idx="2">
+            <a:schemeClr val="accent1"/>
+          </a:effectRef>
+          <a:fontRef idx="minor">
+            <a:schemeClr val="lt1"/>
+          </a:fontRef>
+        </p:style>
+        <p:txBody>
+          <a:bodyPr rtlCol="0" anchor="ctr"/>
+          <a:lstStyle/>
+          <a:p>
+            <a:pPr algn="ctr"/>
+          </a:p>
+        </p:txBody>
+      </p:sp>
+      <p:sp>
+        <p:nvSpPr>
+          <p:cNvPr id="7" name="TextBox 6"/>
+          <p:cNvSpPr txBox="1"/>
+          <p:nvPr/>
+        </p:nvSpPr>
+        <p:spPr>
+          <a:xfrm>
+            <a:off x="3886200" y="3429000"/>
+            <a:ext cx="2057400" cy="1485900"/>
+          </a:xfrm>
+          <a:prstGeom prst="rect">
+            <a:avLst/>
+          </a:prstGeom>
+          <a:noFill/>
+        </p:spPr>
+        <p:txBody>
+          <a:bodyPr wrap="square">
+            <a:spAutoFit/>
+          </a:bodyPr>
+          <a:lstStyle/>
+          <a:p>
+            <a:pPr>
+              <a:defRPr sz="1000" b="0">
+                <a:solidFill>
+                  <a:srgbClr val="FFFFFF"/>
+                </a:solidFill>
+                <a:latin typeface="Source Sans Pro"/>
+              </a:defRPr>
+            </a:pPr>
+            <a:r>
+              <a:t>Secondary</a:t>
+            </a:r>
+          </a:p>
+          <a:p>
+            <a:pPr>
+              <a:defRPr sz="1000" b="0">
+                <a:solidFill>
+                  <a:srgbClr val="FFFFFF"/>
+                </a:solidFill>
+                <a:latin typeface="Source Sans Pro"/>
+              </a:defRPr>
+            </a:pPr>
+            <a:r>
+              <a:t>#C2410C</a:t>
+            </a:r>
+          </a:p>
+          <a:p>
+            <a:pPr>
+              <a:defRPr sz="1000" b="0">
+                <a:solidFill>
+                  <a:srgbClr val="FFFFFF"/>
+                </a:solidFill>
+                <a:latin typeface="Source Sans Pro"/>
+              </a:defRPr>
+            </a:pPr>
+            <a:r>
+              <a:t>RGB(194, 65, 12)</a:t>
+            </a:r>
+          </a:p>
+          <a:p>
+            <a:pPr>
+              <a:defRPr sz="1000" b="0">
+                <a:solidFill>
+                  <a:srgbClr val="FFFFFF"/>
+                </a:solidFill>
+                <a:latin typeface="Source Sans Pro"/>
+              </a:defRPr>
+            </a:pPr>
+            <a:r>
+              <a:t>CMYK(0, 66, 93, 23)</a:t>
+            </a:r>
+          </a:p>
+          <a:p>
+            <a:pPr>
+              <a:defRPr sz="1000" b="0">
+                <a:solidFill>
+                  <a:srgbClr val="FFFFFF"/>
+                </a:solidFill>
+                <a:latin typeface="Source Sans Pro"/>
+              </a:defRPr>
+            </a:pPr>
+            <a:r>
+              <a:t>Use Light Text</a:t>
+            </a:r>
+          </a:p>
+        </p:txBody>
+      </p:sp>
+      <p:sp>
+        <p:nvSpPr>
+          <p:cNvPr id="8" name="Rectangle 7"/>
+          <p:cNvSpPr/>
+          <p:nvPr/>
+        </p:nvSpPr>
+        <p:spPr>
+          <a:xfrm>
+            <a:off x="6629400" y="1943100"/>
             <a:ext cx="2057400" cy="1485900"/>
           </a:xfrm>
           <a:prstGeom prst="rect">
@@ -6836,13 +6856,13 @@
       </p:sp>
       <p:sp>
         <p:nvSpPr>
-          <p:cNvPr id="7" name="TextBox 6"/>
+          <p:cNvPr id="9" name="TextBox 8"/>
           <p:cNvSpPr txBox="1"/>
           <p:nvPr/>
         </p:nvSpPr>
         <p:spPr>
           <a:xfrm>
-            <a:off x="3886200" y="3429000"/>
+            <a:off x="6629400" y="3429000"/>
             <a:ext cx="2057400" cy="1485900"/>
           </a:xfrm>
           <a:prstGeom prst="rect">
@@ -6859,20 +6879,20 @@
             <a:pPr>
               <a:defRPr sz="1000" b="0">
                 <a:solidFill>
-                  <a:srgbClr val="EA580C"/>
-                </a:solidFill>
-                <a:latin typeface="Source Sans Pro"/>
-              </a:defRPr>
-            </a:pPr>
-            <a:r>
-              <a:t>Secondary</a:t>
+                  <a:srgbClr val="FFFFFF"/>
+                </a:solidFill>
+                <a:latin typeface="Source Sans Pro"/>
+              </a:defRPr>
+            </a:pPr>
+            <a:r>
+              <a:t>Accent</a:t>
             </a:r>
           </a:p>
           <a:p>
             <a:pPr>
               <a:defRPr sz="1000" b="0">
                 <a:solidFill>
-                  <a:srgbClr val="EA580C"/>
+                  <a:srgbClr val="FFFFFF"/>
                 </a:solidFill>
                 <a:latin typeface="Source Sans Pro"/>
               </a:defRPr>
@@ -6885,7 +6905,7 @@
             <a:pPr>
               <a:defRPr sz="1000" b="0">
                 <a:solidFill>
-                  <a:srgbClr val="EA580C"/>
+                  <a:srgbClr val="FFFFFF"/>
                 </a:solidFill>
                 <a:latin typeface="Source Sans Pro"/>
               </a:defRPr>
@@ -6898,7 +6918,7 @@
             <a:pPr>
               <a:defRPr sz="1000" b="0">
                 <a:solidFill>
-                  <a:srgbClr val="EA580C"/>
+                  <a:srgbClr val="FFFFFF"/>
                 </a:solidFill>
                 <a:latin typeface="Source Sans Pro"/>
               </a:defRPr>
@@ -6911,7 +6931,7 @@
             <a:pPr>
               <a:defRPr sz="1000" b="0">
                 <a:solidFill>
-                  <a:srgbClr val="EA580C"/>
+                  <a:srgbClr val="FFFFFF"/>
                 </a:solidFill>
                 <a:latin typeface="Source Sans Pro"/>
               </a:defRPr>
@@ -6924,13 +6944,146 @@
       </p:sp>
       <p:sp>
         <p:nvSpPr>
-          <p:cNvPr id="8" name="Rectangle 7"/>
+          <p:cNvPr id="10" name="Rectangle 9"/>
           <p:cNvSpPr/>
           <p:nvPr/>
         </p:nvSpPr>
         <p:spPr>
           <a:xfrm>
-            <a:off x="6629400" y="1943100"/>
+            <a:off x="1143000" y="5657850"/>
+            <a:ext cx="2057400" cy="1485900"/>
+          </a:xfrm>
+          <a:prstGeom prst="rect">
+            <a:avLst/>
+          </a:prstGeom>
+          <a:solidFill>
+            <a:srgbClr val="C2410C"/>
+          </a:solidFill>
+          <a:ln w="12700">
+            <a:solidFill>
+              <a:srgbClr val="FFFFFF"/>
+            </a:solidFill>
+          </a:ln>
+        </p:spPr>
+        <p:style>
+          <a:lnRef idx="1">
+            <a:schemeClr val="accent1"/>
+          </a:lnRef>
+          <a:fillRef idx="3">
+            <a:schemeClr val="accent1"/>
+          </a:fillRef>
+          <a:effectRef idx="2">
+            <a:schemeClr val="accent1"/>
+          </a:effectRef>
+          <a:fontRef idx="minor">
+            <a:schemeClr val="lt1"/>
+          </a:fontRef>
+        </p:style>
+        <p:txBody>
+          <a:bodyPr rtlCol="0" anchor="ctr"/>
+          <a:lstStyle/>
+          <a:p>
+            <a:pPr algn="ctr"/>
+          </a:p>
+        </p:txBody>
+      </p:sp>
+      <p:sp>
+        <p:nvSpPr>
+          <p:cNvPr id="11" name="TextBox 10"/>
+          <p:cNvSpPr txBox="1"/>
+          <p:nvPr/>
+        </p:nvSpPr>
+        <p:spPr>
+          <a:xfrm>
+            <a:off x="1143000" y="7143750"/>
+            <a:ext cx="2057400" cy="1485900"/>
+          </a:xfrm>
+          <a:prstGeom prst="rect">
+            <a:avLst/>
+          </a:prstGeom>
+          <a:noFill/>
+        </p:spPr>
+        <p:txBody>
+          <a:bodyPr wrap="square">
+            <a:spAutoFit/>
+          </a:bodyPr>
+          <a:lstStyle/>
+          <a:p>
+            <a:pPr>
+              <a:defRPr sz="1000" b="0">
+                <a:solidFill>
+                  <a:srgbClr val="FFFFFF"/>
+                </a:solidFill>
+                <a:latin typeface="Source Sans Pro"/>
+              </a:defRPr>
+            </a:pPr>
+            <a:r>
+              <a:t>Supporting</a:t>
+            </a:r>
+          </a:p>
+          <a:p>
+            <a:pPr>
+              <a:defRPr sz="1000" b="0">
+                <a:solidFill>
+                  <a:srgbClr val="FFFFFF"/>
+                </a:solidFill>
+                <a:latin typeface="Source Sans Pro"/>
+              </a:defRPr>
+            </a:pPr>
+            <a:r>
+              <a:t>#C2410C</a:t>
+            </a:r>
+          </a:p>
+          <a:p>
+            <a:pPr>
+              <a:defRPr sz="1000" b="0">
+                <a:solidFill>
+                  <a:srgbClr val="FFFFFF"/>
+                </a:solidFill>
+                <a:latin typeface="Source Sans Pro"/>
+              </a:defRPr>
+            </a:pPr>
+            <a:r>
+              <a:t>RGB(194, 65, 12)</a:t>
+            </a:r>
+          </a:p>
+          <a:p>
+            <a:pPr>
+              <a:defRPr sz="1000" b="0">
+                <a:solidFill>
+                  <a:srgbClr val="FFFFFF"/>
+                </a:solidFill>
+                <a:latin typeface="Source Sans Pro"/>
+              </a:defRPr>
+            </a:pPr>
+            <a:r>
+              <a:t>CMYK(0, 66, 93, 23)</a:t>
+            </a:r>
+          </a:p>
+          <a:p>
+            <a:pPr>
+              <a:defRPr sz="1000" b="0">
+                <a:solidFill>
+                  <a:srgbClr val="FFFFFF"/>
+                </a:solidFill>
+                <a:latin typeface="Source Sans Pro"/>
+              </a:defRPr>
+            </a:pPr>
+            <a:r>
+              <a:t>Use Light Text</a:t>
+            </a:r>
+          </a:p>
+        </p:txBody>
+      </p:sp>
+      <p:sp>
+        <p:nvSpPr>
+          <p:cNvPr id="12" name="Rectangle 11"/>
+          <p:cNvSpPr/>
+          <p:nvPr/>
+        </p:nvSpPr>
+        <p:spPr>
+          <a:xfrm>
+            <a:off x="3886200" y="5657850"/>
             <a:ext cx="2057400" cy="1485900"/>
           </a:xfrm>
           <a:prstGeom prst="rect">
@@ -6969,13 +7122,13 @@
       </p:sp>
       <p:sp>
         <p:nvSpPr>
-          <p:cNvPr id="9" name="TextBox 8"/>
+          <p:cNvPr id="13" name="TextBox 12"/>
           <p:cNvSpPr txBox="1"/>
           <p:nvPr/>
         </p:nvSpPr>
         <p:spPr>
           <a:xfrm>
-            <a:off x="6629400" y="3429000"/>
+            <a:off x="3886200" y="7143750"/>
             <a:ext cx="2057400" cy="1485900"/>
           </a:xfrm>
           <a:prstGeom prst="rect">
@@ -6992,20 +7145,20 @@
             <a:pPr>
               <a:defRPr sz="1000" b="0">
                 <a:solidFill>
-                  <a:srgbClr val="EA580C"/>
-                </a:solidFill>
-                <a:latin typeface="Source Sans Pro"/>
-              </a:defRPr>
-            </a:pPr>
-            <a:r>
-              <a:t>Accent</a:t>
+                  <a:srgbClr val="FFFFFF"/>
+                </a:solidFill>
+                <a:latin typeface="Source Sans Pro"/>
+              </a:defRPr>
+            </a:pPr>
+            <a:r>
+              <a:t>Hex_Codes</a:t>
             </a:r>
           </a:p>
           <a:p>
             <a:pPr>
               <a:defRPr sz="1000" b="0">
                 <a:solidFill>
-                  <a:srgbClr val="EA580C"/>
+                  <a:srgbClr val="FFFFFF"/>
                 </a:solidFill>
                 <a:latin typeface="Source Sans Pro"/>
               </a:defRPr>
@@ -7018,7 +7171,7 @@
             <a:pPr>
               <a:defRPr sz="1000" b="0">
                 <a:solidFill>
-                  <a:srgbClr val="EA580C"/>
+                  <a:srgbClr val="FFFFFF"/>
                 </a:solidFill>
                 <a:latin typeface="Source Sans Pro"/>
               </a:defRPr>
@@ -7031,7 +7184,7 @@
             <a:pPr>
               <a:defRPr sz="1000" b="0">
                 <a:solidFill>
-                  <a:srgbClr val="EA580C"/>
+                  <a:srgbClr val="FFFFFF"/>
                 </a:solidFill>
                 <a:latin typeface="Source Sans Pro"/>
               </a:defRPr>
@@ -7044,273 +7197,7 @@
             <a:pPr>
               <a:defRPr sz="1000" b="0">
                 <a:solidFill>
-                  <a:srgbClr val="EA580C"/>
-                </a:solidFill>
-                <a:latin typeface="Source Sans Pro"/>
-              </a:defRPr>
-            </a:pPr>
-            <a:r>
-              <a:t>Use Light Text</a:t>
-            </a:r>
-          </a:p>
-        </p:txBody>
-      </p:sp>
-      <p:sp>
-        <p:nvSpPr>
-          <p:cNvPr id="10" name="Rectangle 9"/>
-          <p:cNvSpPr/>
-          <p:nvPr/>
-        </p:nvSpPr>
-        <p:spPr>
-          <a:xfrm>
-            <a:off x="1143000" y="5657850"/>
-            <a:ext cx="2057400" cy="1485900"/>
-          </a:xfrm>
-          <a:prstGeom prst="rect">
-            <a:avLst/>
-          </a:prstGeom>
-          <a:solidFill>
-            <a:srgbClr val="FB923C"/>
-          </a:solidFill>
-          <a:ln w="12700">
-            <a:solidFill>
-              <a:srgbClr val="FFFFFF"/>
-            </a:solidFill>
-          </a:ln>
-        </p:spPr>
-        <p:style>
-          <a:lnRef idx="1">
-            <a:schemeClr val="accent1"/>
-          </a:lnRef>
-          <a:fillRef idx="3">
-            <a:schemeClr val="accent1"/>
-          </a:fillRef>
-          <a:effectRef idx="2">
-            <a:schemeClr val="accent1"/>
-          </a:effectRef>
-          <a:fontRef idx="minor">
-            <a:schemeClr val="lt1"/>
-          </a:fontRef>
-        </p:style>
-        <p:txBody>
-          <a:bodyPr rtlCol="0" anchor="ctr"/>
-          <a:lstStyle/>
-          <a:p>
-            <a:pPr algn="ctr"/>
-          </a:p>
-        </p:txBody>
-      </p:sp>
-      <p:sp>
-        <p:nvSpPr>
-          <p:cNvPr id="11" name="TextBox 10"/>
-          <p:cNvSpPr txBox="1"/>
-          <p:nvPr/>
-        </p:nvSpPr>
-        <p:spPr>
-          <a:xfrm>
-            <a:off x="1143000" y="7143750"/>
-            <a:ext cx="2057400" cy="1485900"/>
-          </a:xfrm>
-          <a:prstGeom prst="rect">
-            <a:avLst/>
-          </a:prstGeom>
-          <a:noFill/>
-        </p:spPr>
-        <p:txBody>
-          <a:bodyPr wrap="square">
-            <a:spAutoFit/>
-          </a:bodyPr>
-          <a:lstStyle/>
-          <a:p>
-            <a:pPr>
-              <a:defRPr sz="1000" b="0">
-                <a:solidFill>
-                  <a:srgbClr val="EA580C"/>
-                </a:solidFill>
-                <a:latin typeface="Source Sans Pro"/>
-              </a:defRPr>
-            </a:pPr>
-            <a:r>
-              <a:t>Supporting</a:t>
-            </a:r>
-          </a:p>
-          <a:p>
-            <a:pPr>
-              <a:defRPr sz="1000" b="0">
-                <a:solidFill>
-                  <a:srgbClr val="EA580C"/>
-                </a:solidFill>
-                <a:latin typeface="Source Sans Pro"/>
-              </a:defRPr>
-            </a:pPr>
-            <a:r>
-              <a:t>#FB923C</a:t>
-            </a:r>
-          </a:p>
-          <a:p>
-            <a:pPr>
-              <a:defRPr sz="1000" b="0">
-                <a:solidFill>
-                  <a:srgbClr val="EA580C"/>
-                </a:solidFill>
-                <a:latin typeface="Source Sans Pro"/>
-              </a:defRPr>
-            </a:pPr>
-            <a:r>
-              <a:t>RGB(251, 146, 60)</a:t>
-            </a:r>
-          </a:p>
-          <a:p>
-            <a:pPr>
-              <a:defRPr sz="1000" b="0">
-                <a:solidFill>
-                  <a:srgbClr val="EA580C"/>
-                </a:solidFill>
-                <a:latin typeface="Source Sans Pro"/>
-              </a:defRPr>
-            </a:pPr>
-            <a:r>
-              <a:t>CMYK(0, 41, 76, 1)</a:t>
-            </a:r>
-          </a:p>
-          <a:p>
-            <a:pPr>
-              <a:defRPr sz="1000" b="0">
-                <a:solidFill>
-                  <a:srgbClr val="EA580C"/>
-                </a:solidFill>
-                <a:latin typeface="Source Sans Pro"/>
-              </a:defRPr>
-            </a:pPr>
-            <a:r>
-              <a:t>Use Dark Text</a:t>
-            </a:r>
-          </a:p>
-        </p:txBody>
-      </p:sp>
-      <p:sp>
-        <p:nvSpPr>
-          <p:cNvPr id="12" name="Rectangle 11"/>
-          <p:cNvSpPr/>
-          <p:nvPr/>
-        </p:nvSpPr>
-        <p:spPr>
-          <a:xfrm>
-            <a:off x="3886200" y="5657850"/>
-            <a:ext cx="2057400" cy="1485900"/>
-          </a:xfrm>
-          <a:prstGeom prst="rect">
-            <a:avLst/>
-          </a:prstGeom>
-          <a:solidFill>
-            <a:srgbClr val="EA580C"/>
-          </a:solidFill>
-          <a:ln w="12700">
-            <a:solidFill>
-              <a:srgbClr val="FFFFFF"/>
-            </a:solidFill>
-          </a:ln>
-        </p:spPr>
-        <p:style>
-          <a:lnRef idx="1">
-            <a:schemeClr val="accent1"/>
-          </a:lnRef>
-          <a:fillRef idx="3">
-            <a:schemeClr val="accent1"/>
-          </a:fillRef>
-          <a:effectRef idx="2">
-            <a:schemeClr val="accent1"/>
-          </a:effectRef>
-          <a:fontRef idx="minor">
-            <a:schemeClr val="lt1"/>
-          </a:fontRef>
-        </p:style>
-        <p:txBody>
-          <a:bodyPr rtlCol="0" anchor="ctr"/>
-          <a:lstStyle/>
-          <a:p>
-            <a:pPr algn="ctr"/>
-          </a:p>
-        </p:txBody>
-      </p:sp>
-      <p:sp>
-        <p:nvSpPr>
-          <p:cNvPr id="13" name="TextBox 12"/>
-          <p:cNvSpPr txBox="1"/>
-          <p:nvPr/>
-        </p:nvSpPr>
-        <p:spPr>
-          <a:xfrm>
-            <a:off x="3886200" y="7143750"/>
-            <a:ext cx="2057400" cy="1485900"/>
-          </a:xfrm>
-          <a:prstGeom prst="rect">
-            <a:avLst/>
-          </a:prstGeom>
-          <a:noFill/>
-        </p:spPr>
-        <p:txBody>
-          <a:bodyPr wrap="square">
-            <a:spAutoFit/>
-          </a:bodyPr>
-          <a:lstStyle/>
-          <a:p>
-            <a:pPr>
-              <a:defRPr sz="1000" b="0">
-                <a:solidFill>
-                  <a:srgbClr val="EA580C"/>
-                </a:solidFill>
-                <a:latin typeface="Source Sans Pro"/>
-              </a:defRPr>
-            </a:pPr>
-            <a:r>
-              <a:t>Hex_Codes</a:t>
-            </a:r>
-          </a:p>
-          <a:p>
-            <a:pPr>
-              <a:defRPr sz="1000" b="0">
-                <a:solidFill>
-                  <a:srgbClr val="EA580C"/>
-                </a:solidFill>
-                <a:latin typeface="Source Sans Pro"/>
-              </a:defRPr>
-            </a:pPr>
-            <a:r>
-              <a:t>#EA580C</a:t>
-            </a:r>
-          </a:p>
-          <a:p>
-            <a:pPr>
-              <a:defRPr sz="1000" b="0">
-                <a:solidFill>
-                  <a:srgbClr val="EA580C"/>
-                </a:solidFill>
-                <a:latin typeface="Source Sans Pro"/>
-              </a:defRPr>
-            </a:pPr>
-            <a:r>
-              <a:t>RGB(234, 88, 12)</a:t>
-            </a:r>
-          </a:p>
-          <a:p>
-            <a:pPr>
-              <a:defRPr sz="1000" b="0">
-                <a:solidFill>
-                  <a:srgbClr val="EA580C"/>
-                </a:solidFill>
-                <a:latin typeface="Source Sans Pro"/>
-              </a:defRPr>
-            </a:pPr>
-            <a:r>
-              <a:t>CMYK(0, 62, 94, 8)</a:t>
-            </a:r>
-          </a:p>
-          <a:p>
-            <a:pPr>
-              <a:defRPr sz="1000" b="0">
-                <a:solidFill>
-                  <a:srgbClr val="EA580C"/>
+                  <a:srgbClr val="FFFFFF"/>
                 </a:solidFill>
                 <a:latin typeface="Source Sans Pro"/>
               </a:defRPr>
@@ -7346,7 +7233,7 @@
             <a:pPr algn="l">
               <a:defRPr sz="1000" b="0">
                 <a:solidFill>
-                  <a:srgbClr val="EA580C"/>
+                  <a:srgbClr val="FFFFFF"/>
                 </a:solidFill>
                 <a:latin typeface="Source Sans Pro"/>
               </a:defRPr>
@@ -7382,7 +7269,7 @@
             <a:pPr algn="r">
               <a:defRPr sz="1000" b="0">
                 <a:solidFill>
-                  <a:srgbClr val="EA580C"/>
+                  <a:srgbClr val="FFFFFF"/>
                 </a:solidFill>
                 <a:latin typeface="Source Sans Pro"/>
               </a:defRPr>
@@ -7479,7 +7366,7 @@
             <a:pPr>
               <a:defRPr sz="3200" b="1">
                 <a:solidFill>
-                  <a:srgbClr val="EA580C"/>
+                  <a:srgbClr val="FFFFFF"/>
                 </a:solidFill>
                 <a:latin typeface="Inter"/>
               </a:defRPr>
@@ -7515,7 +7402,7 @@
             <a:pPr>
               <a:defRPr sz="2000" b="0">
                 <a:solidFill>
-                  <a:srgbClr val="EA580C"/>
+                  <a:srgbClr val="FFFFFF"/>
                 </a:solidFill>
                 <a:latin typeface="Source Sans Pro"/>
               </a:defRPr>
@@ -7551,7 +7438,7 @@
             <a:pPr>
               <a:defRPr sz="3200" b="1">
                 <a:solidFill>
-                  <a:srgbClr val="EA580C"/>
+                  <a:srgbClr val="FFFFFF"/>
                 </a:solidFill>
                 <a:latin typeface="Inter"/>
               </a:defRPr>
@@ -7587,7 +7474,7 @@
             <a:pPr>
               <a:defRPr sz="2400" b="1">
                 <a:solidFill>
-                  <a:srgbClr val="EA580C"/>
+                  <a:srgbClr val="FFFFFF"/>
                 </a:solidFill>
                 <a:latin typeface="Inter"/>
               </a:defRPr>
@@ -7623,7 +7510,7 @@
             <a:pPr>
               <a:defRPr sz="2000" b="0">
                 <a:solidFill>
-                  <a:srgbClr val="EA580C"/>
+                  <a:srgbClr val="FFFFFF"/>
                 </a:solidFill>
                 <a:latin typeface="Inter"/>
               </a:defRPr>
@@ -7659,7 +7546,7 @@
             <a:pPr>
               <a:defRPr sz="2000" b="0">
                 <a:solidFill>
-                  <a:srgbClr val="EA580C"/>
+                  <a:srgbClr val="FFFFFF"/>
                 </a:solidFill>
                 <a:latin typeface="Source Sans Pro"/>
               </a:defRPr>
@@ -7695,7 +7582,7 @@
             <a:pPr>
               <a:defRPr sz="1600" b="0">
                 <a:solidFill>
-                  <a:srgbClr val="EA580C"/>
+                  <a:srgbClr val="FFFFFF"/>
                 </a:solidFill>
                 <a:latin typeface="Source Sans Pro"/>
               </a:defRPr>
@@ -7731,7 +7618,7 @@
             <a:pPr>
               <a:defRPr sz="1600" b="1">
                 <a:solidFill>
-                  <a:srgbClr val="EA580C"/>
+                  <a:srgbClr val="FFFFFF"/>
                 </a:solidFill>
                 <a:latin typeface="Source Sans Pro"/>
               </a:defRPr>
@@ -7767,7 +7654,7 @@
             <a:pPr>
               <a:defRPr sz="1200" b="0">
                 <a:solidFill>
-                  <a:srgbClr val="EA580C"/>
+                  <a:srgbClr val="FFFFFF"/>
                 </a:solidFill>
                 <a:latin typeface="Source Sans Pro"/>
               </a:defRPr>
@@ -7803,7 +7690,7 @@
             <a:pPr algn="l">
               <a:defRPr sz="1000" b="0">
                 <a:solidFill>
-                  <a:srgbClr val="EA580C"/>
+                  <a:srgbClr val="FFFFFF"/>
                 </a:solidFill>
                 <a:latin typeface="Source Sans Pro"/>
               </a:defRPr>
@@ -7839,7 +7726,7 @@
             <a:pPr algn="r">
               <a:defRPr sz="1000" b="0">
                 <a:solidFill>
-                  <a:srgbClr val="EA580C"/>
+                  <a:srgbClr val="FFFFFF"/>
                 </a:solidFill>
                 <a:latin typeface="Source Sans Pro"/>
               </a:defRPr>
